--- a/exports/pptx/lessons/middle-module-15-project-implementation/day-01-menu-tour.pptx
+++ b/exports/pptx/lessons/middle-module-15-project-implementation/day-01-menu-tour.pptx
@@ -17,9 +17,18 @@
     <p:sldId id="265" r:id="rId11"/>
     <p:sldId id="266" r:id="rId12"/>
     <p:sldId id="267" r:id="rId13"/>
+    <p:sldId id="268" r:id="rId14"/>
+    <p:sldId id="269" r:id="rId15"/>
+    <p:sldId id="270" r:id="rId16"/>
+    <p:sldId id="271" r:id="rId17"/>
+    <p:sldId id="272" r:id="rId18"/>
+    <p:sldId id="273" r:id="rId19"/>
+    <p:sldId id="274" r:id="rId20"/>
+    <p:sldId id="275" r:id="rId21"/>
+    <p:sldId id="276" r:id="rId22"/>
   </p:sldIdLst>
   <p:notesMasterIdLst>
-    <p:notesMasterId r:id="rId14"/>
+    <p:notesMasterId r:id="rId23"/>
   </p:notesMasterIdLst>
   <p:sldSz cx="9144000" cy="5143500"/>
   <p:notesSz cx="5143500" cy="9144000"/>
@@ -819,6 +828,622 @@
 </p:notes>
 </file>
 
+<file path=ppt/notesSlides/notesSlide13.xml><?xml version="1.0" encoding="utf-8"?>
+<p:notes xmlns:a="http://schemas.openxmlformats.org/drawingml/2006/main" xmlns:r="http://schemas.openxmlformats.org/officeDocument/2006/relationships" xmlns:p="http://schemas.openxmlformats.org/presentationml/2006/main">
+  <p:cSld>
+    <p:spTree>
+      <p:nvGrpSpPr>
+        <p:cNvPr id="1" name=""/>
+        <p:cNvGrpSpPr/>
+        <p:nvPr/>
+      </p:nvGrpSpPr>
+      <p:grpSpPr>
+        <a:xfrm>
+          <a:off x="0" y="0"/>
+          <a:ext cx="0" cy="0"/>
+          <a:chOff x="0" y="0"/>
+          <a:chExt cx="0" cy="0"/>
+        </a:xfrm>
+      </p:grpSpPr>
+      <p:sp>
+        <p:nvSpPr>
+          <p:cNvPr id="2" name="Slide Image Placeholder 1"/>
+          <p:cNvSpPr>
+            <a:spLocks noGrp="1" noRot="1" noChangeAspect="1"/>
+          </p:cNvSpPr>
+          <p:nvPr>
+            <p:ph type="sldImg"/>
+          </p:nvPr>
+        </p:nvSpPr>
+        <p:spPr/>
+      </p:sp>
+      <p:sp>
+        <p:nvSpPr>
+          <p:cNvPr id="3" name="Notes Placeholder 2"/>
+          <p:cNvSpPr>
+            <a:spLocks noGrp="1"/>
+          </p:cNvSpPr>
+          <p:nvPr>
+            <p:ph type="body" idx="1"/>
+          </p:nvPr>
+        </p:nvSpPr>
+        <p:spPr/>
+        <p:txBody>
+          <a:bodyPr/>
+          <a:lstStyle/>
+          <a:p>
+            <a:r>
+              <a:rPr lang="en-US" dirty="0"/>
+              <a:t/>
+            </a:r>
+            <a:endParaRPr lang="en-US" dirty="0"/>
+          </a:p>
+        </p:txBody>
+      </p:sp>
+      <p:sp>
+        <p:nvSpPr>
+          <p:cNvPr id="4" name="Slide Number Placeholder 3"/>
+          <p:cNvSpPr>
+            <a:spLocks noGrp="1"/>
+          </p:cNvSpPr>
+          <p:nvPr>
+            <p:ph type="sldNum" sz="quarter" idx="10"/>
+          </p:nvPr>
+        </p:nvSpPr>
+        <p:spPr/>
+        <p:txBody>
+          <a:bodyPr/>
+          <a:lstStyle/>
+          <a:p>
+            <a:fld id="{F7021451-1387-4CA6-816F-3879F97B5CBC}" type="slidenum">
+              <a:rPr lang="en-US"/>
+              <a:t>13</a:t>
+            </a:fld>
+            <a:endParaRPr lang="en-US"/>
+          </a:p>
+        </p:txBody>
+      </p:sp>
+    </p:spTree>
+    <p:extLst>
+      <p:ext uri="{BB962C8B-B14F-4D97-AF65-F5344CB8AC3E}">
+        <p14:creationId xmlns:p14="http://schemas.microsoft.com/office/powerpoint/2010/main" val="1024086991"/>
+      </p:ext>
+    </p:extLst>
+  </p:cSld>
+  <p:clrMapOvr>
+    <a:masterClrMapping/>
+  </p:clrMapOvr>
+</p:notes>
+</file>
+
+<file path=ppt/notesSlides/notesSlide14.xml><?xml version="1.0" encoding="utf-8"?>
+<p:notes xmlns:a="http://schemas.openxmlformats.org/drawingml/2006/main" xmlns:r="http://schemas.openxmlformats.org/officeDocument/2006/relationships" xmlns:p="http://schemas.openxmlformats.org/presentationml/2006/main">
+  <p:cSld>
+    <p:spTree>
+      <p:nvGrpSpPr>
+        <p:cNvPr id="1" name=""/>
+        <p:cNvGrpSpPr/>
+        <p:nvPr/>
+      </p:nvGrpSpPr>
+      <p:grpSpPr>
+        <a:xfrm>
+          <a:off x="0" y="0"/>
+          <a:ext cx="0" cy="0"/>
+          <a:chOff x="0" y="0"/>
+          <a:chExt cx="0" cy="0"/>
+        </a:xfrm>
+      </p:grpSpPr>
+      <p:sp>
+        <p:nvSpPr>
+          <p:cNvPr id="2" name="Slide Image Placeholder 1"/>
+          <p:cNvSpPr>
+            <a:spLocks noGrp="1" noRot="1" noChangeAspect="1"/>
+          </p:cNvSpPr>
+          <p:nvPr>
+            <p:ph type="sldImg"/>
+          </p:nvPr>
+        </p:nvSpPr>
+        <p:spPr/>
+      </p:sp>
+      <p:sp>
+        <p:nvSpPr>
+          <p:cNvPr id="3" name="Notes Placeholder 2"/>
+          <p:cNvSpPr>
+            <a:spLocks noGrp="1"/>
+          </p:cNvSpPr>
+          <p:nvPr>
+            <p:ph type="body" idx="1"/>
+          </p:nvPr>
+        </p:nvSpPr>
+        <p:spPr/>
+        <p:txBody>
+          <a:bodyPr/>
+          <a:lstStyle/>
+          <a:p>
+            <a:r>
+              <a:rPr lang="en-US" dirty="0"/>
+              <a:t/>
+            </a:r>
+            <a:endParaRPr lang="en-US" dirty="0"/>
+          </a:p>
+        </p:txBody>
+      </p:sp>
+      <p:sp>
+        <p:nvSpPr>
+          <p:cNvPr id="4" name="Slide Number Placeholder 3"/>
+          <p:cNvSpPr>
+            <a:spLocks noGrp="1"/>
+          </p:cNvSpPr>
+          <p:nvPr>
+            <p:ph type="sldNum" sz="quarter" idx="10"/>
+          </p:nvPr>
+        </p:nvSpPr>
+        <p:spPr/>
+        <p:txBody>
+          <a:bodyPr/>
+          <a:lstStyle/>
+          <a:p>
+            <a:fld id="{F7021451-1387-4CA6-816F-3879F97B5CBC}" type="slidenum">
+              <a:rPr lang="en-US"/>
+              <a:t>14</a:t>
+            </a:fld>
+            <a:endParaRPr lang="en-US"/>
+          </a:p>
+        </p:txBody>
+      </p:sp>
+    </p:spTree>
+    <p:extLst>
+      <p:ext uri="{BB962C8B-B14F-4D97-AF65-F5344CB8AC3E}">
+        <p14:creationId xmlns:p14="http://schemas.microsoft.com/office/powerpoint/2010/main" val="1024086991"/>
+      </p:ext>
+    </p:extLst>
+  </p:cSld>
+  <p:clrMapOvr>
+    <a:masterClrMapping/>
+  </p:clrMapOvr>
+</p:notes>
+</file>
+
+<file path=ppt/notesSlides/notesSlide15.xml><?xml version="1.0" encoding="utf-8"?>
+<p:notes xmlns:a="http://schemas.openxmlformats.org/drawingml/2006/main" xmlns:r="http://schemas.openxmlformats.org/officeDocument/2006/relationships" xmlns:p="http://schemas.openxmlformats.org/presentationml/2006/main">
+  <p:cSld>
+    <p:spTree>
+      <p:nvGrpSpPr>
+        <p:cNvPr id="1" name=""/>
+        <p:cNvGrpSpPr/>
+        <p:nvPr/>
+      </p:nvGrpSpPr>
+      <p:grpSpPr>
+        <a:xfrm>
+          <a:off x="0" y="0"/>
+          <a:ext cx="0" cy="0"/>
+          <a:chOff x="0" y="0"/>
+          <a:chExt cx="0" cy="0"/>
+        </a:xfrm>
+      </p:grpSpPr>
+      <p:sp>
+        <p:nvSpPr>
+          <p:cNvPr id="2" name="Slide Image Placeholder 1"/>
+          <p:cNvSpPr>
+            <a:spLocks noGrp="1" noRot="1" noChangeAspect="1"/>
+          </p:cNvSpPr>
+          <p:nvPr>
+            <p:ph type="sldImg"/>
+          </p:nvPr>
+        </p:nvSpPr>
+        <p:spPr/>
+      </p:sp>
+      <p:sp>
+        <p:nvSpPr>
+          <p:cNvPr id="3" name="Notes Placeholder 2"/>
+          <p:cNvSpPr>
+            <a:spLocks noGrp="1"/>
+          </p:cNvSpPr>
+          <p:nvPr>
+            <p:ph type="body" idx="1"/>
+          </p:nvPr>
+        </p:nvSpPr>
+        <p:spPr/>
+        <p:txBody>
+          <a:bodyPr/>
+          <a:lstStyle/>
+          <a:p>
+            <a:r>
+              <a:rPr lang="en-US" dirty="0"/>
+              <a:t/>
+            </a:r>
+            <a:endParaRPr lang="en-US" dirty="0"/>
+          </a:p>
+        </p:txBody>
+      </p:sp>
+      <p:sp>
+        <p:nvSpPr>
+          <p:cNvPr id="4" name="Slide Number Placeholder 3"/>
+          <p:cNvSpPr>
+            <a:spLocks noGrp="1"/>
+          </p:cNvSpPr>
+          <p:nvPr>
+            <p:ph type="sldNum" sz="quarter" idx="10"/>
+          </p:nvPr>
+        </p:nvSpPr>
+        <p:spPr/>
+        <p:txBody>
+          <a:bodyPr/>
+          <a:lstStyle/>
+          <a:p>
+            <a:fld id="{F7021451-1387-4CA6-816F-3879F97B5CBC}" type="slidenum">
+              <a:rPr lang="en-US"/>
+              <a:t>15</a:t>
+            </a:fld>
+            <a:endParaRPr lang="en-US"/>
+          </a:p>
+        </p:txBody>
+      </p:sp>
+    </p:spTree>
+    <p:extLst>
+      <p:ext uri="{BB962C8B-B14F-4D97-AF65-F5344CB8AC3E}">
+        <p14:creationId xmlns:p14="http://schemas.microsoft.com/office/powerpoint/2010/main" val="1024086991"/>
+      </p:ext>
+    </p:extLst>
+  </p:cSld>
+  <p:clrMapOvr>
+    <a:masterClrMapping/>
+  </p:clrMapOvr>
+</p:notes>
+</file>
+
+<file path=ppt/notesSlides/notesSlide16.xml><?xml version="1.0" encoding="utf-8"?>
+<p:notes xmlns:a="http://schemas.openxmlformats.org/drawingml/2006/main" xmlns:r="http://schemas.openxmlformats.org/officeDocument/2006/relationships" xmlns:p="http://schemas.openxmlformats.org/presentationml/2006/main">
+  <p:cSld>
+    <p:spTree>
+      <p:nvGrpSpPr>
+        <p:cNvPr id="1" name=""/>
+        <p:cNvGrpSpPr/>
+        <p:nvPr/>
+      </p:nvGrpSpPr>
+      <p:grpSpPr>
+        <a:xfrm>
+          <a:off x="0" y="0"/>
+          <a:ext cx="0" cy="0"/>
+          <a:chOff x="0" y="0"/>
+          <a:chExt cx="0" cy="0"/>
+        </a:xfrm>
+      </p:grpSpPr>
+      <p:sp>
+        <p:nvSpPr>
+          <p:cNvPr id="2" name="Slide Image Placeholder 1"/>
+          <p:cNvSpPr>
+            <a:spLocks noGrp="1" noRot="1" noChangeAspect="1"/>
+          </p:cNvSpPr>
+          <p:nvPr>
+            <p:ph type="sldImg"/>
+          </p:nvPr>
+        </p:nvSpPr>
+        <p:spPr/>
+      </p:sp>
+      <p:sp>
+        <p:nvSpPr>
+          <p:cNvPr id="3" name="Notes Placeholder 2"/>
+          <p:cNvSpPr>
+            <a:spLocks noGrp="1"/>
+          </p:cNvSpPr>
+          <p:nvPr>
+            <p:ph type="body" idx="1"/>
+          </p:nvPr>
+        </p:nvSpPr>
+        <p:spPr/>
+        <p:txBody>
+          <a:bodyPr/>
+          <a:lstStyle/>
+          <a:p>
+            <a:r>
+              <a:rPr lang="en-US" dirty="0"/>
+              <a:t/>
+            </a:r>
+            <a:endParaRPr lang="en-US" dirty="0"/>
+          </a:p>
+        </p:txBody>
+      </p:sp>
+      <p:sp>
+        <p:nvSpPr>
+          <p:cNvPr id="4" name="Slide Number Placeholder 3"/>
+          <p:cNvSpPr>
+            <a:spLocks noGrp="1"/>
+          </p:cNvSpPr>
+          <p:nvPr>
+            <p:ph type="sldNum" sz="quarter" idx="10"/>
+          </p:nvPr>
+        </p:nvSpPr>
+        <p:spPr/>
+        <p:txBody>
+          <a:bodyPr/>
+          <a:lstStyle/>
+          <a:p>
+            <a:fld id="{F7021451-1387-4CA6-816F-3879F97B5CBC}" type="slidenum">
+              <a:rPr lang="en-US"/>
+              <a:t>16</a:t>
+            </a:fld>
+            <a:endParaRPr lang="en-US"/>
+          </a:p>
+        </p:txBody>
+      </p:sp>
+    </p:spTree>
+    <p:extLst>
+      <p:ext uri="{BB962C8B-B14F-4D97-AF65-F5344CB8AC3E}">
+        <p14:creationId xmlns:p14="http://schemas.microsoft.com/office/powerpoint/2010/main" val="1024086991"/>
+      </p:ext>
+    </p:extLst>
+  </p:cSld>
+  <p:clrMapOvr>
+    <a:masterClrMapping/>
+  </p:clrMapOvr>
+</p:notes>
+</file>
+
+<file path=ppt/notesSlides/notesSlide17.xml><?xml version="1.0" encoding="utf-8"?>
+<p:notes xmlns:a="http://schemas.openxmlformats.org/drawingml/2006/main" xmlns:r="http://schemas.openxmlformats.org/officeDocument/2006/relationships" xmlns:p="http://schemas.openxmlformats.org/presentationml/2006/main">
+  <p:cSld>
+    <p:spTree>
+      <p:nvGrpSpPr>
+        <p:cNvPr id="1" name=""/>
+        <p:cNvGrpSpPr/>
+        <p:nvPr/>
+      </p:nvGrpSpPr>
+      <p:grpSpPr>
+        <a:xfrm>
+          <a:off x="0" y="0"/>
+          <a:ext cx="0" cy="0"/>
+          <a:chOff x="0" y="0"/>
+          <a:chExt cx="0" cy="0"/>
+        </a:xfrm>
+      </p:grpSpPr>
+      <p:sp>
+        <p:nvSpPr>
+          <p:cNvPr id="2" name="Slide Image Placeholder 1"/>
+          <p:cNvSpPr>
+            <a:spLocks noGrp="1" noRot="1" noChangeAspect="1"/>
+          </p:cNvSpPr>
+          <p:nvPr>
+            <p:ph type="sldImg"/>
+          </p:nvPr>
+        </p:nvSpPr>
+        <p:spPr/>
+      </p:sp>
+      <p:sp>
+        <p:nvSpPr>
+          <p:cNvPr id="3" name="Notes Placeholder 2"/>
+          <p:cNvSpPr>
+            <a:spLocks noGrp="1"/>
+          </p:cNvSpPr>
+          <p:nvPr>
+            <p:ph type="body" idx="1"/>
+          </p:nvPr>
+        </p:nvSpPr>
+        <p:spPr/>
+        <p:txBody>
+          <a:bodyPr/>
+          <a:lstStyle/>
+          <a:p>
+            <a:r>
+              <a:rPr lang="en-US" dirty="0"/>
+              <a:t/>
+            </a:r>
+            <a:endParaRPr lang="en-US" dirty="0"/>
+          </a:p>
+        </p:txBody>
+      </p:sp>
+      <p:sp>
+        <p:nvSpPr>
+          <p:cNvPr id="4" name="Slide Number Placeholder 3"/>
+          <p:cNvSpPr>
+            <a:spLocks noGrp="1"/>
+          </p:cNvSpPr>
+          <p:nvPr>
+            <p:ph type="sldNum" sz="quarter" idx="10"/>
+          </p:nvPr>
+        </p:nvSpPr>
+        <p:spPr/>
+        <p:txBody>
+          <a:bodyPr/>
+          <a:lstStyle/>
+          <a:p>
+            <a:fld id="{F7021451-1387-4CA6-816F-3879F97B5CBC}" type="slidenum">
+              <a:rPr lang="en-US"/>
+              <a:t>17</a:t>
+            </a:fld>
+            <a:endParaRPr lang="en-US"/>
+          </a:p>
+        </p:txBody>
+      </p:sp>
+    </p:spTree>
+    <p:extLst>
+      <p:ext uri="{BB962C8B-B14F-4D97-AF65-F5344CB8AC3E}">
+        <p14:creationId xmlns:p14="http://schemas.microsoft.com/office/powerpoint/2010/main" val="1024086991"/>
+      </p:ext>
+    </p:extLst>
+  </p:cSld>
+  <p:clrMapOvr>
+    <a:masterClrMapping/>
+  </p:clrMapOvr>
+</p:notes>
+</file>
+
+<file path=ppt/notesSlides/notesSlide18.xml><?xml version="1.0" encoding="utf-8"?>
+<p:notes xmlns:a="http://schemas.openxmlformats.org/drawingml/2006/main" xmlns:r="http://schemas.openxmlformats.org/officeDocument/2006/relationships" xmlns:p="http://schemas.openxmlformats.org/presentationml/2006/main">
+  <p:cSld>
+    <p:spTree>
+      <p:nvGrpSpPr>
+        <p:cNvPr id="1" name=""/>
+        <p:cNvGrpSpPr/>
+        <p:nvPr/>
+      </p:nvGrpSpPr>
+      <p:grpSpPr>
+        <a:xfrm>
+          <a:off x="0" y="0"/>
+          <a:ext cx="0" cy="0"/>
+          <a:chOff x="0" y="0"/>
+          <a:chExt cx="0" cy="0"/>
+        </a:xfrm>
+      </p:grpSpPr>
+      <p:sp>
+        <p:nvSpPr>
+          <p:cNvPr id="2" name="Slide Image Placeholder 1"/>
+          <p:cNvSpPr>
+            <a:spLocks noGrp="1" noRot="1" noChangeAspect="1"/>
+          </p:cNvSpPr>
+          <p:nvPr>
+            <p:ph type="sldImg"/>
+          </p:nvPr>
+        </p:nvSpPr>
+        <p:spPr/>
+      </p:sp>
+      <p:sp>
+        <p:nvSpPr>
+          <p:cNvPr id="3" name="Notes Placeholder 2"/>
+          <p:cNvSpPr>
+            <a:spLocks noGrp="1"/>
+          </p:cNvSpPr>
+          <p:nvPr>
+            <p:ph type="body" idx="1"/>
+          </p:nvPr>
+        </p:nvSpPr>
+        <p:spPr/>
+        <p:txBody>
+          <a:bodyPr/>
+          <a:lstStyle/>
+          <a:p>
+            <a:r>
+              <a:rPr lang="en-US" dirty="0"/>
+              <a:t/>
+            </a:r>
+            <a:endParaRPr lang="en-US" dirty="0"/>
+          </a:p>
+        </p:txBody>
+      </p:sp>
+      <p:sp>
+        <p:nvSpPr>
+          <p:cNvPr id="4" name="Slide Number Placeholder 3"/>
+          <p:cNvSpPr>
+            <a:spLocks noGrp="1"/>
+          </p:cNvSpPr>
+          <p:nvPr>
+            <p:ph type="sldNum" sz="quarter" idx="10"/>
+          </p:nvPr>
+        </p:nvSpPr>
+        <p:spPr/>
+        <p:txBody>
+          <a:bodyPr/>
+          <a:lstStyle/>
+          <a:p>
+            <a:fld id="{F7021451-1387-4CA6-816F-3879F97B5CBC}" type="slidenum">
+              <a:rPr lang="en-US"/>
+              <a:t>18</a:t>
+            </a:fld>
+            <a:endParaRPr lang="en-US"/>
+          </a:p>
+        </p:txBody>
+      </p:sp>
+    </p:spTree>
+    <p:extLst>
+      <p:ext uri="{BB962C8B-B14F-4D97-AF65-F5344CB8AC3E}">
+        <p14:creationId xmlns:p14="http://schemas.microsoft.com/office/powerpoint/2010/main" val="1024086991"/>
+      </p:ext>
+    </p:extLst>
+  </p:cSld>
+  <p:clrMapOvr>
+    <a:masterClrMapping/>
+  </p:clrMapOvr>
+</p:notes>
+</file>
+
+<file path=ppt/notesSlides/notesSlide19.xml><?xml version="1.0" encoding="utf-8"?>
+<p:notes xmlns:a="http://schemas.openxmlformats.org/drawingml/2006/main" xmlns:r="http://schemas.openxmlformats.org/officeDocument/2006/relationships" xmlns:p="http://schemas.openxmlformats.org/presentationml/2006/main">
+  <p:cSld>
+    <p:spTree>
+      <p:nvGrpSpPr>
+        <p:cNvPr id="1" name=""/>
+        <p:cNvGrpSpPr/>
+        <p:nvPr/>
+      </p:nvGrpSpPr>
+      <p:grpSpPr>
+        <a:xfrm>
+          <a:off x="0" y="0"/>
+          <a:ext cx="0" cy="0"/>
+          <a:chOff x="0" y="0"/>
+          <a:chExt cx="0" cy="0"/>
+        </a:xfrm>
+      </p:grpSpPr>
+      <p:sp>
+        <p:nvSpPr>
+          <p:cNvPr id="2" name="Slide Image Placeholder 1"/>
+          <p:cNvSpPr>
+            <a:spLocks noGrp="1" noRot="1" noChangeAspect="1"/>
+          </p:cNvSpPr>
+          <p:nvPr>
+            <p:ph type="sldImg"/>
+          </p:nvPr>
+        </p:nvSpPr>
+        <p:spPr/>
+      </p:sp>
+      <p:sp>
+        <p:nvSpPr>
+          <p:cNvPr id="3" name="Notes Placeholder 2"/>
+          <p:cNvSpPr>
+            <a:spLocks noGrp="1"/>
+          </p:cNvSpPr>
+          <p:nvPr>
+            <p:ph type="body" idx="1"/>
+          </p:nvPr>
+        </p:nvSpPr>
+        <p:spPr/>
+        <p:txBody>
+          <a:bodyPr/>
+          <a:lstStyle/>
+          <a:p>
+            <a:r>
+              <a:rPr lang="en-US" dirty="0"/>
+              <a:t/>
+            </a:r>
+            <a:endParaRPr lang="en-US" dirty="0"/>
+          </a:p>
+        </p:txBody>
+      </p:sp>
+      <p:sp>
+        <p:nvSpPr>
+          <p:cNvPr id="4" name="Slide Number Placeholder 3"/>
+          <p:cNvSpPr>
+            <a:spLocks noGrp="1"/>
+          </p:cNvSpPr>
+          <p:nvPr>
+            <p:ph type="sldNum" sz="quarter" idx="10"/>
+          </p:nvPr>
+        </p:nvSpPr>
+        <p:spPr/>
+        <p:txBody>
+          <a:bodyPr/>
+          <a:lstStyle/>
+          <a:p>
+            <a:fld id="{F7021451-1387-4CA6-816F-3879F97B5CBC}" type="slidenum">
+              <a:rPr lang="en-US"/>
+              <a:t>19</a:t>
+            </a:fld>
+            <a:endParaRPr lang="en-US"/>
+          </a:p>
+        </p:txBody>
+      </p:sp>
+    </p:spTree>
+    <p:extLst>
+      <p:ext uri="{BB962C8B-B14F-4D97-AF65-F5344CB8AC3E}">
+        <p14:creationId xmlns:p14="http://schemas.microsoft.com/office/powerpoint/2010/main" val="1024086991"/>
+      </p:ext>
+    </p:extLst>
+  </p:cSld>
+  <p:clrMapOvr>
+    <a:masterClrMapping/>
+  </p:clrMapOvr>
+</p:notes>
+</file>
+
 <file path=ppt/notesSlides/notesSlide2.xml><?xml version="1.0" encoding="utf-8"?>
 <p:notes xmlns:a="http://schemas.openxmlformats.org/drawingml/2006/main" xmlns:r="http://schemas.openxmlformats.org/officeDocument/2006/relationships" xmlns:p="http://schemas.openxmlformats.org/presentationml/2006/main">
   <p:cSld>
@@ -889,6 +1514,182 @@
             <a:fld id="{F7021451-1387-4CA6-816F-3879F97B5CBC}" type="slidenum">
               <a:rPr lang="en-US"/>
               <a:t>2</a:t>
+            </a:fld>
+            <a:endParaRPr lang="en-US"/>
+          </a:p>
+        </p:txBody>
+      </p:sp>
+    </p:spTree>
+    <p:extLst>
+      <p:ext uri="{BB962C8B-B14F-4D97-AF65-F5344CB8AC3E}">
+        <p14:creationId xmlns:p14="http://schemas.microsoft.com/office/powerpoint/2010/main" val="1024086991"/>
+      </p:ext>
+    </p:extLst>
+  </p:cSld>
+  <p:clrMapOvr>
+    <a:masterClrMapping/>
+  </p:clrMapOvr>
+</p:notes>
+</file>
+
+<file path=ppt/notesSlides/notesSlide20.xml><?xml version="1.0" encoding="utf-8"?>
+<p:notes xmlns:a="http://schemas.openxmlformats.org/drawingml/2006/main" xmlns:r="http://schemas.openxmlformats.org/officeDocument/2006/relationships" xmlns:p="http://schemas.openxmlformats.org/presentationml/2006/main">
+  <p:cSld>
+    <p:spTree>
+      <p:nvGrpSpPr>
+        <p:cNvPr id="1" name=""/>
+        <p:cNvGrpSpPr/>
+        <p:nvPr/>
+      </p:nvGrpSpPr>
+      <p:grpSpPr>
+        <a:xfrm>
+          <a:off x="0" y="0"/>
+          <a:ext cx="0" cy="0"/>
+          <a:chOff x="0" y="0"/>
+          <a:chExt cx="0" cy="0"/>
+        </a:xfrm>
+      </p:grpSpPr>
+      <p:sp>
+        <p:nvSpPr>
+          <p:cNvPr id="2" name="Slide Image Placeholder 1"/>
+          <p:cNvSpPr>
+            <a:spLocks noGrp="1" noRot="1" noChangeAspect="1"/>
+          </p:cNvSpPr>
+          <p:nvPr>
+            <p:ph type="sldImg"/>
+          </p:nvPr>
+        </p:nvSpPr>
+        <p:spPr/>
+      </p:sp>
+      <p:sp>
+        <p:nvSpPr>
+          <p:cNvPr id="3" name="Notes Placeholder 2"/>
+          <p:cNvSpPr>
+            <a:spLocks noGrp="1"/>
+          </p:cNvSpPr>
+          <p:nvPr>
+            <p:ph type="body" idx="1"/>
+          </p:nvPr>
+        </p:nvSpPr>
+        <p:spPr/>
+        <p:txBody>
+          <a:bodyPr/>
+          <a:lstStyle/>
+          <a:p>
+            <a:r>
+              <a:rPr lang="en-US" dirty="0"/>
+              <a:t/>
+            </a:r>
+            <a:endParaRPr lang="en-US" dirty="0"/>
+          </a:p>
+        </p:txBody>
+      </p:sp>
+      <p:sp>
+        <p:nvSpPr>
+          <p:cNvPr id="4" name="Slide Number Placeholder 3"/>
+          <p:cNvSpPr>
+            <a:spLocks noGrp="1"/>
+          </p:cNvSpPr>
+          <p:nvPr>
+            <p:ph type="sldNum" sz="quarter" idx="10"/>
+          </p:nvPr>
+        </p:nvSpPr>
+        <p:spPr/>
+        <p:txBody>
+          <a:bodyPr/>
+          <a:lstStyle/>
+          <a:p>
+            <a:fld id="{F7021451-1387-4CA6-816F-3879F97B5CBC}" type="slidenum">
+              <a:rPr lang="en-US"/>
+              <a:t>20</a:t>
+            </a:fld>
+            <a:endParaRPr lang="en-US"/>
+          </a:p>
+        </p:txBody>
+      </p:sp>
+    </p:spTree>
+    <p:extLst>
+      <p:ext uri="{BB962C8B-B14F-4D97-AF65-F5344CB8AC3E}">
+        <p14:creationId xmlns:p14="http://schemas.microsoft.com/office/powerpoint/2010/main" val="1024086991"/>
+      </p:ext>
+    </p:extLst>
+  </p:cSld>
+  <p:clrMapOvr>
+    <a:masterClrMapping/>
+  </p:clrMapOvr>
+</p:notes>
+</file>
+
+<file path=ppt/notesSlides/notesSlide21.xml><?xml version="1.0" encoding="utf-8"?>
+<p:notes xmlns:a="http://schemas.openxmlformats.org/drawingml/2006/main" xmlns:r="http://schemas.openxmlformats.org/officeDocument/2006/relationships" xmlns:p="http://schemas.openxmlformats.org/presentationml/2006/main">
+  <p:cSld>
+    <p:spTree>
+      <p:nvGrpSpPr>
+        <p:cNvPr id="1" name=""/>
+        <p:cNvGrpSpPr/>
+        <p:nvPr/>
+      </p:nvGrpSpPr>
+      <p:grpSpPr>
+        <a:xfrm>
+          <a:off x="0" y="0"/>
+          <a:ext cx="0" cy="0"/>
+          <a:chOff x="0" y="0"/>
+          <a:chExt cx="0" cy="0"/>
+        </a:xfrm>
+      </p:grpSpPr>
+      <p:sp>
+        <p:nvSpPr>
+          <p:cNvPr id="2" name="Slide Image Placeholder 1"/>
+          <p:cNvSpPr>
+            <a:spLocks noGrp="1" noRot="1" noChangeAspect="1"/>
+          </p:cNvSpPr>
+          <p:nvPr>
+            <p:ph type="sldImg"/>
+          </p:nvPr>
+        </p:nvSpPr>
+        <p:spPr/>
+      </p:sp>
+      <p:sp>
+        <p:nvSpPr>
+          <p:cNvPr id="3" name="Notes Placeholder 2"/>
+          <p:cNvSpPr>
+            <a:spLocks noGrp="1"/>
+          </p:cNvSpPr>
+          <p:nvPr>
+            <p:ph type="body" idx="1"/>
+          </p:nvPr>
+        </p:nvSpPr>
+        <p:spPr/>
+        <p:txBody>
+          <a:bodyPr/>
+          <a:lstStyle/>
+          <a:p>
+            <a:r>
+              <a:rPr lang="en-US" dirty="0"/>
+              <a:t/>
+            </a:r>
+            <a:endParaRPr lang="en-US" dirty="0"/>
+          </a:p>
+        </p:txBody>
+      </p:sp>
+      <p:sp>
+        <p:nvSpPr>
+          <p:cNvPr id="4" name="Slide Number Placeholder 3"/>
+          <p:cNvSpPr>
+            <a:spLocks noGrp="1"/>
+          </p:cNvSpPr>
+          <p:nvPr>
+            <p:ph type="sldNum" sz="quarter" idx="10"/>
+          </p:nvPr>
+        </p:nvSpPr>
+        <p:spPr/>
+        <p:txBody>
+          <a:bodyPr/>
+          <a:lstStyle/>
+          <a:p>
+            <a:fld id="{F7021451-1387-4CA6-816F-3879F97B5CBC}" type="slidenum">
+              <a:rPr lang="en-US"/>
+              <a:t>21</a:t>
             </a:fld>
             <a:endParaRPr lang="en-US"/>
           </a:p>
@@ -2100,102 +2901,6 @@
         </p:nvSpPr>
         <p:spPr>
           <a:xfrm>
-            <a:off x="406301" y="1223963"/>
-            <a:ext cx="8498026" cy="274290"/>
-          </a:xfrm>
-          <a:prstGeom prst="rect">
-            <a:avLst/>
-          </a:prstGeom>
-          <a:noFill/>
-          <a:ln/>
-        </p:spPr>
-        <p:txBody>
-          <a:bodyPr wrap="square" lIns="0" tIns="0" rIns="0" bIns="0" rtlCol="0" anchor="t"/>
-          <a:lstStyle/>
-          <a:p>
-            <a:pPr algn="l" indent="0" marL="0">
-              <a:lnSpc>
-                <a:spcPts val="2160"/>
-              </a:lnSpc>
-              <a:spcBef>
-                <a:spcPts val="600"/>
-              </a:spcBef>
-              <a:spcAft>
-                <a:spcPts val="800"/>
-              </a:spcAft>
-              <a:buNone/>
-            </a:pPr>
-            <a:r>
-              <a:rPr lang="en-US" sz="1800" b="1" dirty="0">
-                <a:solidFill>
-                  <a:srgbClr val="FE4447"/>
-                </a:solidFill>
-                <a:latin typeface="Georgia" pitchFamily="34" charset="0"/>
-                <a:ea typeface="Georgia" pitchFamily="34" charset="-122"/>
-                <a:cs typeface="Georgia" pitchFamily="34" charset="-120"/>
-              </a:rPr>
-              <a:t>Learning objective</a:t>
-            </a:r>
-            <a:endParaRPr lang="en-US" sz="1800" dirty="0"/>
-          </a:p>
-        </p:txBody>
-      </p:sp>
-      <p:sp>
-        <p:nvSpPr>
-          <p:cNvPr id="6" name="Text 4"/>
-          <p:cNvSpPr/>
-          <p:nvPr/>
-        </p:nvSpPr>
-        <p:spPr>
-          <a:xfrm>
-            <a:off x="406301" y="1637854"/>
-            <a:ext cx="8498026" cy="426541"/>
-          </a:xfrm>
-          <a:prstGeom prst="rect">
-            <a:avLst/>
-          </a:prstGeom>
-          <a:noFill/>
-          <a:ln/>
-        </p:spPr>
-        <p:txBody>
-          <a:bodyPr wrap="square" lIns="0" tIns="0" rIns="0" bIns="0" rtlCol="0" anchor="t"/>
-          <a:lstStyle/>
-          <a:p>
-            <a:pPr algn="l" indent="0" marL="0">
-              <a:lnSpc>
-                <a:spcPts val="1680"/>
-              </a:lnSpc>
-              <a:spcBef>
-                <a:spcPts val="300"/>
-              </a:spcBef>
-              <a:spcAft>
-                <a:spcPts val="300"/>
-              </a:spcAft>
-              <a:buNone/>
-            </a:pPr>
-            <a:r>
-              <a:rPr lang="en-US" sz="1200" dirty="0">
-                <a:solidFill>
-                  <a:srgbClr val="1C2833"/>
-                </a:solidFill>
-                <a:latin typeface="Arial" pitchFamily="34" charset="0"/>
-                <a:ea typeface="Arial" pitchFamily="34" charset="-122"/>
-                <a:cs typeface="Arial" pitchFamily="34" charset="-120"/>
-              </a:rPr>
-              <a:t>By the end of this lesson, students will name the 10 project options, identify the prior module each anchors to, and shortlist two options they're considering.</a:t>
-            </a:r>
-            <a:endParaRPr lang="en-US" sz="1200" dirty="0"/>
-          </a:p>
-        </p:txBody>
-      </p:sp>
-      <p:sp>
-        <p:nvSpPr>
-          <p:cNvPr id="7" name="Text 5"/>
-          <p:cNvSpPr/>
-          <p:nvPr/>
-        </p:nvSpPr>
-        <p:spPr>
-          <a:xfrm>
             <a:off x="406301" y="4434929"/>
             <a:ext cx="8498026" cy="213271"/>
           </a:xfrm>
@@ -2340,7 +3045,7 @@
                 <a:ea typeface="Georgia" pitchFamily="34" charset="-122"/>
                 <a:cs typeface="Georgia" pitchFamily="34" charset="-120"/>
               </a:rPr>
-              <a:t>Differentiation</a:t>
+              <a:t>Core (20 min) (cont.)</a:t>
             </a:r>
             <a:endParaRPr lang="en-US" sz="1800" dirty="0"/>
           </a:p>
@@ -2354,8 +3059,8 @@
         </p:nvSpPr>
         <p:spPr>
           <a:xfrm>
-            <a:off x="634901" y="883593"/>
-            <a:ext cx="8102798" cy="937022"/>
+            <a:off x="406301" y="870942"/>
+            <a:ext cx="8498026" cy="213271"/>
           </a:xfrm>
           <a:prstGeom prst="rect">
             <a:avLst/>
@@ -2367,90 +3072,28 @@
           <a:bodyPr wrap="square" lIns="0" tIns="0" rIns="0" bIns="0" rtlCol="0" anchor="t"/>
           <a:lstStyle/>
           <a:p>
-            <a:pPr algn="l" marL="342900" indent="-342900">
-              <a:lnSpc>
-                <a:spcPts val="1620"/>
-              </a:lnSpc>
-              <a:spcAft>
-                <a:spcPts val="300"/>
-              </a:spcAft>
-              <a:buSzPct val="100000"/>
-              <a:buChar char="•"/>
-            </a:pPr>
-            <a:r>
-              <a:rPr lang="en-US" sz="1200" b="1" dirty="0">
-                <a:solidFill>
-                  <a:srgbClr val="1C2833"/>
-                </a:solidFill>
-                <a:latin typeface="Arial" pitchFamily="34" charset="0"/>
-                <a:ea typeface="Arial" pitchFamily="34" charset="-122"/>
-                <a:cs typeface="Arial" pitchFamily="34" charset="-120"/>
-              </a:rPr>
-              <a:t>One tier up:</a:t>
-            </a:r>
-            <a:pPr algn="l" indent="0" marL="0">
-              <a:lnSpc>
-                <a:spcPts val="1620"/>
-              </a:lnSpc>
-              <a:spcAft>
-                <a:spcPts val="300"/>
-              </a:spcAft>
-              <a:buNone/>
-            </a:pPr>
-            <a:r>
-              <a:rPr lang="en-US" sz="1200" dirty="0">
-                <a:solidFill>
-                  <a:srgbClr val="1C2833"/>
-                </a:solidFill>
-                <a:latin typeface="Arial" pitchFamily="34" charset="0"/>
-                <a:ea typeface="Arial" pitchFamily="34" charset="-122"/>
-                <a:cs typeface="Arial" pitchFamily="34" charset="-120"/>
-              </a:rPr>
-              <a:t> If your top choice is Project 10 (open design), draft a one-paragraph pitch overnight — bring it tomorrow so I can approve at start of class.</a:t>
-            </a:r>
-            <a:endParaRPr lang="en-US" sz="1200" dirty="0"/>
-          </a:p>
-          <a:p>
-            <a:pPr algn="l" marL="342900" indent="-342900">
-              <a:lnSpc>
-                <a:spcPts val="1620"/>
-              </a:lnSpc>
-              <a:spcAft>
-                <a:spcPts val="300"/>
-              </a:spcAft>
-              <a:buSzPct val="100000"/>
-              <a:buChar char="•"/>
-            </a:pPr>
-            <a:r>
-              <a:rPr lang="en-US" sz="1200" b="1" dirty="0">
-                <a:solidFill>
-                  <a:srgbClr val="1C2833"/>
-                </a:solidFill>
-                <a:latin typeface="Arial" pitchFamily="34" charset="0"/>
-                <a:ea typeface="Arial" pitchFamily="34" charset="-122"/>
-                <a:cs typeface="Arial" pitchFamily="34" charset="-120"/>
-              </a:rPr>
-              <a:t>One tier down:</a:t>
-            </a:r>
-            <a:pPr algn="l" indent="0" marL="0">
-              <a:lnSpc>
-                <a:spcPts val="1620"/>
-              </a:lnSpc>
-              <a:spcAft>
-                <a:spcPts val="300"/>
-              </a:spcAft>
-              <a:buNone/>
-            </a:pPr>
-            <a:r>
-              <a:rPr lang="en-US" sz="1200" dirty="0">
-                <a:solidFill>
-                  <a:srgbClr val="1C2833"/>
-                </a:solidFill>
-                <a:latin typeface="Arial" pitchFamily="34" charset="0"/>
-                <a:ea typeface="Arial" pitchFamily="34" charset="-122"/>
-                <a:cs typeface="Arial" pitchFamily="34" charset="-120"/>
-              </a:rPr>
-              <a:t> If you're stuck between projects, pick by elimination — which one needs materials you can't get at home? Cross those off first.</a:t>
+            <a:pPr algn="l" indent="0" marL="0">
+              <a:lnSpc>
+                <a:spcPts val="1680"/>
+              </a:lnSpc>
+              <a:spcBef>
+                <a:spcPts val="300"/>
+              </a:spcBef>
+              <a:spcAft>
+                <a:spcPts val="300"/>
+              </a:spcAft>
+              <a:buNone/>
+            </a:pPr>
+            <a:r>
+              <a:rPr lang="en-US" sz="1200" i="1" dirty="0">
+                <a:solidFill>
+                  <a:srgbClr val="1C2833"/>
+                </a:solidFill>
+                <a:latin typeface="Arial" pitchFamily="34" charset="0"/>
+                <a:ea typeface="Arial" pitchFamily="34" charset="-122"/>
+                <a:cs typeface="Arial" pitchFamily="34" charset="-120"/>
+              </a:rPr>
+              <a:t>Each row: # · Project · One concrete example.</a:t>
             </a:r>
             <a:endParaRPr lang="en-US" sz="1200" dirty="0"/>
           </a:p>
@@ -2608,7 +3251,7 @@
                 <a:ea typeface="Georgia" pitchFamily="34" charset="-122"/>
                 <a:cs typeface="Georgia" pitchFamily="34" charset="-120"/>
               </a:rPr>
-              <a:t>Teacher notes</a:t>
+              <a:t>Core (20 min) (cont.)</a:t>
             </a:r>
             <a:endParaRPr lang="en-US" sz="1800" dirty="0"/>
           </a:p>
@@ -2622,8 +3265,8 @@
         </p:nvSpPr>
         <p:spPr>
           <a:xfrm>
-            <a:off x="406301" y="870942"/>
-            <a:ext cx="8498026" cy="853083"/>
+            <a:off x="634901" y="883593"/>
+            <a:ext cx="8102798" cy="1668363"/>
           </a:xfrm>
           <a:prstGeom prst="rect">
             <a:avLst/>
@@ -2635,13 +3278,31 @@
           <a:bodyPr wrap="square" lIns="0" tIns="0" rIns="0" bIns="0" rtlCol="0" anchor="t"/>
           <a:lstStyle/>
           <a:p>
-            <a:pPr algn="l" indent="0" marL="0">
-              <a:lnSpc>
-                <a:spcPts val="1680"/>
-              </a:lnSpc>
-              <a:spcBef>
-                <a:spcPts val="300"/>
-              </a:spcBef>
+            <a:pPr algn="l" marL="342900" indent="-342900">
+              <a:lnSpc>
+                <a:spcPts val="1620"/>
+              </a:lnSpc>
+              <a:spcAft>
+                <a:spcPts val="300"/>
+              </a:spcAft>
+              <a:buSzPct val="100000"/>
+              <a:buChar char="•"/>
+            </a:pPr>
+            <a:r>
+              <a:rPr lang="en-US" sz="1200" b="1" dirty="0">
+                <a:solidFill>
+                  <a:srgbClr val="1C2833"/>
+                </a:solidFill>
+                <a:latin typeface="Arial" pitchFamily="34" charset="0"/>
+                <a:ea typeface="Arial" pitchFamily="34" charset="-122"/>
+                <a:cs typeface="Arial" pitchFamily="34" charset="-120"/>
+              </a:rPr>
+              <a:t>1</a:t>
+            </a:r>
+            <a:pPr algn="l" indent="0" marL="0">
+              <a:lnSpc>
+                <a:spcPts val="1620"/>
+              </a:lnSpc>
               <a:spcAft>
                 <a:spcPts val="300"/>
               </a:spcAft>
@@ -2656,15 +3317,56 @@
                 <a:ea typeface="Arial" pitchFamily="34" charset="-122"/>
                 <a:cs typeface="Arial" pitchFamily="34" charset="-120"/>
               </a:rPr>
-              <a:t>– Resist the urge to suggest projects to specific students. Let them choose. – Watch the sticky-note clusters: if 8 students all want Project 4 (herbs), you'll need to cap and re-direct tomorrow. Have a quick plan for which projects you'll cap. – The two new Sanskrit terms (</a:t>
-            </a:r>
-            <a:pPr algn="l" indent="0" marL="0">
-              <a:lnSpc>
-                <a:spcPts val="1680"/>
-              </a:lnSpc>
-              <a:spcBef>
-                <a:spcPts val="300"/>
-              </a:spcBef>
+              <a:t> — Fermented-foods comparative study · Compare curd setting time at 3 different milk temperatures; document with photos and Ayurvedic tasting notes</a:t>
+            </a:r>
+            <a:endParaRPr lang="en-US" sz="1200" dirty="0"/>
+          </a:p>
+          <a:p>
+            <a:pPr algn="l" marL="342900" indent="-342900">
+              <a:lnSpc>
+                <a:spcPts val="1620"/>
+              </a:lnSpc>
+              <a:spcAft>
+                <a:spcPts val="300"/>
+              </a:spcAft>
+              <a:buSzPct val="100000"/>
+              <a:buChar char="•"/>
+            </a:pPr>
+            <a:r>
+              <a:rPr lang="en-US" sz="1200" b="1" dirty="0">
+                <a:solidFill>
+                  <a:srgbClr val="1C2833"/>
+                </a:solidFill>
+                <a:latin typeface="Arial" pitchFamily="34" charset="0"/>
+                <a:ea typeface="Arial" pitchFamily="34" charset="-122"/>
+                <a:cs typeface="Arial" pitchFamily="34" charset="-120"/>
+              </a:rPr>
+              <a:t>2</a:t>
+            </a:r>
+            <a:pPr algn="l" indent="0" marL="0">
+              <a:lnSpc>
+                <a:spcPts val="1620"/>
+              </a:lnSpc>
+              <a:spcAft>
+                <a:spcPts val="300"/>
+              </a:spcAft>
+              <a:buNone/>
+            </a:pPr>
+            <a:r>
+              <a:rPr lang="en-US" sz="1200" dirty="0">
+                <a:solidFill>
+                  <a:srgbClr val="1C2833"/>
+                </a:solidFill>
+                <a:latin typeface="Arial" pitchFamily="34" charset="0"/>
+                <a:ea typeface="Arial" pitchFamily="34" charset="-122"/>
+                <a:cs typeface="Arial" pitchFamily="34" charset="-120"/>
+              </a:rPr>
+              <a:t> — Mandala / </a:t>
+            </a:r>
+            <a:pPr algn="l" indent="0" marL="0">
+              <a:lnSpc>
+                <a:spcPts val="1620"/>
+              </a:lnSpc>
               <a:spcAft>
                 <a:spcPts val="300"/>
               </a:spcAft>
@@ -2679,15 +3381,12 @@
                 <a:ea typeface="Arial" pitchFamily="34" charset="-122"/>
                 <a:cs typeface="Arial" pitchFamily="34" charset="-120"/>
               </a:rPr>
-              <a:t>abhyāsa, vicāra</a:t>
-            </a:r>
-            <a:pPr algn="l" indent="0" marL="0">
-              <a:lnSpc>
-                <a:spcPts val="1680"/>
-              </a:lnSpc>
-              <a:spcBef>
-                <a:spcPts val="300"/>
-              </a:spcBef>
+              <a:t>pṛthvī</a:t>
+            </a:r>
+            <a:pPr algn="l" indent="0" marL="0">
+              <a:lnSpc>
+                <a:spcPts val="1620"/>
+              </a:lnSpc>
               <a:spcAft>
                 <a:spcPts val="300"/>
               </a:spcAft>
@@ -2702,7 +3401,139 @@
                 <a:ea typeface="Arial" pitchFamily="34" charset="-122"/>
                 <a:cs typeface="Arial" pitchFamily="34" charset="-120"/>
               </a:rPr>
-              <a:t>) come back in Day 5 (critique) and Day 8 (documentation). Don't drill them today; introduce and move on.</a:t>
+              <a:t> geometry · Design a 9-petal mandala using dot-method, colour each petal with one of the elements</a:t>
+            </a:r>
+            <a:endParaRPr lang="en-US" sz="1200" dirty="0"/>
+          </a:p>
+          <a:p>
+            <a:pPr algn="l" marL="342900" indent="-342900">
+              <a:lnSpc>
+                <a:spcPts val="1620"/>
+              </a:lnSpc>
+              <a:spcAft>
+                <a:spcPts val="300"/>
+              </a:spcAft>
+              <a:buSzPct val="100000"/>
+              <a:buChar char="•"/>
+            </a:pPr>
+            <a:r>
+              <a:rPr lang="en-US" sz="1200" b="1" dirty="0">
+                <a:solidFill>
+                  <a:srgbClr val="1C2833"/>
+                </a:solidFill>
+                <a:latin typeface="Arial" pitchFamily="34" charset="0"/>
+                <a:ea typeface="Arial" pitchFamily="34" charset="-122"/>
+                <a:cs typeface="Arial" pitchFamily="34" charset="-120"/>
+              </a:rPr>
+              <a:t>3</a:t>
+            </a:r>
+            <a:pPr algn="l" indent="0" marL="0">
+              <a:lnSpc>
+                <a:spcPts val="1620"/>
+              </a:lnSpc>
+              <a:spcAft>
+                <a:spcPts val="300"/>
+              </a:spcAft>
+              <a:buNone/>
+            </a:pPr>
+            <a:r>
+              <a:rPr lang="en-US" sz="1200" dirty="0">
+                <a:solidFill>
+                  <a:srgbClr val="1C2833"/>
+                </a:solidFill>
+                <a:latin typeface="Arial" pitchFamily="34" charset="0"/>
+                <a:ea typeface="Arial" pitchFamily="34" charset="-122"/>
+                <a:cs typeface="Arial" pitchFamily="34" charset="-120"/>
+              </a:rPr>
+              <a:t> — Tithi + saṁkrānti + festival calendar · Make a one-month calendar showing tithi, paksa, and 4 family festivals</a:t>
+            </a:r>
+            <a:endParaRPr lang="en-US" sz="1200" dirty="0"/>
+          </a:p>
+          <a:p>
+            <a:pPr algn="l" marL="342900" indent="-342900">
+              <a:lnSpc>
+                <a:spcPts val="1620"/>
+              </a:lnSpc>
+              <a:spcAft>
+                <a:spcPts val="300"/>
+              </a:spcAft>
+              <a:buSzPct val="100000"/>
+              <a:buChar char="•"/>
+            </a:pPr>
+            <a:r>
+              <a:rPr lang="en-US" sz="1200" b="1" dirty="0">
+                <a:solidFill>
+                  <a:srgbClr val="1C2833"/>
+                </a:solidFill>
+                <a:latin typeface="Arial" pitchFamily="34" charset="0"/>
+                <a:ea typeface="Arial" pitchFamily="34" charset="-122"/>
+                <a:cs typeface="Arial" pitchFamily="34" charset="-120"/>
+              </a:rPr>
+              <a:t>4</a:t>
+            </a:r>
+            <a:pPr algn="l" indent="0" marL="0">
+              <a:lnSpc>
+                <a:spcPts val="1620"/>
+              </a:lnSpc>
+              <a:spcAft>
+                <a:spcPts val="300"/>
+              </a:spcAft>
+              <a:buNone/>
+            </a:pPr>
+            <a:r>
+              <a:rPr lang="en-US" sz="1200" dirty="0">
+                <a:solidFill>
+                  <a:srgbClr val="1C2833"/>
+                </a:solidFill>
+                <a:latin typeface="Arial" pitchFamily="34" charset="0"/>
+                <a:ea typeface="Arial" pitchFamily="34" charset="-122"/>
+                <a:cs typeface="Arial" pitchFamily="34" charset="-120"/>
+              </a:rPr>
+              <a:t> — Herb deck · 10 cards: front = photo + sketch, back = name + use + part used</a:t>
+            </a:r>
+            <a:endParaRPr lang="en-US" sz="1200" dirty="0"/>
+          </a:p>
+          <a:p>
+            <a:pPr algn="l" marL="342900" indent="-342900">
+              <a:lnSpc>
+                <a:spcPts val="1620"/>
+              </a:lnSpc>
+              <a:spcAft>
+                <a:spcPts val="300"/>
+              </a:spcAft>
+              <a:buSzPct val="100000"/>
+              <a:buChar char="•"/>
+            </a:pPr>
+            <a:r>
+              <a:rPr lang="en-US" sz="1200" b="1" dirty="0">
+                <a:solidFill>
+                  <a:srgbClr val="1C2833"/>
+                </a:solidFill>
+                <a:latin typeface="Arial" pitchFamily="34" charset="0"/>
+                <a:ea typeface="Arial" pitchFamily="34" charset="-122"/>
+                <a:cs typeface="Arial" pitchFamily="34" charset="-120"/>
+              </a:rPr>
+              <a:t>5</a:t>
+            </a:r>
+            <a:pPr algn="l" indent="0" marL="0">
+              <a:lnSpc>
+                <a:spcPts val="1620"/>
+              </a:lnSpc>
+              <a:spcAft>
+                <a:spcPts val="300"/>
+              </a:spcAft>
+              <a:buNone/>
+            </a:pPr>
+            <a:r>
+              <a:rPr lang="en-US" sz="1200" dirty="0">
+                <a:solidFill>
+                  <a:srgbClr val="1C2833"/>
+                </a:solidFill>
+                <a:latin typeface="Arial" pitchFamily="34" charset="0"/>
+                <a:ea typeface="Arial" pitchFamily="34" charset="-122"/>
+                <a:cs typeface="Arial" pitchFamily="34" charset="-120"/>
+              </a:rPr>
+              <a:t> — Magic-square art · A 5×5 magic square turned into a coloured grid (verify it's valid first!)</a:t>
             </a:r>
             <a:endParaRPr lang="en-US" sz="1200" dirty="0"/>
           </a:p>
@@ -2860,7 +3691,7 @@
                 <a:ea typeface="Georgia" pitchFamily="34" charset="-122"/>
                 <a:cs typeface="Georgia" pitchFamily="34" charset="-120"/>
               </a:rPr>
-              <a:t>Citation(s) used in this lesson</a:t>
+              <a:t>Core (20 min) (cont.)</a:t>
             </a:r>
             <a:endParaRPr lang="en-US" sz="1800" dirty="0"/>
           </a:p>
@@ -2874,8 +3705,8 @@
         </p:nvSpPr>
         <p:spPr>
           <a:xfrm>
-            <a:off x="406301" y="870942"/>
-            <a:ext cx="8498026" cy="436066"/>
+            <a:off x="634901" y="883593"/>
+            <a:ext cx="8102798" cy="1257002"/>
           </a:xfrm>
           <a:prstGeom prst="rect">
             <a:avLst/>
@@ -2887,6 +3718,248 @@
           <a:bodyPr wrap="square" lIns="0" tIns="0" rIns="0" bIns="0" rtlCol="0" anchor="t"/>
           <a:lstStyle/>
           <a:p>
+            <a:pPr algn="l" marL="342900" indent="-342900">
+              <a:lnSpc>
+                <a:spcPts val="1620"/>
+              </a:lnSpc>
+              <a:spcAft>
+                <a:spcPts val="300"/>
+              </a:spcAft>
+              <a:buSzPct val="100000"/>
+              <a:buChar char="•"/>
+            </a:pPr>
+            <a:r>
+              <a:rPr lang="en-US" sz="1200" b="1" dirty="0">
+                <a:solidFill>
+                  <a:srgbClr val="1C2833"/>
+                </a:solidFill>
+                <a:latin typeface="Arial" pitchFamily="34" charset="0"/>
+                <a:ea typeface="Arial" pitchFamily="34" charset="-122"/>
+                <a:cs typeface="Arial" pitchFamily="34" charset="-120"/>
+              </a:rPr>
+              <a:t>6</a:t>
+            </a:r>
+            <a:pPr algn="l" indent="0" marL="0">
+              <a:lnSpc>
+                <a:spcPts val="1620"/>
+              </a:lnSpc>
+              <a:spcAft>
+                <a:spcPts val="300"/>
+              </a:spcAft>
+              <a:buNone/>
+            </a:pPr>
+            <a:r>
+              <a:rPr lang="en-US" sz="1200" dirty="0">
+                <a:solidFill>
+                  <a:srgbClr val="1C2833"/>
+                </a:solidFill>
+                <a:latin typeface="Arial" pitchFamily="34" charset="0"/>
+                <a:ea typeface="Arial" pitchFamily="34" charset="-122"/>
+                <a:cs typeface="Arial" pitchFamily="34" charset="-120"/>
+              </a:rPr>
+              <a:t> — Yoga sequence design · A 10-min sequence for younger siblings, no inversions, 8 poses with rationale</a:t>
+            </a:r>
+            <a:endParaRPr lang="en-US" sz="1200" dirty="0"/>
+          </a:p>
+          <a:p>
+            <a:pPr algn="l" marL="342900" indent="-342900">
+              <a:lnSpc>
+                <a:spcPts val="1620"/>
+              </a:lnSpc>
+              <a:spcAft>
+                <a:spcPts val="300"/>
+              </a:spcAft>
+              <a:buSzPct val="100000"/>
+              <a:buChar char="•"/>
+            </a:pPr>
+            <a:r>
+              <a:rPr lang="en-US" sz="1200" b="1" dirty="0">
+                <a:solidFill>
+                  <a:srgbClr val="1C2833"/>
+                </a:solidFill>
+                <a:latin typeface="Arial" pitchFamily="34" charset="0"/>
+                <a:ea typeface="Arial" pitchFamily="34" charset="-122"/>
+                <a:cs typeface="Arial" pitchFamily="34" charset="-120"/>
+              </a:rPr>
+              <a:t>7</a:t>
+            </a:r>
+            <a:pPr algn="l" indent="0" marL="0">
+              <a:lnSpc>
+                <a:spcPts val="1620"/>
+              </a:lnSpc>
+              <a:spcAft>
+                <a:spcPts val="300"/>
+              </a:spcAft>
+              <a:buNone/>
+            </a:pPr>
+            <a:r>
+              <a:rPr lang="en-US" sz="1200" dirty="0">
+                <a:solidFill>
+                  <a:srgbClr val="1C2833"/>
+                </a:solidFill>
+                <a:latin typeface="Arial" pitchFamily="34" charset="0"/>
+                <a:ea typeface="Arial" pitchFamily="34" charset="-122"/>
+                <a:cs typeface="Arial" pitchFamily="34" charset="-120"/>
+              </a:rPr>
+              <a:t> — Sustainability audit · Measure water at the school rinse-station for 3 mornings; propose one fix</a:t>
+            </a:r>
+            <a:endParaRPr lang="en-US" sz="1200" dirty="0"/>
+          </a:p>
+          <a:p>
+            <a:pPr algn="l" marL="342900" indent="-342900">
+              <a:lnSpc>
+                <a:spcPts val="1620"/>
+              </a:lnSpc>
+              <a:spcAft>
+                <a:spcPts val="300"/>
+              </a:spcAft>
+              <a:buSzPct val="100000"/>
+              <a:buChar char="•"/>
+            </a:pPr>
+            <a:r>
+              <a:rPr lang="en-US" sz="1200" b="1" dirty="0">
+                <a:solidFill>
+                  <a:srgbClr val="1C2833"/>
+                </a:solidFill>
+                <a:latin typeface="Arial" pitchFamily="34" charset="0"/>
+                <a:ea typeface="Arial" pitchFamily="34" charset="-122"/>
+                <a:cs typeface="Arial" pitchFamily="34" charset="-120"/>
+              </a:rPr>
+              <a:t>8</a:t>
+            </a:r>
+            <a:pPr algn="l" indent="0" marL="0">
+              <a:lnSpc>
+                <a:spcPts val="1620"/>
+              </a:lnSpc>
+              <a:spcAft>
+                <a:spcPts val="300"/>
+              </a:spcAft>
+              <a:buNone/>
+            </a:pPr>
+            <a:r>
+              <a:rPr lang="en-US" sz="1200" dirty="0">
+                <a:solidFill>
+                  <a:srgbClr val="1C2833"/>
+                </a:solidFill>
+                <a:latin typeface="Arial" pitchFamily="34" charset="0"/>
+                <a:ea typeface="Arial" pitchFamily="34" charset="-122"/>
+                <a:cs typeface="Arial" pitchFamily="34" charset="-120"/>
+              </a:rPr>
+              <a:t> — Doṣa rhythm self-study · A 7-day chart of sleep / appetite / mood; observations only (not diagnosis)</a:t>
+            </a:r>
+            <a:endParaRPr lang="en-US" sz="1200" dirty="0"/>
+          </a:p>
+          <a:p>
+            <a:pPr algn="l" marL="342900" indent="-342900">
+              <a:lnSpc>
+                <a:spcPts val="1620"/>
+              </a:lnSpc>
+              <a:spcAft>
+                <a:spcPts val="300"/>
+              </a:spcAft>
+              <a:buSzPct val="100000"/>
+              <a:buChar char="•"/>
+            </a:pPr>
+            <a:r>
+              <a:rPr lang="en-US" sz="1200" b="1" dirty="0">
+                <a:solidFill>
+                  <a:srgbClr val="1C2833"/>
+                </a:solidFill>
+                <a:latin typeface="Arial" pitchFamily="34" charset="0"/>
+                <a:ea typeface="Arial" pitchFamily="34" charset="-122"/>
+                <a:cs typeface="Arial" pitchFamily="34" charset="-120"/>
+              </a:rPr>
+              <a:t>9</a:t>
+            </a:r>
+            <a:pPr algn="l" indent="0" marL="0">
+              <a:lnSpc>
+                <a:spcPts val="1620"/>
+              </a:lnSpc>
+              <a:spcAft>
+                <a:spcPts val="300"/>
+              </a:spcAft>
+              <a:buNone/>
+            </a:pPr>
+            <a:r>
+              <a:rPr lang="en-US" sz="1200" dirty="0">
+                <a:solidFill>
+                  <a:srgbClr val="1C2833"/>
+                </a:solidFill>
+                <a:latin typeface="Arial" pitchFamily="34" charset="0"/>
+                <a:ea typeface="Arial" pitchFamily="34" charset="-122"/>
+                <a:cs typeface="Arial" pitchFamily="34" charset="-120"/>
+              </a:rPr>
+              <a:t> — Multiplication comparison · 20 problems × 2 methods; report mean time and error rate</a:t>
+            </a:r>
+            <a:endParaRPr lang="en-US" sz="1200" dirty="0"/>
+          </a:p>
+          <a:p>
+            <a:pPr algn="l" marL="342900" indent="-342900">
+              <a:lnSpc>
+                <a:spcPts val="1620"/>
+              </a:lnSpc>
+              <a:spcAft>
+                <a:spcPts val="300"/>
+              </a:spcAft>
+              <a:buSzPct val="100000"/>
+              <a:buChar char="•"/>
+            </a:pPr>
+            <a:r>
+              <a:rPr lang="en-US" sz="1200" b="1" dirty="0">
+                <a:solidFill>
+                  <a:srgbClr val="1C2833"/>
+                </a:solidFill>
+                <a:latin typeface="Arial" pitchFamily="34" charset="0"/>
+                <a:ea typeface="Arial" pitchFamily="34" charset="-122"/>
+                <a:cs typeface="Arial" pitchFamily="34" charset="-120"/>
+              </a:rPr>
+              <a:t>10</a:t>
+            </a:r>
+            <a:pPr algn="l" indent="0" marL="0">
+              <a:lnSpc>
+                <a:spcPts val="1620"/>
+              </a:lnSpc>
+              <a:spcAft>
+                <a:spcPts val="300"/>
+              </a:spcAft>
+              <a:buNone/>
+            </a:pPr>
+            <a:r>
+              <a:rPr lang="en-US" sz="1200" dirty="0">
+                <a:solidFill>
+                  <a:srgbClr val="1C2833"/>
+                </a:solidFill>
+                <a:latin typeface="Arial" pitchFamily="34" charset="0"/>
+                <a:ea typeface="Arial" pitchFamily="34" charset="-122"/>
+                <a:cs typeface="Arial" pitchFamily="34" charset="-120"/>
+              </a:rPr>
+              <a:t> — Open design · Anything anchored to a prior module — pitch it tomorrow morning</a:t>
+            </a:r>
+            <a:endParaRPr lang="en-US" sz="1200" dirty="0"/>
+          </a:p>
+        </p:txBody>
+      </p:sp>
+      <p:sp>
+        <p:nvSpPr>
+          <p:cNvPr id="5" name="Text 3"/>
+          <p:cNvSpPr/>
+          <p:nvPr/>
+        </p:nvSpPr>
+        <p:spPr>
+          <a:xfrm>
+            <a:off x="406301" y="4434929"/>
+            <a:ext cx="8498026" cy="213271"/>
+          </a:xfrm>
+          <a:prstGeom prst="rect">
+            <a:avLst/>
+          </a:prstGeom>
+          <a:noFill/>
+          <a:ln/>
+        </p:spPr>
+        <p:txBody>
+          <a:bodyPr wrap="square" lIns="0" tIns="0" rIns="0" bIns="0" rtlCol="0" anchor="t"/>
+          <a:lstStyle/>
+          <a:p>
             <a:pPr algn="l" indent="0" marL="0">
               <a:lnSpc>
                 <a:spcPts val="1680"/>
@@ -2908,8 +3981,209 @@
                 <a:ea typeface="Arial" pitchFamily="34" charset="-122"/>
                 <a:cs typeface="Arial" pitchFamily="34" charset="-120"/>
               </a:rPr>
-              <a:t>– No primary-source citation needed today — this is a process-orientation lesson. Sanskrit terms drawn from </a:t>
-            </a:r>
+              <a:t>Middle ·  · IKS Curriculum</a:t>
+            </a:r>
+            <a:endParaRPr lang="en-US" sz="1200" dirty="0"/>
+          </a:p>
+        </p:txBody>
+      </p:sp>
+    </p:spTree>
+  </p:cSld>
+  <p:clrMapOvr>
+    <a:masterClrMapping/>
+  </p:clrMapOvr>
+</p:sld>
+</file>
+
+<file path=ppt/slides/slide13.xml><?xml version="1.0" encoding="utf-8"?>
+<p:sld xmlns:a="http://schemas.openxmlformats.org/drawingml/2006/main" xmlns:r="http://schemas.openxmlformats.org/officeDocument/2006/relationships" xmlns:p="http://schemas.openxmlformats.org/presentationml/2006/main">
+  <p:cSld name="Slide 13">
+    <p:bg>
+      <p:bgPr>
+        <a:solidFill>
+          <a:srgbClr val="FFFFFF"/>
+        </a:solidFill>
+      </p:bgPr>
+    </p:bg>
+    <p:spTree>
+      <p:nvGrpSpPr>
+        <p:cNvPr id="1" name=""/>
+        <p:cNvGrpSpPr/>
+        <p:nvPr/>
+      </p:nvGrpSpPr>
+      <p:grpSpPr>
+        <a:xfrm>
+          <a:off x="0" y="0"/>
+          <a:ext cx="0" cy="0"/>
+          <a:chOff x="0" y="0"/>
+          <a:chExt cx="0" cy="0"/>
+        </a:xfrm>
+      </p:grpSpPr>
+      <p:sp>
+        <p:nvSpPr>
+          <p:cNvPr id="2" name="Text 0"/>
+          <p:cNvSpPr/>
+          <p:nvPr/>
+        </p:nvSpPr>
+        <p:spPr>
+          <a:xfrm>
+            <a:off x="0" y="0"/>
+            <a:ext cx="9144000" cy="101501"/>
+          </a:xfrm>
+          <a:prstGeom prst="rect">
+            <a:avLst/>
+          </a:prstGeom>
+          <a:solidFill>
+            <a:srgbClr val="277884"/>
+          </a:solidFill>
+          <a:ln/>
+        </p:spPr>
+        <p:txBody>
+          <a:bodyPr wrap="square" rtlCol="0" anchor="ctr"/>
+          <a:lstStyle/>
+          <a:p>
+            <a:pPr indent="0" marL="0">
+              <a:buNone/>
+            </a:pPr>
+            <a:endParaRPr lang="en-US" dirty="0"/>
+          </a:p>
+        </p:txBody>
+      </p:sp>
+      <p:sp>
+        <p:nvSpPr>
+          <p:cNvPr id="3" name="Text 1"/>
+          <p:cNvSpPr/>
+          <p:nvPr/>
+        </p:nvSpPr>
+        <p:spPr>
+          <a:xfrm>
+            <a:off x="406301" y="457051"/>
+            <a:ext cx="8498026" cy="274290"/>
+          </a:xfrm>
+          <a:prstGeom prst="rect">
+            <a:avLst/>
+          </a:prstGeom>
+          <a:noFill/>
+          <a:ln/>
+        </p:spPr>
+        <p:txBody>
+          <a:bodyPr wrap="square" lIns="0" tIns="0" rIns="0" bIns="0" rtlCol="0" anchor="t"/>
+          <a:lstStyle/>
+          <a:p>
+            <a:pPr algn="l" indent="0" marL="0">
+              <a:lnSpc>
+                <a:spcPts val="2160"/>
+              </a:lnSpc>
+              <a:spcBef>
+                <a:spcPts val="600"/>
+              </a:spcBef>
+              <a:spcAft>
+                <a:spcPts val="800"/>
+              </a:spcAft>
+              <a:buNone/>
+            </a:pPr>
+            <a:r>
+              <a:rPr lang="en-US" sz="1800" b="1" dirty="0">
+                <a:solidFill>
+                  <a:srgbClr val="FE4447"/>
+                </a:solidFill>
+                <a:latin typeface="Georgia" pitchFamily="34" charset="0"/>
+                <a:ea typeface="Georgia" pitchFamily="34" charset="-122"/>
+                <a:cs typeface="Georgia" pitchFamily="34" charset="-120"/>
+              </a:rPr>
+              <a:t>Core (20 min) (cont.)</a:t>
+            </a:r>
+            <a:endParaRPr lang="en-US" sz="1800" dirty="0"/>
+          </a:p>
+        </p:txBody>
+      </p:sp>
+      <p:sp>
+        <p:nvSpPr>
+          <p:cNvPr id="4" name="Text 2"/>
+          <p:cNvSpPr/>
+          <p:nvPr/>
+        </p:nvSpPr>
+        <p:spPr>
+          <a:xfrm>
+            <a:off x="634901" y="883593"/>
+            <a:ext cx="8102798" cy="281880"/>
+          </a:xfrm>
+          <a:prstGeom prst="rect">
+            <a:avLst/>
+          </a:prstGeom>
+          <a:noFill/>
+          <a:ln/>
+        </p:spPr>
+        <p:txBody>
+          <a:bodyPr wrap="square" lIns="0" tIns="0" rIns="0" bIns="0" rtlCol="0" anchor="t"/>
+          <a:lstStyle/>
+          <a:p>
+            <a:pPr algn="l" marL="342900" indent="-342900">
+              <a:lnSpc>
+                <a:spcPts val="1620"/>
+              </a:lnSpc>
+              <a:spcAft>
+                <a:spcPts val="300"/>
+              </a:spcAft>
+              <a:buSzPct val="100000"/>
+              <a:buChar char="•"/>
+            </a:pPr>
+            <a:r>
+              <a:rPr lang="en-US" sz="1200" b="1" dirty="0">
+                <a:solidFill>
+                  <a:srgbClr val="1C2833"/>
+                </a:solidFill>
+                <a:latin typeface="Arial" pitchFamily="34" charset="0"/>
+                <a:ea typeface="Arial" pitchFamily="34" charset="-122"/>
+                <a:cs typeface="Arial" pitchFamily="34" charset="-120"/>
+              </a:rPr>
+              <a:t>Critical safety note</a:t>
+            </a:r>
+            <a:pPr algn="l" indent="0" marL="0">
+              <a:lnSpc>
+                <a:spcPts val="1620"/>
+              </a:lnSpc>
+              <a:spcAft>
+                <a:spcPts val="300"/>
+              </a:spcAft>
+              <a:buNone/>
+            </a:pPr>
+            <a:r>
+              <a:rPr lang="en-US" sz="1200" dirty="0">
+                <a:solidFill>
+                  <a:srgbClr val="1C2833"/>
+                </a:solidFill>
+                <a:latin typeface="Arial" pitchFamily="34" charset="0"/>
+                <a:ea typeface="Arial" pitchFamily="34" charset="-122"/>
+                <a:cs typeface="Arial" pitchFamily="34" charset="-120"/>
+              </a:rPr>
+              <a:t> (3 min) — the pañcagavya pivot.</a:t>
+            </a:r>
+            <a:endParaRPr lang="en-US" sz="1200" dirty="0"/>
+          </a:p>
+        </p:txBody>
+      </p:sp>
+      <p:sp>
+        <p:nvSpPr>
+          <p:cNvPr id="5" name="Text 3"/>
+          <p:cNvSpPr/>
+          <p:nvPr/>
+        </p:nvSpPr>
+        <p:spPr>
+          <a:xfrm>
+            <a:off x="406301" y="1254323"/>
+            <a:ext cx="8498026" cy="1066354"/>
+          </a:xfrm>
+          <a:prstGeom prst="rect">
+            <a:avLst/>
+          </a:prstGeom>
+          <a:noFill/>
+          <a:ln/>
+        </p:spPr>
+        <p:txBody>
+          <a:bodyPr wrap="square" lIns="0" tIns="0" rIns="0" bIns="0" rtlCol="0" anchor="t"/>
+          <a:lstStyle/>
+          <a:p>
             <a:pPr algn="l" indent="0" marL="0">
               <a:lnSpc>
                 <a:spcPts val="1680"/>
@@ -2923,6 +4197,54 @@
               <a:buNone/>
             </a:pPr>
             <a:r>
+              <a:rPr lang="en-US" sz="1200" i="1" dirty="0">
+                <a:solidFill>
+                  <a:srgbClr val="1C2833"/>
+                </a:solidFill>
+                <a:latin typeface="Arial" pitchFamily="34" charset="0"/>
+                <a:ea typeface="Arial" pitchFamily="34" charset="-122"/>
+                <a:cs typeface="Arial" pitchFamily="34" charset="-120"/>
+              </a:rPr>
+              <a:t>"Some of you may have heard of pañcagavya — a traditional Ayurvedic preparation using five cow-derived substances. Two of those substances — cow urine and cow dung — are not safe for school students to handle or taste. So our version of that theme is the fermented-foods comparative study (Project 1), which carries the same intellectual lesson safely. If anyone is curious about pañcagavya itself, you can do a library-only research project with parent consent — no handling. Talk to me."</a:t>
+            </a:r>
+            <a:endParaRPr lang="en-US" sz="1200" dirty="0"/>
+          </a:p>
+        </p:txBody>
+      </p:sp>
+      <p:sp>
+        <p:nvSpPr>
+          <p:cNvPr id="6" name="Text 4"/>
+          <p:cNvSpPr/>
+          <p:nvPr/>
+        </p:nvSpPr>
+        <p:spPr>
+          <a:xfrm>
+            <a:off x="406301" y="4434929"/>
+            <a:ext cx="8498026" cy="213271"/>
+          </a:xfrm>
+          <a:prstGeom prst="rect">
+            <a:avLst/>
+          </a:prstGeom>
+          <a:noFill/>
+          <a:ln/>
+        </p:spPr>
+        <p:txBody>
+          <a:bodyPr wrap="square" lIns="0" tIns="0" rIns="0" bIns="0" rtlCol="0" anchor="t"/>
+          <a:lstStyle/>
+          <a:p>
+            <a:pPr algn="l" indent="0" marL="0">
+              <a:lnSpc>
+                <a:spcPts val="1680"/>
+              </a:lnSpc>
+              <a:spcBef>
+                <a:spcPts val="300"/>
+              </a:spcBef>
+              <a:spcAft>
+                <a:spcPts val="300"/>
+              </a:spcAft>
+              <a:buNone/>
+            </a:pPr>
+            <a:r>
               <a:rPr lang="en-US" sz="1200" dirty="0">
                 <a:solidFill>
                   <a:srgbClr val="1C2833"/>
@@ -2931,8 +4253,209 @@
                 <a:ea typeface="Arial" pitchFamily="34" charset="-122"/>
                 <a:cs typeface="Arial" pitchFamily="34" charset="-120"/>
               </a:rPr>
-              <a:t>_shared/glossary.md</a:t>
-            </a:r>
+              <a:t>Middle ·  · IKS Curriculum</a:t>
+            </a:r>
+            <a:endParaRPr lang="en-US" sz="1200" dirty="0"/>
+          </a:p>
+        </p:txBody>
+      </p:sp>
+    </p:spTree>
+  </p:cSld>
+  <p:clrMapOvr>
+    <a:masterClrMapping/>
+  </p:clrMapOvr>
+</p:sld>
+</file>
+
+<file path=ppt/slides/slide14.xml><?xml version="1.0" encoding="utf-8"?>
+<p:sld xmlns:a="http://schemas.openxmlformats.org/drawingml/2006/main" xmlns:r="http://schemas.openxmlformats.org/officeDocument/2006/relationships" xmlns:p="http://schemas.openxmlformats.org/presentationml/2006/main">
+  <p:cSld name="Slide 14">
+    <p:bg>
+      <p:bgPr>
+        <a:solidFill>
+          <a:srgbClr val="FFFFFF"/>
+        </a:solidFill>
+      </p:bgPr>
+    </p:bg>
+    <p:spTree>
+      <p:nvGrpSpPr>
+        <p:cNvPr id="1" name=""/>
+        <p:cNvGrpSpPr/>
+        <p:nvPr/>
+      </p:nvGrpSpPr>
+      <p:grpSpPr>
+        <a:xfrm>
+          <a:off x="0" y="0"/>
+          <a:ext cx="0" cy="0"/>
+          <a:chOff x="0" y="0"/>
+          <a:chExt cx="0" cy="0"/>
+        </a:xfrm>
+      </p:grpSpPr>
+      <p:sp>
+        <p:nvSpPr>
+          <p:cNvPr id="2" name="Text 0"/>
+          <p:cNvSpPr/>
+          <p:nvPr/>
+        </p:nvSpPr>
+        <p:spPr>
+          <a:xfrm>
+            <a:off x="0" y="0"/>
+            <a:ext cx="9144000" cy="101501"/>
+          </a:xfrm>
+          <a:prstGeom prst="rect">
+            <a:avLst/>
+          </a:prstGeom>
+          <a:solidFill>
+            <a:srgbClr val="277884"/>
+          </a:solidFill>
+          <a:ln/>
+        </p:spPr>
+        <p:txBody>
+          <a:bodyPr wrap="square" rtlCol="0" anchor="ctr"/>
+          <a:lstStyle/>
+          <a:p>
+            <a:pPr indent="0" marL="0">
+              <a:buNone/>
+            </a:pPr>
+            <a:endParaRPr lang="en-US" dirty="0"/>
+          </a:p>
+        </p:txBody>
+      </p:sp>
+      <p:sp>
+        <p:nvSpPr>
+          <p:cNvPr id="3" name="Text 1"/>
+          <p:cNvSpPr/>
+          <p:nvPr/>
+        </p:nvSpPr>
+        <p:spPr>
+          <a:xfrm>
+            <a:off x="406301" y="457051"/>
+            <a:ext cx="8498026" cy="274290"/>
+          </a:xfrm>
+          <a:prstGeom prst="rect">
+            <a:avLst/>
+          </a:prstGeom>
+          <a:noFill/>
+          <a:ln/>
+        </p:spPr>
+        <p:txBody>
+          <a:bodyPr wrap="square" lIns="0" tIns="0" rIns="0" bIns="0" rtlCol="0" anchor="t"/>
+          <a:lstStyle/>
+          <a:p>
+            <a:pPr algn="l" indent="0" marL="0">
+              <a:lnSpc>
+                <a:spcPts val="2160"/>
+              </a:lnSpc>
+              <a:spcBef>
+                <a:spcPts val="600"/>
+              </a:spcBef>
+              <a:spcAft>
+                <a:spcPts val="800"/>
+              </a:spcAft>
+              <a:buNone/>
+            </a:pPr>
+            <a:r>
+              <a:rPr lang="en-US" sz="1800" b="1" dirty="0">
+                <a:solidFill>
+                  <a:srgbClr val="FE4447"/>
+                </a:solidFill>
+                <a:latin typeface="Georgia" pitchFamily="34" charset="0"/>
+                <a:ea typeface="Georgia" pitchFamily="34" charset="-122"/>
+                <a:cs typeface="Georgia" pitchFamily="34" charset="-120"/>
+              </a:rPr>
+              <a:t>Core (20 min) (cont.)</a:t>
+            </a:r>
+            <a:endParaRPr lang="en-US" sz="1800" dirty="0"/>
+          </a:p>
+        </p:txBody>
+      </p:sp>
+      <p:sp>
+        <p:nvSpPr>
+          <p:cNvPr id="4" name="Text 2"/>
+          <p:cNvSpPr/>
+          <p:nvPr/>
+        </p:nvSpPr>
+        <p:spPr>
+          <a:xfrm>
+            <a:off x="634901" y="883593"/>
+            <a:ext cx="8102798" cy="487561"/>
+          </a:xfrm>
+          <a:prstGeom prst="rect">
+            <a:avLst/>
+          </a:prstGeom>
+          <a:noFill/>
+          <a:ln/>
+        </p:spPr>
+        <p:txBody>
+          <a:bodyPr wrap="square" lIns="0" tIns="0" rIns="0" bIns="0" rtlCol="0" anchor="t"/>
+          <a:lstStyle/>
+          <a:p>
+            <a:pPr algn="l" marL="342900" indent="-342900">
+              <a:lnSpc>
+                <a:spcPts val="1620"/>
+              </a:lnSpc>
+              <a:spcAft>
+                <a:spcPts val="300"/>
+              </a:spcAft>
+              <a:buSzPct val="100000"/>
+              <a:buChar char="•"/>
+            </a:pPr>
+            <a:r>
+              <a:rPr lang="en-US" sz="1200" b="1" dirty="0">
+                <a:solidFill>
+                  <a:srgbClr val="1C2833"/>
+                </a:solidFill>
+                <a:latin typeface="Arial" pitchFamily="34" charset="0"/>
+                <a:ea typeface="Arial" pitchFamily="34" charset="-122"/>
+                <a:cs typeface="Arial" pitchFamily="34" charset="-120"/>
+              </a:rPr>
+              <a:t>One thing this module isn't</a:t>
+            </a:r>
+            <a:pPr algn="l" indent="0" marL="0">
+              <a:lnSpc>
+                <a:spcPts val="1620"/>
+              </a:lnSpc>
+              <a:spcAft>
+                <a:spcPts val="300"/>
+              </a:spcAft>
+              <a:buNone/>
+            </a:pPr>
+            <a:r>
+              <a:rPr lang="en-US" sz="1200" dirty="0">
+                <a:solidFill>
+                  <a:srgbClr val="1C2833"/>
+                </a:solidFill>
+                <a:latin typeface="Arial" pitchFamily="34" charset="0"/>
+                <a:ea typeface="Arial" pitchFamily="34" charset="-122"/>
+                <a:cs typeface="Arial" pitchFamily="34" charset="-120"/>
+              </a:rPr>
+              <a:t> (1 min) — a competition. There's no "best project." The rubric rewards process honesty as much as polish.</a:t>
+            </a:r>
+            <a:endParaRPr lang="en-US" sz="1200" dirty="0"/>
+          </a:p>
+        </p:txBody>
+      </p:sp>
+      <p:sp>
+        <p:nvSpPr>
+          <p:cNvPr id="5" name="Text 3"/>
+          <p:cNvSpPr/>
+          <p:nvPr/>
+        </p:nvSpPr>
+        <p:spPr>
+          <a:xfrm>
+            <a:off x="406301" y="4434929"/>
+            <a:ext cx="8498026" cy="213271"/>
+          </a:xfrm>
+          <a:prstGeom prst="rect">
+            <a:avLst/>
+          </a:prstGeom>
+          <a:noFill/>
+          <a:ln/>
+        </p:spPr>
+        <p:txBody>
+          <a:bodyPr wrap="square" lIns="0" tIns="0" rIns="0" bIns="0" rtlCol="0" anchor="t"/>
+          <a:lstStyle/>
+          <a:p>
             <a:pPr algn="l" indent="0" marL="0">
               <a:lnSpc>
                 <a:spcPts val="1680"/>
@@ -2954,7 +4477,1800 @@
                 <a:ea typeface="Arial" pitchFamily="34" charset="-122"/>
                 <a:cs typeface="Arial" pitchFamily="34" charset="-120"/>
               </a:rPr>
+              <a:t>Middle ·  · IKS Curriculum</a:t>
+            </a:r>
+            <a:endParaRPr lang="en-US" sz="1200" dirty="0"/>
+          </a:p>
+        </p:txBody>
+      </p:sp>
+    </p:spTree>
+  </p:cSld>
+  <p:clrMapOvr>
+    <a:masterClrMapping/>
+  </p:clrMapOvr>
+</p:sld>
+</file>
+
+<file path=ppt/slides/slide15.xml><?xml version="1.0" encoding="utf-8"?>
+<p:sld xmlns:a="http://schemas.openxmlformats.org/drawingml/2006/main" xmlns:r="http://schemas.openxmlformats.org/officeDocument/2006/relationships" xmlns:p="http://schemas.openxmlformats.org/presentationml/2006/main">
+  <p:cSld name="Slide 15">
+    <p:bg>
+      <p:bgPr>
+        <a:solidFill>
+          <a:srgbClr val="FFFFFF"/>
+        </a:solidFill>
+      </p:bgPr>
+    </p:bg>
+    <p:spTree>
+      <p:nvGrpSpPr>
+        <p:cNvPr id="1" name=""/>
+        <p:cNvGrpSpPr/>
+        <p:nvPr/>
+      </p:nvGrpSpPr>
+      <p:grpSpPr>
+        <a:xfrm>
+          <a:off x="0" y="0"/>
+          <a:ext cx="0" cy="0"/>
+          <a:chOff x="0" y="0"/>
+          <a:chExt cx="0" cy="0"/>
+        </a:xfrm>
+      </p:grpSpPr>
+      <p:sp>
+        <p:nvSpPr>
+          <p:cNvPr id="2" name="Text 0"/>
+          <p:cNvSpPr/>
+          <p:nvPr/>
+        </p:nvSpPr>
+        <p:spPr>
+          <a:xfrm>
+            <a:off x="0" y="0"/>
+            <a:ext cx="9144000" cy="101501"/>
+          </a:xfrm>
+          <a:prstGeom prst="rect">
+            <a:avLst/>
+          </a:prstGeom>
+          <a:solidFill>
+            <a:srgbClr val="277884"/>
+          </a:solidFill>
+          <a:ln/>
+        </p:spPr>
+        <p:txBody>
+          <a:bodyPr wrap="square" rtlCol="0" anchor="ctr"/>
+          <a:lstStyle/>
+          <a:p>
+            <a:pPr indent="0" marL="0">
+              <a:buNone/>
+            </a:pPr>
+            <a:endParaRPr lang="en-US" dirty="0"/>
+          </a:p>
+        </p:txBody>
+      </p:sp>
+      <p:sp>
+        <p:nvSpPr>
+          <p:cNvPr id="3" name="Text 1"/>
+          <p:cNvSpPr/>
+          <p:nvPr/>
+        </p:nvSpPr>
+        <p:spPr>
+          <a:xfrm>
+            <a:off x="406301" y="457051"/>
+            <a:ext cx="8498026" cy="274290"/>
+          </a:xfrm>
+          <a:prstGeom prst="rect">
+            <a:avLst/>
+          </a:prstGeom>
+          <a:noFill/>
+          <a:ln/>
+        </p:spPr>
+        <p:txBody>
+          <a:bodyPr wrap="square" lIns="0" tIns="0" rIns="0" bIns="0" rtlCol="0" anchor="t"/>
+          <a:lstStyle/>
+          <a:p>
+            <a:pPr algn="l" indent="0" marL="0">
+              <a:lnSpc>
+                <a:spcPts val="2160"/>
+              </a:lnSpc>
+              <a:spcBef>
+                <a:spcPts val="600"/>
+              </a:spcBef>
+              <a:spcAft>
+                <a:spcPts val="800"/>
+              </a:spcAft>
+              <a:buNone/>
+            </a:pPr>
+            <a:r>
+              <a:rPr lang="en-US" sz="1800" b="1" dirty="0">
+                <a:solidFill>
+                  <a:srgbClr val="FE4447"/>
+                </a:solidFill>
+                <a:latin typeface="Georgia" pitchFamily="34" charset="0"/>
+                <a:ea typeface="Georgia" pitchFamily="34" charset="-122"/>
+                <a:cs typeface="Georgia" pitchFamily="34" charset="-120"/>
+              </a:rPr>
+              <a:t>Activity (15 min) — Shortlist + sticky note</a:t>
+            </a:r>
+            <a:endParaRPr lang="en-US" sz="1800" dirty="0"/>
+          </a:p>
+        </p:txBody>
+      </p:sp>
+      <p:sp>
+        <p:nvSpPr>
+          <p:cNvPr id="4" name="Text 2"/>
+          <p:cNvSpPr/>
+          <p:nvPr/>
+        </p:nvSpPr>
+        <p:spPr>
+          <a:xfrm>
+            <a:off x="634901" y="883593"/>
+            <a:ext cx="8102798" cy="1218902"/>
+          </a:xfrm>
+          <a:prstGeom prst="rect">
+            <a:avLst/>
+          </a:prstGeom>
+          <a:noFill/>
+          <a:ln/>
+        </p:spPr>
+        <p:txBody>
+          <a:bodyPr wrap="square" lIns="0" tIns="0" rIns="0" bIns="0" rtlCol="0" anchor="t"/>
+          <a:lstStyle/>
+          <a:p>
+            <a:pPr algn="l" marL="342900" indent="-342900">
+              <a:lnSpc>
+                <a:spcPts val="1620"/>
+              </a:lnSpc>
+              <a:spcAft>
+                <a:spcPts val="300"/>
+              </a:spcAft>
+              <a:buSzPct val="100000"/>
+              <a:buChar char="•"/>
+            </a:pPr>
+            <a:r>
+              <a:rPr lang="en-US" sz="1200" dirty="0">
+                <a:solidFill>
+                  <a:srgbClr val="1C2833"/>
+                </a:solidFill>
+                <a:latin typeface="Arial" pitchFamily="34" charset="0"/>
+                <a:ea typeface="Arial" pitchFamily="34" charset="-122"/>
+                <a:cs typeface="Arial" pitchFamily="34" charset="-120"/>
+              </a:rPr>
+              <a:t>Hand out the printed menu. 2 minutes of silent reading.</a:t>
+            </a:r>
+            <a:endParaRPr lang="en-US" sz="1200" dirty="0"/>
+          </a:p>
+          <a:p>
+            <a:pPr algn="l" marL="342900" indent="-342900">
+              <a:lnSpc>
+                <a:spcPts val="1620"/>
+              </a:lnSpc>
+              <a:spcAft>
+                <a:spcPts val="300"/>
+              </a:spcAft>
+              <a:buSzPct val="100000"/>
+              <a:buChar char="•"/>
+            </a:pPr>
+            <a:r>
+              <a:rPr lang="en-US" sz="1200" dirty="0">
+                <a:solidFill>
+                  <a:srgbClr val="1C2833"/>
+                </a:solidFill>
+                <a:latin typeface="Arial" pitchFamily="34" charset="0"/>
+                <a:ea typeface="Arial" pitchFamily="34" charset="-122"/>
+                <a:cs typeface="Arial" pitchFamily="34" charset="-120"/>
+              </a:rPr>
+              <a:t>5 minutes: pair-share — "Which two are you considering? Why?"</a:t>
+            </a:r>
+            <a:endParaRPr lang="en-US" sz="1200" dirty="0"/>
+          </a:p>
+          <a:p>
+            <a:pPr algn="l" marL="342900" indent="-342900">
+              <a:lnSpc>
+                <a:spcPts val="1620"/>
+              </a:lnSpc>
+              <a:spcAft>
+                <a:spcPts val="300"/>
+              </a:spcAft>
+              <a:buSzPct val="100000"/>
+              <a:buChar char="•"/>
+            </a:pPr>
+            <a:r>
+              <a:rPr lang="en-US" sz="1200" dirty="0">
+                <a:solidFill>
+                  <a:srgbClr val="1C2833"/>
+                </a:solidFill>
+                <a:latin typeface="Arial" pitchFamily="34" charset="0"/>
+                <a:ea typeface="Arial" pitchFamily="34" charset="-122"/>
+                <a:cs typeface="Arial" pitchFamily="34" charset="-120"/>
+              </a:rPr>
+              <a:t>5 minutes: each student writes their </a:t>
+            </a:r>
+            <a:pPr algn="l" indent="0" marL="0">
+              <a:lnSpc>
+                <a:spcPts val="1620"/>
+              </a:lnSpc>
+              <a:spcAft>
+                <a:spcPts val="300"/>
+              </a:spcAft>
+              <a:buNone/>
+            </a:pPr>
+            <a:r>
+              <a:rPr lang="en-US" sz="1200" b="1" dirty="0">
+                <a:solidFill>
+                  <a:srgbClr val="1C2833"/>
+                </a:solidFill>
+                <a:latin typeface="Arial" pitchFamily="34" charset="0"/>
+                <a:ea typeface="Arial" pitchFamily="34" charset="-122"/>
+                <a:cs typeface="Arial" pitchFamily="34" charset="-120"/>
+              </a:rPr>
+              <a:t>top choice</a:t>
+            </a:r>
+            <a:pPr algn="l" indent="0" marL="0">
+              <a:lnSpc>
+                <a:spcPts val="1620"/>
+              </a:lnSpc>
+              <a:spcAft>
+                <a:spcPts val="300"/>
+              </a:spcAft>
+              <a:buNone/>
+            </a:pPr>
+            <a:r>
+              <a:rPr lang="en-US" sz="1200" dirty="0">
+                <a:solidFill>
+                  <a:srgbClr val="1C2833"/>
+                </a:solidFill>
+                <a:latin typeface="Arial" pitchFamily="34" charset="0"/>
+                <a:ea typeface="Arial" pitchFamily="34" charset="-122"/>
+                <a:cs typeface="Arial" pitchFamily="34" charset="-120"/>
+              </a:rPr>
+              <a:t> on a yellow sticky and </a:t>
+            </a:r>
+            <a:pPr algn="l" indent="0" marL="0">
+              <a:lnSpc>
+                <a:spcPts val="1620"/>
+              </a:lnSpc>
+              <a:spcAft>
+                <a:spcPts val="300"/>
+              </a:spcAft>
+              <a:buNone/>
+            </a:pPr>
+            <a:r>
+              <a:rPr lang="en-US" sz="1200" b="1" dirty="0">
+                <a:solidFill>
+                  <a:srgbClr val="1C2833"/>
+                </a:solidFill>
+                <a:latin typeface="Arial" pitchFamily="34" charset="0"/>
+                <a:ea typeface="Arial" pitchFamily="34" charset="-122"/>
+                <a:cs typeface="Arial" pitchFamily="34" charset="-120"/>
+              </a:rPr>
+              <a:t>second choice</a:t>
+            </a:r>
+            <a:pPr algn="l" indent="0" marL="0">
+              <a:lnSpc>
+                <a:spcPts val="1620"/>
+              </a:lnSpc>
+              <a:spcAft>
+                <a:spcPts val="300"/>
+              </a:spcAft>
+              <a:buNone/>
+            </a:pPr>
+            <a:r>
+              <a:rPr lang="en-US" sz="1200" dirty="0">
+                <a:solidFill>
+                  <a:srgbClr val="1C2833"/>
+                </a:solidFill>
+                <a:latin typeface="Arial" pitchFamily="34" charset="0"/>
+                <a:ea typeface="Arial" pitchFamily="34" charset="-122"/>
+                <a:cs typeface="Arial" pitchFamily="34" charset="-120"/>
+              </a:rPr>
+              <a:t> on a pink sticky. Both go on the chart paper at the front of the room.</a:t>
+            </a:r>
+            <a:endParaRPr lang="en-US" sz="1200" dirty="0"/>
+          </a:p>
+          <a:p>
+            <a:pPr algn="l" marL="342900" indent="-342900">
+              <a:lnSpc>
+                <a:spcPts val="1620"/>
+              </a:lnSpc>
+              <a:spcAft>
+                <a:spcPts val="300"/>
+              </a:spcAft>
+              <a:buSzPct val="100000"/>
+              <a:buChar char="•"/>
+            </a:pPr>
+            <a:r>
+              <a:rPr lang="en-US" sz="1200" dirty="0">
+                <a:solidFill>
+                  <a:srgbClr val="1C2833"/>
+                </a:solidFill>
+                <a:latin typeface="Arial" pitchFamily="34" charset="0"/>
+                <a:ea typeface="Arial" pitchFamily="34" charset="-122"/>
+                <a:cs typeface="Arial" pitchFamily="34" charset="-120"/>
+              </a:rPr>
+              <a:t>3 minutes: gallery walk. Students see the clusters that form. Teacher counts heads silently.</a:t>
+            </a:r>
+            <a:endParaRPr lang="en-US" sz="1200" dirty="0"/>
+          </a:p>
+        </p:txBody>
+      </p:sp>
+      <p:sp>
+        <p:nvSpPr>
+          <p:cNvPr id="5" name="Text 3"/>
+          <p:cNvSpPr/>
+          <p:nvPr/>
+        </p:nvSpPr>
+        <p:spPr>
+          <a:xfrm>
+            <a:off x="406301" y="4434929"/>
+            <a:ext cx="8498026" cy="213271"/>
+          </a:xfrm>
+          <a:prstGeom prst="rect">
+            <a:avLst/>
+          </a:prstGeom>
+          <a:noFill/>
+          <a:ln/>
+        </p:spPr>
+        <p:txBody>
+          <a:bodyPr wrap="square" lIns="0" tIns="0" rIns="0" bIns="0" rtlCol="0" anchor="t"/>
+          <a:lstStyle/>
+          <a:p>
+            <a:pPr algn="l" indent="0" marL="0">
+              <a:lnSpc>
+                <a:spcPts val="1680"/>
+              </a:lnSpc>
+              <a:spcBef>
+                <a:spcPts val="300"/>
+              </a:spcBef>
+              <a:spcAft>
+                <a:spcPts val="300"/>
+              </a:spcAft>
+              <a:buNone/>
+            </a:pPr>
+            <a:r>
+              <a:rPr lang="en-US" sz="1200" dirty="0">
+                <a:solidFill>
+                  <a:srgbClr val="1C2833"/>
+                </a:solidFill>
+                <a:latin typeface="Arial" pitchFamily="34" charset="0"/>
+                <a:ea typeface="Arial" pitchFamily="34" charset="-122"/>
+                <a:cs typeface="Arial" pitchFamily="34" charset="-120"/>
+              </a:rPr>
+              <a:t>Middle ·  · IKS Curriculum</a:t>
+            </a:r>
+            <a:endParaRPr lang="en-US" sz="1200" dirty="0"/>
+          </a:p>
+        </p:txBody>
+      </p:sp>
+    </p:spTree>
+  </p:cSld>
+  <p:clrMapOvr>
+    <a:masterClrMapping/>
+  </p:clrMapOvr>
+</p:sld>
+</file>
+
+<file path=ppt/slides/slide16.xml><?xml version="1.0" encoding="utf-8"?>
+<p:sld xmlns:a="http://schemas.openxmlformats.org/drawingml/2006/main" xmlns:r="http://schemas.openxmlformats.org/officeDocument/2006/relationships" xmlns:p="http://schemas.openxmlformats.org/presentationml/2006/main">
+  <p:cSld name="Slide 16">
+    <p:bg>
+      <p:bgPr>
+        <a:solidFill>
+          <a:srgbClr val="FFFFFF"/>
+        </a:solidFill>
+      </p:bgPr>
+    </p:bg>
+    <p:spTree>
+      <p:nvGrpSpPr>
+        <p:cNvPr id="1" name=""/>
+        <p:cNvGrpSpPr/>
+        <p:nvPr/>
+      </p:nvGrpSpPr>
+      <p:grpSpPr>
+        <a:xfrm>
+          <a:off x="0" y="0"/>
+          <a:ext cx="0" cy="0"/>
+          <a:chOff x="0" y="0"/>
+          <a:chExt cx="0" cy="0"/>
+        </a:xfrm>
+      </p:grpSpPr>
+      <p:sp>
+        <p:nvSpPr>
+          <p:cNvPr id="2" name="Text 0"/>
+          <p:cNvSpPr/>
+          <p:nvPr/>
+        </p:nvSpPr>
+        <p:spPr>
+          <a:xfrm>
+            <a:off x="0" y="0"/>
+            <a:ext cx="9144000" cy="101501"/>
+          </a:xfrm>
+          <a:prstGeom prst="rect">
+            <a:avLst/>
+          </a:prstGeom>
+          <a:solidFill>
+            <a:srgbClr val="277884"/>
+          </a:solidFill>
+          <a:ln/>
+        </p:spPr>
+        <p:txBody>
+          <a:bodyPr wrap="square" rtlCol="0" anchor="ctr"/>
+          <a:lstStyle/>
+          <a:p>
+            <a:pPr indent="0" marL="0">
+              <a:buNone/>
+            </a:pPr>
+            <a:endParaRPr lang="en-US" dirty="0"/>
+          </a:p>
+        </p:txBody>
+      </p:sp>
+      <p:sp>
+        <p:nvSpPr>
+          <p:cNvPr id="3" name="Text 1"/>
+          <p:cNvSpPr/>
+          <p:nvPr/>
+        </p:nvSpPr>
+        <p:spPr>
+          <a:xfrm>
+            <a:off x="406301" y="457051"/>
+            <a:ext cx="8498026" cy="274290"/>
+          </a:xfrm>
+          <a:prstGeom prst="rect">
+            <a:avLst/>
+          </a:prstGeom>
+          <a:noFill/>
+          <a:ln/>
+        </p:spPr>
+        <p:txBody>
+          <a:bodyPr wrap="square" lIns="0" tIns="0" rIns="0" bIns="0" rtlCol="0" anchor="t"/>
+          <a:lstStyle/>
+          <a:p>
+            <a:pPr algn="l" indent="0" marL="0">
+              <a:lnSpc>
+                <a:spcPts val="2160"/>
+              </a:lnSpc>
+              <a:spcBef>
+                <a:spcPts val="600"/>
+              </a:spcBef>
+              <a:spcAft>
+                <a:spcPts val="800"/>
+              </a:spcAft>
+              <a:buNone/>
+            </a:pPr>
+            <a:r>
+              <a:rPr lang="en-US" sz="1800" b="1" dirty="0">
+                <a:solidFill>
+                  <a:srgbClr val="FE4447"/>
+                </a:solidFill>
+                <a:latin typeface="Georgia" pitchFamily="34" charset="0"/>
+                <a:ea typeface="Georgia" pitchFamily="34" charset="-122"/>
+                <a:cs typeface="Georgia" pitchFamily="34" charset="-120"/>
+              </a:rPr>
+              <a:t>Wrap-up (5 min)</a:t>
+            </a:r>
+            <a:endParaRPr lang="en-US" sz="1800" dirty="0"/>
+          </a:p>
+        </p:txBody>
+      </p:sp>
+      <p:sp>
+        <p:nvSpPr>
+          <p:cNvPr id="4" name="Text 2"/>
+          <p:cNvSpPr/>
+          <p:nvPr/>
+        </p:nvSpPr>
+        <p:spPr>
+          <a:xfrm>
+            <a:off x="634901" y="883593"/>
+            <a:ext cx="8102798" cy="937022"/>
+          </a:xfrm>
+          <a:prstGeom prst="rect">
+            <a:avLst/>
+          </a:prstGeom>
+          <a:noFill/>
+          <a:ln/>
+        </p:spPr>
+        <p:txBody>
+          <a:bodyPr wrap="square" lIns="0" tIns="0" rIns="0" bIns="0" rtlCol="0" anchor="t"/>
+          <a:lstStyle/>
+          <a:p>
+            <a:pPr algn="l" marL="342900" indent="-342900">
+              <a:lnSpc>
+                <a:spcPts val="1620"/>
+              </a:lnSpc>
+              <a:spcAft>
+                <a:spcPts val="300"/>
+              </a:spcAft>
+              <a:buSzPct val="100000"/>
+              <a:buChar char="•"/>
+            </a:pPr>
+            <a:r>
+              <a:rPr lang="en-US" sz="1200" i="1" dirty="0">
+                <a:solidFill>
+                  <a:srgbClr val="1C2833"/>
+                </a:solidFill>
+                <a:latin typeface="Arial" pitchFamily="34" charset="0"/>
+                <a:ea typeface="Arial" pitchFamily="34" charset="-122"/>
+                <a:cs typeface="Arial" pitchFamily="34" charset="-120"/>
+              </a:rPr>
+              <a:t>"Tomorrow you'll commit and write a one-page plan. Tonight: skim the project menu one more time. Look at the sources.md for the module your top choice anchors to. Don't pick what you think is impressive — pick what you're actually curious about."</a:t>
+            </a:r>
+            <a:endParaRPr lang="en-US" sz="1200" dirty="0"/>
+          </a:p>
+          <a:p>
+            <a:pPr algn="l" marL="342900" indent="-342900">
+              <a:lnSpc>
+                <a:spcPts val="1620"/>
+              </a:lnSpc>
+              <a:spcAft>
+                <a:spcPts val="300"/>
+              </a:spcAft>
+              <a:buSzPct val="100000"/>
+              <a:buChar char="•"/>
+            </a:pPr>
+            <a:r>
+              <a:rPr lang="en-US" sz="1200" dirty="0">
+                <a:solidFill>
+                  <a:srgbClr val="1C2833"/>
+                </a:solidFill>
+                <a:latin typeface="Arial" pitchFamily="34" charset="0"/>
+                <a:ea typeface="Arial" pitchFamily="34" charset="-122"/>
+                <a:cs typeface="Arial" pitchFamily="34" charset="-120"/>
+              </a:rPr>
+              <a:t>Exit ticket: a single sentence in their journal: </a:t>
+            </a:r>
+            <a:pPr algn="l" indent="0" marL="0">
+              <a:lnSpc>
+                <a:spcPts val="1620"/>
+              </a:lnSpc>
+              <a:spcAft>
+                <a:spcPts val="300"/>
+              </a:spcAft>
+              <a:buNone/>
+            </a:pPr>
+            <a:r>
+              <a:rPr lang="en-US" sz="1200" i="1" dirty="0">
+                <a:solidFill>
+                  <a:srgbClr val="1C2833"/>
+                </a:solidFill>
+                <a:latin typeface="Arial" pitchFamily="34" charset="0"/>
+                <a:ea typeface="Arial" pitchFamily="34" charset="-122"/>
+                <a:cs typeface="Arial" pitchFamily="34" charset="-120"/>
+              </a:rPr>
+              <a:t>"My top choice is ___ because ___."</a:t>
+            </a:r>
+            <a:endParaRPr lang="en-US" sz="1200" dirty="0"/>
+          </a:p>
+        </p:txBody>
+      </p:sp>
+      <p:sp>
+        <p:nvSpPr>
+          <p:cNvPr id="5" name="Text 3"/>
+          <p:cNvSpPr/>
+          <p:nvPr/>
+        </p:nvSpPr>
+        <p:spPr>
+          <a:xfrm>
+            <a:off x="406301" y="4434929"/>
+            <a:ext cx="8498026" cy="213271"/>
+          </a:xfrm>
+          <a:prstGeom prst="rect">
+            <a:avLst/>
+          </a:prstGeom>
+          <a:noFill/>
+          <a:ln/>
+        </p:spPr>
+        <p:txBody>
+          <a:bodyPr wrap="square" lIns="0" tIns="0" rIns="0" bIns="0" rtlCol="0" anchor="t"/>
+          <a:lstStyle/>
+          <a:p>
+            <a:pPr algn="l" indent="0" marL="0">
+              <a:lnSpc>
+                <a:spcPts val="1680"/>
+              </a:lnSpc>
+              <a:spcBef>
+                <a:spcPts val="300"/>
+              </a:spcBef>
+              <a:spcAft>
+                <a:spcPts val="300"/>
+              </a:spcAft>
+              <a:buNone/>
+            </a:pPr>
+            <a:r>
+              <a:rPr lang="en-US" sz="1200" dirty="0">
+                <a:solidFill>
+                  <a:srgbClr val="1C2833"/>
+                </a:solidFill>
+                <a:latin typeface="Arial" pitchFamily="34" charset="0"/>
+                <a:ea typeface="Arial" pitchFamily="34" charset="-122"/>
+                <a:cs typeface="Arial" pitchFamily="34" charset="-120"/>
+              </a:rPr>
+              <a:t>Middle ·  · IKS Curriculum</a:t>
+            </a:r>
+            <a:endParaRPr lang="en-US" sz="1200" dirty="0"/>
+          </a:p>
+        </p:txBody>
+      </p:sp>
+    </p:spTree>
+  </p:cSld>
+  <p:clrMapOvr>
+    <a:masterClrMapping/>
+  </p:clrMapOvr>
+</p:sld>
+</file>
+
+<file path=ppt/slides/slide17.xml><?xml version="1.0" encoding="utf-8"?>
+<p:sld xmlns:a="http://schemas.openxmlformats.org/drawingml/2006/main" xmlns:r="http://schemas.openxmlformats.org/officeDocument/2006/relationships" xmlns:p="http://schemas.openxmlformats.org/presentationml/2006/main">
+  <p:cSld name="Slide 17">
+    <p:bg>
+      <p:bgPr>
+        <a:solidFill>
+          <a:srgbClr val="FFFFFF"/>
+        </a:solidFill>
+      </p:bgPr>
+    </p:bg>
+    <p:spTree>
+      <p:nvGrpSpPr>
+        <p:cNvPr id="1" name=""/>
+        <p:cNvGrpSpPr/>
+        <p:nvPr/>
+      </p:nvGrpSpPr>
+      <p:grpSpPr>
+        <a:xfrm>
+          <a:off x="0" y="0"/>
+          <a:ext cx="0" cy="0"/>
+          <a:chOff x="0" y="0"/>
+          <a:chExt cx="0" cy="0"/>
+        </a:xfrm>
+      </p:grpSpPr>
+      <p:sp>
+        <p:nvSpPr>
+          <p:cNvPr id="2" name="Text 0"/>
+          <p:cNvSpPr/>
+          <p:nvPr/>
+        </p:nvSpPr>
+        <p:spPr>
+          <a:xfrm>
+            <a:off x="0" y="0"/>
+            <a:ext cx="9144000" cy="101501"/>
+          </a:xfrm>
+          <a:prstGeom prst="rect">
+            <a:avLst/>
+          </a:prstGeom>
+          <a:solidFill>
+            <a:srgbClr val="277884"/>
+          </a:solidFill>
+          <a:ln/>
+        </p:spPr>
+        <p:txBody>
+          <a:bodyPr wrap="square" rtlCol="0" anchor="ctr"/>
+          <a:lstStyle/>
+          <a:p>
+            <a:pPr indent="0" marL="0">
+              <a:buNone/>
+            </a:pPr>
+            <a:endParaRPr lang="en-US" dirty="0"/>
+          </a:p>
+        </p:txBody>
+      </p:sp>
+      <p:sp>
+        <p:nvSpPr>
+          <p:cNvPr id="3" name="Text 1"/>
+          <p:cNvSpPr/>
+          <p:nvPr/>
+        </p:nvSpPr>
+        <p:spPr>
+          <a:xfrm>
+            <a:off x="406301" y="457051"/>
+            <a:ext cx="8498026" cy="274290"/>
+          </a:xfrm>
+          <a:prstGeom prst="rect">
+            <a:avLst/>
+          </a:prstGeom>
+          <a:noFill/>
+          <a:ln/>
+        </p:spPr>
+        <p:txBody>
+          <a:bodyPr wrap="square" lIns="0" tIns="0" rIns="0" bIns="0" rtlCol="0" anchor="t"/>
+          <a:lstStyle/>
+          <a:p>
+            <a:pPr algn="l" indent="0" marL="0">
+              <a:lnSpc>
+                <a:spcPts val="2160"/>
+              </a:lnSpc>
+              <a:spcBef>
+                <a:spcPts val="600"/>
+              </a:spcBef>
+              <a:spcAft>
+                <a:spcPts val="800"/>
+              </a:spcAft>
+              <a:buNone/>
+            </a:pPr>
+            <a:r>
+              <a:rPr lang="en-US" sz="1800" b="1" dirty="0">
+                <a:solidFill>
+                  <a:srgbClr val="FE4447"/>
+                </a:solidFill>
+                <a:latin typeface="Georgia" pitchFamily="34" charset="0"/>
+                <a:ea typeface="Georgia" pitchFamily="34" charset="-122"/>
+                <a:cs typeface="Georgia" pitchFamily="34" charset="-120"/>
+              </a:rPr>
+              <a:t>Student-facing content</a:t>
+            </a:r>
+            <a:endParaRPr lang="en-US" sz="1800" dirty="0"/>
+          </a:p>
+        </p:txBody>
+      </p:sp>
+      <p:sp>
+        <p:nvSpPr>
+          <p:cNvPr id="4" name="Text 2"/>
+          <p:cNvSpPr/>
+          <p:nvPr/>
+        </p:nvSpPr>
+        <p:spPr>
+          <a:xfrm>
+            <a:off x="406301" y="883593"/>
+            <a:ext cx="8331398" cy="2188369"/>
+          </a:xfrm>
+          <a:prstGeom prst="rect">
+            <a:avLst/>
+          </a:prstGeom>
+          <a:solidFill>
+            <a:srgbClr val="F4F8F9"/>
+          </a:solidFill>
+          <a:ln/>
+        </p:spPr>
+        <p:txBody>
+          <a:bodyPr wrap="square" rtlCol="0" anchor="ctr"/>
+          <a:lstStyle/>
+          <a:p>
+            <a:pPr indent="0" marL="0">
+              <a:buNone/>
+            </a:pPr>
+            <a:endParaRPr lang="en-US" dirty="0"/>
+          </a:p>
+        </p:txBody>
+      </p:sp>
+      <p:sp>
+        <p:nvSpPr>
+          <p:cNvPr id="5" name="Shape 3"/>
+          <p:cNvSpPr/>
+          <p:nvPr/>
+        </p:nvSpPr>
+        <p:spPr>
+          <a:xfrm>
+            <a:off x="434876" y="883593"/>
+            <a:ext cx="0" cy="2188369"/>
+          </a:xfrm>
+          <a:prstGeom prst="line">
+            <a:avLst/>
+          </a:prstGeom>
+          <a:noFill/>
+          <a:ln w="57150">
+            <a:solidFill>
+              <a:srgbClr val="FE4447"/>
+            </a:solidFill>
+            <a:prstDash val="solid"/>
+          </a:ln>
+        </p:spPr>
+      </p:sp>
+      <p:sp>
+        <p:nvSpPr>
+          <p:cNvPr id="6" name="Text 4"/>
+          <p:cNvSpPr/>
+          <p:nvPr/>
+        </p:nvSpPr>
+        <p:spPr>
+          <a:xfrm>
+            <a:off x="692051" y="1074093"/>
+            <a:ext cx="7973389" cy="230981"/>
+          </a:xfrm>
+          <a:prstGeom prst="rect">
+            <a:avLst/>
+          </a:prstGeom>
+          <a:noFill/>
+          <a:ln/>
+        </p:spPr>
+        <p:txBody>
+          <a:bodyPr wrap="square" lIns="0" tIns="0" rIns="0" bIns="0" rtlCol="0" anchor="t"/>
+          <a:lstStyle/>
+          <a:p>
+            <a:pPr algn="l" indent="0" marL="0">
+              <a:lnSpc>
+                <a:spcPts val="1820"/>
+              </a:lnSpc>
+              <a:spcBef>
+                <a:spcPts val="300"/>
+              </a:spcBef>
+              <a:spcAft>
+                <a:spcPts val="300"/>
+              </a:spcAft>
+              <a:buNone/>
+            </a:pPr>
+            <a:r>
+              <a:rPr lang="en-US" sz="1300" b="1" i="1" dirty="0">
+                <a:solidFill>
+                  <a:srgbClr val="1C2833"/>
+                </a:solidFill>
+                <a:latin typeface="Georgia" pitchFamily="34" charset="0"/>
+                <a:ea typeface="Georgia" pitchFamily="34" charset="-122"/>
+                <a:cs typeface="Georgia" pitchFamily="34" charset="-120"/>
+              </a:rPr>
+              <a:t>Today you'll meet the project menu and shortlist two options.</a:t>
+            </a:r>
+            <a:endParaRPr lang="en-US" sz="1300" dirty="0"/>
+          </a:p>
+        </p:txBody>
+      </p:sp>
+      <p:sp>
+        <p:nvSpPr>
+          <p:cNvPr id="7" name="Text 5"/>
+          <p:cNvSpPr/>
+          <p:nvPr/>
+        </p:nvSpPr>
+        <p:spPr>
+          <a:xfrm>
+            <a:off x="692051" y="1343174"/>
+            <a:ext cx="7973389" cy="461963"/>
+          </a:xfrm>
+          <a:prstGeom prst="rect">
+            <a:avLst/>
+          </a:prstGeom>
+          <a:noFill/>
+          <a:ln/>
+        </p:spPr>
+        <p:txBody>
+          <a:bodyPr wrap="square" lIns="0" tIns="0" rIns="0" bIns="0" rtlCol="0" anchor="t"/>
+          <a:lstStyle/>
+          <a:p>
+            <a:pPr algn="l" indent="0" marL="0">
+              <a:lnSpc>
+                <a:spcPts val="1820"/>
+              </a:lnSpc>
+              <a:spcBef>
+                <a:spcPts val="300"/>
+              </a:spcBef>
+              <a:spcAft>
+                <a:spcPts val="300"/>
+              </a:spcAft>
+              <a:buNone/>
+            </a:pPr>
+            <a:r>
+              <a:rPr lang="en-US" sz="1300" i="1" dirty="0">
+                <a:solidFill>
+                  <a:srgbClr val="1C2833"/>
+                </a:solidFill>
+                <a:latin typeface="Georgia" pitchFamily="34" charset="0"/>
+                <a:ea typeface="Georgia" pitchFamily="34" charset="-122"/>
+                <a:cs typeface="Georgia" pitchFamily="34" charset="-120"/>
+              </a:rPr>
+              <a:t>A capstone is not a final exam. It's a piece of sustained work — ten classes from question to share. You'll pick ONE project, anchored to ONE prior module, and run it from start to finish.</a:t>
+            </a:r>
+            <a:endParaRPr lang="en-US" sz="1300" dirty="0"/>
+          </a:p>
+        </p:txBody>
+      </p:sp>
+      <p:sp>
+        <p:nvSpPr>
+          <p:cNvPr id="8" name="Text 6"/>
+          <p:cNvSpPr/>
+          <p:nvPr/>
+        </p:nvSpPr>
+        <p:spPr>
+          <a:xfrm>
+            <a:off x="692051" y="1843236"/>
+            <a:ext cx="7973389" cy="230981"/>
+          </a:xfrm>
+          <a:prstGeom prst="rect">
+            <a:avLst/>
+          </a:prstGeom>
+          <a:noFill/>
+          <a:ln/>
+        </p:spPr>
+        <p:txBody>
+          <a:bodyPr wrap="square" lIns="0" tIns="0" rIns="0" bIns="0" rtlCol="0" anchor="t"/>
+          <a:lstStyle/>
+          <a:p>
+            <a:pPr algn="l" indent="0" marL="0">
+              <a:lnSpc>
+                <a:spcPts val="1820"/>
+              </a:lnSpc>
+              <a:spcBef>
+                <a:spcPts val="300"/>
+              </a:spcBef>
+              <a:spcAft>
+                <a:spcPts val="300"/>
+              </a:spcAft>
+              <a:buNone/>
+            </a:pPr>
+            <a:r>
+              <a:rPr lang="en-US" sz="1300" i="1" dirty="0">
+                <a:solidFill>
+                  <a:srgbClr val="1C2833"/>
+                </a:solidFill>
+                <a:latin typeface="Georgia" pitchFamily="34" charset="0"/>
+                <a:ea typeface="Georgia" pitchFamily="34" charset="-122"/>
+                <a:cs typeface="Georgia" pitchFamily="34" charset="-120"/>
+              </a:rPr>
+              <a:t>Two new words for this module:</a:t>
+            </a:r>
+            <a:endParaRPr lang="en-US" sz="1300" dirty="0"/>
+          </a:p>
+        </p:txBody>
+      </p:sp>
+      <p:sp>
+        <p:nvSpPr>
+          <p:cNvPr id="9" name="Text 7"/>
+          <p:cNvSpPr/>
+          <p:nvPr/>
+        </p:nvSpPr>
+        <p:spPr>
+          <a:xfrm>
+            <a:off x="692051" y="2112318"/>
+            <a:ext cx="7973389" cy="230981"/>
+          </a:xfrm>
+          <a:prstGeom prst="rect">
+            <a:avLst/>
+          </a:prstGeom>
+          <a:noFill/>
+          <a:ln/>
+        </p:spPr>
+        <p:txBody>
+          <a:bodyPr wrap="square" lIns="0" tIns="0" rIns="0" bIns="0" rtlCol="0" anchor="t"/>
+          <a:lstStyle/>
+          <a:p>
+            <a:pPr algn="l" indent="0" marL="0">
+              <a:lnSpc>
+                <a:spcPts val="1820"/>
+              </a:lnSpc>
+              <a:spcBef>
+                <a:spcPts val="300"/>
+              </a:spcBef>
+              <a:spcAft>
+                <a:spcPts val="300"/>
+              </a:spcAft>
+              <a:buNone/>
+            </a:pPr>
+            <a:r>
+              <a:rPr lang="en-US" sz="1300" i="1" dirty="0">
+                <a:solidFill>
+                  <a:srgbClr val="1C2833"/>
+                </a:solidFill>
+                <a:latin typeface="Georgia" pitchFamily="34" charset="0"/>
+                <a:ea typeface="Georgia" pitchFamily="34" charset="-122"/>
+                <a:cs typeface="Georgia" pitchFamily="34" charset="-120"/>
+              </a:rPr>
+              <a:t>abhyāsa</a:t>
+            </a:r>
+            <a:pPr algn="l" indent="0" marL="0">
+              <a:lnSpc>
+                <a:spcPts val="1820"/>
+              </a:lnSpc>
+              <a:spcBef>
+                <a:spcPts val="300"/>
+              </a:spcBef>
+              <a:spcAft>
+                <a:spcPts val="300"/>
+              </a:spcAft>
+              <a:buNone/>
+            </a:pPr>
+            <a:r>
+              <a:rPr lang="en-US" sz="1300" dirty="0">
+                <a:solidFill>
+                  <a:srgbClr val="1C2833"/>
+                </a:solidFill>
+                <a:latin typeface="Georgia" pitchFamily="34" charset="0"/>
+                <a:ea typeface="Georgia" pitchFamily="34" charset="-122"/>
+                <a:cs typeface="Georgia" pitchFamily="34" charset="-120"/>
+              </a:rPr>
+              <a:t> — repeated practice; what turns a draft into a finished piece.</a:t>
+            </a:r>
+            <a:endParaRPr lang="en-US" sz="1300" dirty="0"/>
+          </a:p>
+        </p:txBody>
+      </p:sp>
+      <p:sp>
+        <p:nvSpPr>
+          <p:cNvPr id="10" name="Text 8"/>
+          <p:cNvSpPr/>
+          <p:nvPr/>
+        </p:nvSpPr>
+        <p:spPr>
+          <a:xfrm>
+            <a:off x="692051" y="2381399"/>
+            <a:ext cx="7973389" cy="230981"/>
+          </a:xfrm>
+          <a:prstGeom prst="rect">
+            <a:avLst/>
+          </a:prstGeom>
+          <a:noFill/>
+          <a:ln/>
+        </p:spPr>
+        <p:txBody>
+          <a:bodyPr wrap="square" lIns="0" tIns="0" rIns="0" bIns="0" rtlCol="0" anchor="t"/>
+          <a:lstStyle/>
+          <a:p>
+            <a:pPr algn="l" indent="0" marL="0">
+              <a:lnSpc>
+                <a:spcPts val="1820"/>
+              </a:lnSpc>
+              <a:spcBef>
+                <a:spcPts val="300"/>
+              </a:spcBef>
+              <a:spcAft>
+                <a:spcPts val="300"/>
+              </a:spcAft>
+              <a:buNone/>
+            </a:pPr>
+            <a:r>
+              <a:rPr lang="en-US" sz="1300" i="1" dirty="0">
+                <a:solidFill>
+                  <a:srgbClr val="1C2833"/>
+                </a:solidFill>
+                <a:latin typeface="Georgia" pitchFamily="34" charset="0"/>
+                <a:ea typeface="Georgia" pitchFamily="34" charset="-122"/>
+                <a:cs typeface="Georgia" pitchFamily="34" charset="-120"/>
+              </a:rPr>
+              <a:t>vicāra</a:t>
+            </a:r>
+            <a:pPr algn="l" indent="0" marL="0">
+              <a:lnSpc>
+                <a:spcPts val="1820"/>
+              </a:lnSpc>
+              <a:spcBef>
+                <a:spcPts val="300"/>
+              </a:spcBef>
+              <a:spcAft>
+                <a:spcPts val="300"/>
+              </a:spcAft>
+              <a:buNone/>
+            </a:pPr>
+            <a:r>
+              <a:rPr lang="en-US" sz="1300" dirty="0">
+                <a:solidFill>
+                  <a:srgbClr val="1C2833"/>
+                </a:solidFill>
+                <a:latin typeface="Georgia" pitchFamily="34" charset="0"/>
+                <a:ea typeface="Georgia" pitchFamily="34" charset="-122"/>
+                <a:cs typeface="Georgia" pitchFamily="34" charset="-120"/>
+              </a:rPr>
+              <a:t> — inquiry, reflection; what turns an observation into a question.</a:t>
+            </a:r>
+            <a:endParaRPr lang="en-US" sz="1300" dirty="0"/>
+          </a:p>
+        </p:txBody>
+      </p:sp>
+      <p:sp>
+        <p:nvSpPr>
+          <p:cNvPr id="11" name="Text 9"/>
+          <p:cNvSpPr/>
+          <p:nvPr/>
+        </p:nvSpPr>
+        <p:spPr>
+          <a:xfrm>
+            <a:off x="692051" y="2650480"/>
+            <a:ext cx="7973389" cy="230981"/>
+          </a:xfrm>
+          <a:prstGeom prst="rect">
+            <a:avLst/>
+          </a:prstGeom>
+          <a:noFill/>
+          <a:ln/>
+        </p:spPr>
+        <p:txBody>
+          <a:bodyPr wrap="square" lIns="0" tIns="0" rIns="0" bIns="0" rtlCol="0" anchor="t"/>
+          <a:lstStyle/>
+          <a:p>
+            <a:pPr algn="l" indent="0" marL="0">
+              <a:lnSpc>
+                <a:spcPts val="1820"/>
+              </a:lnSpc>
+              <a:spcBef>
+                <a:spcPts val="300"/>
+              </a:spcBef>
+              <a:spcAft>
+                <a:spcPts val="300"/>
+              </a:spcAft>
+              <a:buNone/>
+            </a:pPr>
+            <a:r>
+              <a:rPr lang="en-US" sz="1300" dirty="0">
+                <a:solidFill>
+                  <a:srgbClr val="1C2833"/>
+                </a:solidFill>
+                <a:latin typeface="Georgia" pitchFamily="34" charset="0"/>
+                <a:ea typeface="Georgia" pitchFamily="34" charset="-122"/>
+                <a:cs typeface="Georgia" pitchFamily="34" charset="-120"/>
+              </a:rPr>
+              <a:t>A capstone is </a:t>
+            </a:r>
+            <a:pPr algn="l" indent="0" marL="0">
+              <a:lnSpc>
+                <a:spcPts val="1820"/>
+              </a:lnSpc>
+              <a:spcBef>
+                <a:spcPts val="300"/>
+              </a:spcBef>
+              <a:spcAft>
+                <a:spcPts val="300"/>
+              </a:spcAft>
+              <a:buNone/>
+            </a:pPr>
+            <a:r>
+              <a:rPr lang="en-US" sz="1300" i="1" dirty="0">
+                <a:solidFill>
+                  <a:srgbClr val="1C2833"/>
+                </a:solidFill>
+                <a:latin typeface="Georgia" pitchFamily="34" charset="0"/>
+                <a:ea typeface="Georgia" pitchFamily="34" charset="-122"/>
+                <a:cs typeface="Georgia" pitchFamily="34" charset="-120"/>
+              </a:rPr>
+              <a:t>abhyāsa</a:t>
+            </a:r>
+            <a:pPr algn="l" indent="0" marL="0">
+              <a:lnSpc>
+                <a:spcPts val="1820"/>
+              </a:lnSpc>
+              <a:spcBef>
+                <a:spcPts val="300"/>
+              </a:spcBef>
+              <a:spcAft>
+                <a:spcPts val="300"/>
+              </a:spcAft>
+              <a:buNone/>
+            </a:pPr>
+            <a:r>
+              <a:rPr lang="en-US" sz="1300" dirty="0">
+                <a:solidFill>
+                  <a:srgbClr val="1C2833"/>
+                </a:solidFill>
+                <a:latin typeface="Georgia" pitchFamily="34" charset="0"/>
+                <a:ea typeface="Georgia" pitchFamily="34" charset="-122"/>
+                <a:cs typeface="Georgia" pitchFamily="34" charset="-120"/>
+              </a:rPr>
+              <a:t> applied to a </a:t>
+            </a:r>
+            <a:pPr algn="l" indent="0" marL="0">
+              <a:lnSpc>
+                <a:spcPts val="1820"/>
+              </a:lnSpc>
+              <a:spcBef>
+                <a:spcPts val="300"/>
+              </a:spcBef>
+              <a:spcAft>
+                <a:spcPts val="300"/>
+              </a:spcAft>
+              <a:buNone/>
+            </a:pPr>
+            <a:r>
+              <a:rPr lang="en-US" sz="1300" i="1" dirty="0">
+                <a:solidFill>
+                  <a:srgbClr val="1C2833"/>
+                </a:solidFill>
+                <a:latin typeface="Georgia" pitchFamily="34" charset="0"/>
+                <a:ea typeface="Georgia" pitchFamily="34" charset="-122"/>
+                <a:cs typeface="Georgia" pitchFamily="34" charset="-120"/>
+              </a:rPr>
+              <a:t>vicāra</a:t>
+            </a:r>
+            <a:pPr algn="l" indent="0" marL="0">
+              <a:lnSpc>
+                <a:spcPts val="1820"/>
+              </a:lnSpc>
+              <a:spcBef>
+                <a:spcPts val="300"/>
+              </a:spcBef>
+              <a:spcAft>
+                <a:spcPts val="300"/>
+              </a:spcAft>
+              <a:buNone/>
+            </a:pPr>
+            <a:r>
+              <a:rPr lang="en-US" sz="1300" dirty="0">
+                <a:solidFill>
+                  <a:srgbClr val="1C2833"/>
+                </a:solidFill>
+                <a:latin typeface="Georgia" pitchFamily="34" charset="0"/>
+                <a:ea typeface="Georgia" pitchFamily="34" charset="-122"/>
+                <a:cs typeface="Georgia" pitchFamily="34" charset="-120"/>
+              </a:rPr>
               <a:t>.</a:t>
+            </a:r>
+            <a:endParaRPr lang="en-US" sz="1300" dirty="0"/>
+          </a:p>
+        </p:txBody>
+      </p:sp>
+      <p:sp>
+        <p:nvSpPr>
+          <p:cNvPr id="12" name="Text 10"/>
+          <p:cNvSpPr/>
+          <p:nvPr/>
+        </p:nvSpPr>
+        <p:spPr>
+          <a:xfrm>
+            <a:off x="406301" y="4434929"/>
+            <a:ext cx="8498026" cy="213271"/>
+          </a:xfrm>
+          <a:prstGeom prst="rect">
+            <a:avLst/>
+          </a:prstGeom>
+          <a:noFill/>
+          <a:ln/>
+        </p:spPr>
+        <p:txBody>
+          <a:bodyPr wrap="square" lIns="0" tIns="0" rIns="0" bIns="0" rtlCol="0" anchor="t"/>
+          <a:lstStyle/>
+          <a:p>
+            <a:pPr algn="l" indent="0" marL="0">
+              <a:lnSpc>
+                <a:spcPts val="1680"/>
+              </a:lnSpc>
+              <a:spcBef>
+                <a:spcPts val="300"/>
+              </a:spcBef>
+              <a:spcAft>
+                <a:spcPts val="300"/>
+              </a:spcAft>
+              <a:buNone/>
+            </a:pPr>
+            <a:r>
+              <a:rPr lang="en-US" sz="1200" dirty="0">
+                <a:solidFill>
+                  <a:srgbClr val="1C2833"/>
+                </a:solidFill>
+                <a:latin typeface="Arial" pitchFamily="34" charset="0"/>
+                <a:ea typeface="Arial" pitchFamily="34" charset="-122"/>
+                <a:cs typeface="Arial" pitchFamily="34" charset="-120"/>
+              </a:rPr>
+              <a:t>Middle ·  · IKS Curriculum</a:t>
+            </a:r>
+            <a:endParaRPr lang="en-US" sz="1200" dirty="0"/>
+          </a:p>
+        </p:txBody>
+      </p:sp>
+    </p:spTree>
+  </p:cSld>
+  <p:clrMapOvr>
+    <a:masterClrMapping/>
+  </p:clrMapOvr>
+</p:sld>
+</file>
+
+<file path=ppt/slides/slide18.xml><?xml version="1.0" encoding="utf-8"?>
+<p:sld xmlns:a="http://schemas.openxmlformats.org/drawingml/2006/main" xmlns:r="http://schemas.openxmlformats.org/officeDocument/2006/relationships" xmlns:p="http://schemas.openxmlformats.org/presentationml/2006/main">
+  <p:cSld name="Slide 18">
+    <p:bg>
+      <p:bgPr>
+        <a:solidFill>
+          <a:srgbClr val="FFFFFF"/>
+        </a:solidFill>
+      </p:bgPr>
+    </p:bg>
+    <p:spTree>
+      <p:nvGrpSpPr>
+        <p:cNvPr id="1" name=""/>
+        <p:cNvGrpSpPr/>
+        <p:nvPr/>
+      </p:nvGrpSpPr>
+      <p:grpSpPr>
+        <a:xfrm>
+          <a:off x="0" y="0"/>
+          <a:ext cx="0" cy="0"/>
+          <a:chOff x="0" y="0"/>
+          <a:chExt cx="0" cy="0"/>
+        </a:xfrm>
+      </p:grpSpPr>
+      <p:sp>
+        <p:nvSpPr>
+          <p:cNvPr id="2" name="Text 0"/>
+          <p:cNvSpPr/>
+          <p:nvPr/>
+        </p:nvSpPr>
+        <p:spPr>
+          <a:xfrm>
+            <a:off x="0" y="0"/>
+            <a:ext cx="9144000" cy="101501"/>
+          </a:xfrm>
+          <a:prstGeom prst="rect">
+            <a:avLst/>
+          </a:prstGeom>
+          <a:solidFill>
+            <a:srgbClr val="277884"/>
+          </a:solidFill>
+          <a:ln/>
+        </p:spPr>
+        <p:txBody>
+          <a:bodyPr wrap="square" rtlCol="0" anchor="ctr"/>
+          <a:lstStyle/>
+          <a:p>
+            <a:pPr indent="0" marL="0">
+              <a:buNone/>
+            </a:pPr>
+            <a:endParaRPr lang="en-US" dirty="0"/>
+          </a:p>
+        </p:txBody>
+      </p:sp>
+      <p:sp>
+        <p:nvSpPr>
+          <p:cNvPr id="3" name="Text 1"/>
+          <p:cNvSpPr/>
+          <p:nvPr/>
+        </p:nvSpPr>
+        <p:spPr>
+          <a:xfrm>
+            <a:off x="406301" y="457051"/>
+            <a:ext cx="8498026" cy="274290"/>
+          </a:xfrm>
+          <a:prstGeom prst="rect">
+            <a:avLst/>
+          </a:prstGeom>
+          <a:noFill/>
+          <a:ln/>
+        </p:spPr>
+        <p:txBody>
+          <a:bodyPr wrap="square" lIns="0" tIns="0" rIns="0" bIns="0" rtlCol="0" anchor="t"/>
+          <a:lstStyle/>
+          <a:p>
+            <a:pPr algn="l" indent="0" marL="0">
+              <a:lnSpc>
+                <a:spcPts val="2160"/>
+              </a:lnSpc>
+              <a:spcBef>
+                <a:spcPts val="600"/>
+              </a:spcBef>
+              <a:spcAft>
+                <a:spcPts val="800"/>
+              </a:spcAft>
+              <a:buNone/>
+            </a:pPr>
+            <a:r>
+              <a:rPr lang="en-US" sz="1800" b="1" dirty="0">
+                <a:solidFill>
+                  <a:srgbClr val="FE4447"/>
+                </a:solidFill>
+                <a:latin typeface="Georgia" pitchFamily="34" charset="0"/>
+                <a:ea typeface="Georgia" pitchFamily="34" charset="-122"/>
+                <a:cs typeface="Georgia" pitchFamily="34" charset="-120"/>
+              </a:rPr>
+              <a:t>Homework</a:t>
+            </a:r>
+            <a:endParaRPr lang="en-US" sz="1800" dirty="0"/>
+          </a:p>
+        </p:txBody>
+      </p:sp>
+      <p:sp>
+        <p:nvSpPr>
+          <p:cNvPr id="4" name="Text 2"/>
+          <p:cNvSpPr/>
+          <p:nvPr/>
+        </p:nvSpPr>
+        <p:spPr>
+          <a:xfrm>
+            <a:off x="634901" y="883593"/>
+            <a:ext cx="8102798" cy="788491"/>
+          </a:xfrm>
+          <a:prstGeom prst="rect">
+            <a:avLst/>
+          </a:prstGeom>
+          <a:noFill/>
+          <a:ln/>
+        </p:spPr>
+        <p:txBody>
+          <a:bodyPr wrap="square" lIns="0" tIns="0" rIns="0" bIns="0" rtlCol="0" anchor="t"/>
+          <a:lstStyle/>
+          <a:p>
+            <a:pPr algn="l" marL="342900" indent="-342900">
+              <a:lnSpc>
+                <a:spcPts val="1620"/>
+              </a:lnSpc>
+              <a:spcAft>
+                <a:spcPts val="300"/>
+              </a:spcAft>
+              <a:buSzPct val="100000"/>
+              <a:buChar char="•"/>
+            </a:pPr>
+            <a:r>
+              <a:rPr lang="en-US" sz="1200" dirty="0">
+                <a:solidFill>
+                  <a:srgbClr val="1C2833"/>
+                </a:solidFill>
+                <a:latin typeface="Arial" pitchFamily="34" charset="0"/>
+                <a:ea typeface="Arial" pitchFamily="34" charset="-122"/>
+                <a:cs typeface="Arial" pitchFamily="34" charset="-120"/>
+              </a:rPr>
+              <a:t>Skim the menu one more time at home.</a:t>
+            </a:r>
+            <a:endParaRPr lang="en-US" sz="1200" dirty="0"/>
+          </a:p>
+          <a:p>
+            <a:pPr algn="l" marL="342900" indent="-342900">
+              <a:lnSpc>
+                <a:spcPts val="1620"/>
+              </a:lnSpc>
+              <a:spcAft>
+                <a:spcPts val="300"/>
+              </a:spcAft>
+              <a:buSzPct val="100000"/>
+              <a:buChar char="•"/>
+            </a:pPr>
+            <a:r>
+              <a:rPr lang="en-US" sz="1200" dirty="0">
+                <a:solidFill>
+                  <a:srgbClr val="1C2833"/>
+                </a:solidFill>
+                <a:latin typeface="Arial" pitchFamily="34" charset="0"/>
+                <a:ea typeface="Arial" pitchFamily="34" charset="-122"/>
+                <a:cs typeface="Arial" pitchFamily="34" charset="-120"/>
+              </a:rPr>
+              <a:t>Open the </a:t>
+            </a:r>
+            <a:pPr algn="l" indent="0" marL="0">
+              <a:lnSpc>
+                <a:spcPts val="1620"/>
+              </a:lnSpc>
+              <a:spcAft>
+                <a:spcPts val="300"/>
+              </a:spcAft>
+              <a:buNone/>
+            </a:pPr>
+            <a:r>
+              <a:rPr lang="en-US" sz="1200" dirty="0">
+                <a:solidFill>
+                  <a:srgbClr val="1C2833"/>
+                </a:solidFill>
+                <a:latin typeface="Arial" pitchFamily="34" charset="0"/>
+                <a:ea typeface="Arial" pitchFamily="34" charset="-122"/>
+                <a:cs typeface="Arial" pitchFamily="34" charset="-120"/>
+              </a:rPr>
+              <a:t>sources.md</a:t>
+            </a:r>
+            <a:pPr algn="l" indent="0" marL="0">
+              <a:lnSpc>
+                <a:spcPts val="1620"/>
+              </a:lnSpc>
+              <a:spcAft>
+                <a:spcPts val="300"/>
+              </a:spcAft>
+              <a:buNone/>
+            </a:pPr>
+            <a:r>
+              <a:rPr lang="en-US" sz="1200" dirty="0">
+                <a:solidFill>
+                  <a:srgbClr val="1C2833"/>
+                </a:solidFill>
+                <a:latin typeface="Arial" pitchFamily="34" charset="0"/>
+                <a:ea typeface="Arial" pitchFamily="34" charset="-122"/>
+                <a:cs typeface="Arial" pitchFamily="34" charset="-120"/>
+              </a:rPr>
+              <a:t> of the prior module your top choice anchors to (or ask a parent to help locate it).</a:t>
+            </a:r>
+            <a:endParaRPr lang="en-US" sz="1200" dirty="0"/>
+          </a:p>
+          <a:p>
+            <a:pPr algn="l" marL="342900" indent="-342900">
+              <a:lnSpc>
+                <a:spcPts val="1620"/>
+              </a:lnSpc>
+              <a:spcAft>
+                <a:spcPts val="300"/>
+              </a:spcAft>
+              <a:buSzPct val="100000"/>
+              <a:buChar char="•"/>
+            </a:pPr>
+            <a:r>
+              <a:rPr lang="en-US" sz="1200" dirty="0">
+                <a:solidFill>
+                  <a:srgbClr val="1C2833"/>
+                </a:solidFill>
+                <a:latin typeface="Arial" pitchFamily="34" charset="0"/>
+                <a:ea typeface="Arial" pitchFamily="34" charset="-122"/>
+                <a:cs typeface="Arial" pitchFamily="34" charset="-120"/>
+              </a:rPr>
+              <a:t>Bring your </a:t>
+            </a:r>
+            <a:pPr algn="l" indent="0" marL="0">
+              <a:lnSpc>
+                <a:spcPts val="1620"/>
+              </a:lnSpc>
+              <a:spcAft>
+                <a:spcPts val="300"/>
+              </a:spcAft>
+              <a:buNone/>
+            </a:pPr>
+            <a:r>
+              <a:rPr lang="en-US" sz="1200" b="1" dirty="0">
+                <a:solidFill>
+                  <a:srgbClr val="1C2833"/>
+                </a:solidFill>
+                <a:latin typeface="Arial" pitchFamily="34" charset="0"/>
+                <a:ea typeface="Arial" pitchFamily="34" charset="-122"/>
+                <a:cs typeface="Arial" pitchFamily="34" charset="-120"/>
+              </a:rPr>
+              <a:t>two shortlisted options</a:t>
+            </a:r>
+            <a:pPr algn="l" indent="0" marL="0">
+              <a:lnSpc>
+                <a:spcPts val="1620"/>
+              </a:lnSpc>
+              <a:spcAft>
+                <a:spcPts val="300"/>
+              </a:spcAft>
+              <a:buNone/>
+            </a:pPr>
+            <a:r>
+              <a:rPr lang="en-US" sz="1200" dirty="0">
+                <a:solidFill>
+                  <a:srgbClr val="1C2833"/>
+                </a:solidFill>
+                <a:latin typeface="Arial" pitchFamily="34" charset="0"/>
+                <a:ea typeface="Arial" pitchFamily="34" charset="-122"/>
+                <a:cs typeface="Arial" pitchFamily="34" charset="-120"/>
+              </a:rPr>
+              <a:t> in writing tomorrow.</a:t>
+            </a:r>
+            <a:endParaRPr lang="en-US" sz="1200" dirty="0"/>
+          </a:p>
+        </p:txBody>
+      </p:sp>
+      <p:sp>
+        <p:nvSpPr>
+          <p:cNvPr id="5" name="Text 3"/>
+          <p:cNvSpPr/>
+          <p:nvPr/>
+        </p:nvSpPr>
+        <p:spPr>
+          <a:xfrm>
+            <a:off x="406301" y="4434929"/>
+            <a:ext cx="8498026" cy="213271"/>
+          </a:xfrm>
+          <a:prstGeom prst="rect">
+            <a:avLst/>
+          </a:prstGeom>
+          <a:noFill/>
+          <a:ln/>
+        </p:spPr>
+        <p:txBody>
+          <a:bodyPr wrap="square" lIns="0" tIns="0" rIns="0" bIns="0" rtlCol="0" anchor="t"/>
+          <a:lstStyle/>
+          <a:p>
+            <a:pPr algn="l" indent="0" marL="0">
+              <a:lnSpc>
+                <a:spcPts val="1680"/>
+              </a:lnSpc>
+              <a:spcBef>
+                <a:spcPts val="300"/>
+              </a:spcBef>
+              <a:spcAft>
+                <a:spcPts val="300"/>
+              </a:spcAft>
+              <a:buNone/>
+            </a:pPr>
+            <a:r>
+              <a:rPr lang="en-US" sz="1200" dirty="0">
+                <a:solidFill>
+                  <a:srgbClr val="1C2833"/>
+                </a:solidFill>
+                <a:latin typeface="Arial" pitchFamily="34" charset="0"/>
+                <a:ea typeface="Arial" pitchFamily="34" charset="-122"/>
+                <a:cs typeface="Arial" pitchFamily="34" charset="-120"/>
+              </a:rPr>
+              <a:t>Middle ·  · IKS Curriculum</a:t>
+            </a:r>
+            <a:endParaRPr lang="en-US" sz="1200" dirty="0"/>
+          </a:p>
+        </p:txBody>
+      </p:sp>
+    </p:spTree>
+  </p:cSld>
+  <p:clrMapOvr>
+    <a:masterClrMapping/>
+  </p:clrMapOvr>
+</p:sld>
+</file>
+
+<file path=ppt/slides/slide19.xml><?xml version="1.0" encoding="utf-8"?>
+<p:sld xmlns:a="http://schemas.openxmlformats.org/drawingml/2006/main" xmlns:r="http://schemas.openxmlformats.org/officeDocument/2006/relationships" xmlns:p="http://schemas.openxmlformats.org/presentationml/2006/main">
+  <p:cSld name="Slide 19">
+    <p:bg>
+      <p:bgPr>
+        <a:solidFill>
+          <a:srgbClr val="FFFFFF"/>
+        </a:solidFill>
+      </p:bgPr>
+    </p:bg>
+    <p:spTree>
+      <p:nvGrpSpPr>
+        <p:cNvPr id="1" name=""/>
+        <p:cNvGrpSpPr/>
+        <p:nvPr/>
+      </p:nvGrpSpPr>
+      <p:grpSpPr>
+        <a:xfrm>
+          <a:off x="0" y="0"/>
+          <a:ext cx="0" cy="0"/>
+          <a:chOff x="0" y="0"/>
+          <a:chExt cx="0" cy="0"/>
+        </a:xfrm>
+      </p:grpSpPr>
+      <p:sp>
+        <p:nvSpPr>
+          <p:cNvPr id="2" name="Text 0"/>
+          <p:cNvSpPr/>
+          <p:nvPr/>
+        </p:nvSpPr>
+        <p:spPr>
+          <a:xfrm>
+            <a:off x="0" y="0"/>
+            <a:ext cx="9144000" cy="101501"/>
+          </a:xfrm>
+          <a:prstGeom prst="rect">
+            <a:avLst/>
+          </a:prstGeom>
+          <a:solidFill>
+            <a:srgbClr val="277884"/>
+          </a:solidFill>
+          <a:ln/>
+        </p:spPr>
+        <p:txBody>
+          <a:bodyPr wrap="square" rtlCol="0" anchor="ctr"/>
+          <a:lstStyle/>
+          <a:p>
+            <a:pPr indent="0" marL="0">
+              <a:buNone/>
+            </a:pPr>
+            <a:endParaRPr lang="en-US" dirty="0"/>
+          </a:p>
+        </p:txBody>
+      </p:sp>
+      <p:sp>
+        <p:nvSpPr>
+          <p:cNvPr id="3" name="Text 1"/>
+          <p:cNvSpPr/>
+          <p:nvPr/>
+        </p:nvSpPr>
+        <p:spPr>
+          <a:xfrm>
+            <a:off x="406301" y="457051"/>
+            <a:ext cx="8498026" cy="274290"/>
+          </a:xfrm>
+          <a:prstGeom prst="rect">
+            <a:avLst/>
+          </a:prstGeom>
+          <a:noFill/>
+          <a:ln/>
+        </p:spPr>
+        <p:txBody>
+          <a:bodyPr wrap="square" lIns="0" tIns="0" rIns="0" bIns="0" rtlCol="0" anchor="t"/>
+          <a:lstStyle/>
+          <a:p>
+            <a:pPr algn="l" indent="0" marL="0">
+              <a:lnSpc>
+                <a:spcPts val="2160"/>
+              </a:lnSpc>
+              <a:spcBef>
+                <a:spcPts val="600"/>
+              </a:spcBef>
+              <a:spcAft>
+                <a:spcPts val="800"/>
+              </a:spcAft>
+              <a:buNone/>
+            </a:pPr>
+            <a:r>
+              <a:rPr lang="en-US" sz="1800" b="1" dirty="0">
+                <a:solidFill>
+                  <a:srgbClr val="FE4447"/>
+                </a:solidFill>
+                <a:latin typeface="Georgia" pitchFamily="34" charset="0"/>
+                <a:ea typeface="Georgia" pitchFamily="34" charset="-122"/>
+                <a:cs typeface="Georgia" pitchFamily="34" charset="-120"/>
+              </a:rPr>
+              <a:t>Differentiation</a:t>
+            </a:r>
+            <a:endParaRPr lang="en-US" sz="1800" dirty="0"/>
+          </a:p>
+        </p:txBody>
+      </p:sp>
+      <p:sp>
+        <p:nvSpPr>
+          <p:cNvPr id="4" name="Text 2"/>
+          <p:cNvSpPr/>
+          <p:nvPr/>
+        </p:nvSpPr>
+        <p:spPr>
+          <a:xfrm>
+            <a:off x="634901" y="883593"/>
+            <a:ext cx="8102798" cy="937022"/>
+          </a:xfrm>
+          <a:prstGeom prst="rect">
+            <a:avLst/>
+          </a:prstGeom>
+          <a:noFill/>
+          <a:ln/>
+        </p:spPr>
+        <p:txBody>
+          <a:bodyPr wrap="square" lIns="0" tIns="0" rIns="0" bIns="0" rtlCol="0" anchor="t"/>
+          <a:lstStyle/>
+          <a:p>
+            <a:pPr algn="l" marL="342900" indent="-342900">
+              <a:lnSpc>
+                <a:spcPts val="1620"/>
+              </a:lnSpc>
+              <a:spcAft>
+                <a:spcPts val="300"/>
+              </a:spcAft>
+              <a:buSzPct val="100000"/>
+              <a:buChar char="•"/>
+            </a:pPr>
+            <a:r>
+              <a:rPr lang="en-US" sz="1200" b="1" dirty="0">
+                <a:solidFill>
+                  <a:srgbClr val="1C2833"/>
+                </a:solidFill>
+                <a:latin typeface="Arial" pitchFamily="34" charset="0"/>
+                <a:ea typeface="Arial" pitchFamily="34" charset="-122"/>
+                <a:cs typeface="Arial" pitchFamily="34" charset="-120"/>
+              </a:rPr>
+              <a:t>One tier up:</a:t>
+            </a:r>
+            <a:pPr algn="l" indent="0" marL="0">
+              <a:lnSpc>
+                <a:spcPts val="1620"/>
+              </a:lnSpc>
+              <a:spcAft>
+                <a:spcPts val="300"/>
+              </a:spcAft>
+              <a:buNone/>
+            </a:pPr>
+            <a:r>
+              <a:rPr lang="en-US" sz="1200" dirty="0">
+                <a:solidFill>
+                  <a:srgbClr val="1C2833"/>
+                </a:solidFill>
+                <a:latin typeface="Arial" pitchFamily="34" charset="0"/>
+                <a:ea typeface="Arial" pitchFamily="34" charset="-122"/>
+                <a:cs typeface="Arial" pitchFamily="34" charset="-120"/>
+              </a:rPr>
+              <a:t> If your top choice is Project 10 (open design), draft a one-paragraph pitch overnight — bring it tomorrow so I can approve at start of class.</a:t>
+            </a:r>
+            <a:endParaRPr lang="en-US" sz="1200" dirty="0"/>
+          </a:p>
+          <a:p>
+            <a:pPr algn="l" marL="342900" indent="-342900">
+              <a:lnSpc>
+                <a:spcPts val="1620"/>
+              </a:lnSpc>
+              <a:spcAft>
+                <a:spcPts val="300"/>
+              </a:spcAft>
+              <a:buSzPct val="100000"/>
+              <a:buChar char="•"/>
+            </a:pPr>
+            <a:r>
+              <a:rPr lang="en-US" sz="1200" b="1" dirty="0">
+                <a:solidFill>
+                  <a:srgbClr val="1C2833"/>
+                </a:solidFill>
+                <a:latin typeface="Arial" pitchFamily="34" charset="0"/>
+                <a:ea typeface="Arial" pitchFamily="34" charset="-122"/>
+                <a:cs typeface="Arial" pitchFamily="34" charset="-120"/>
+              </a:rPr>
+              <a:t>One tier down:</a:t>
+            </a:r>
+            <a:pPr algn="l" indent="0" marL="0">
+              <a:lnSpc>
+                <a:spcPts val="1620"/>
+              </a:lnSpc>
+              <a:spcAft>
+                <a:spcPts val="300"/>
+              </a:spcAft>
+              <a:buNone/>
+            </a:pPr>
+            <a:r>
+              <a:rPr lang="en-US" sz="1200" dirty="0">
+                <a:solidFill>
+                  <a:srgbClr val="1C2833"/>
+                </a:solidFill>
+                <a:latin typeface="Arial" pitchFamily="34" charset="0"/>
+                <a:ea typeface="Arial" pitchFamily="34" charset="-122"/>
+                <a:cs typeface="Arial" pitchFamily="34" charset="-120"/>
+              </a:rPr>
+              <a:t> If you're stuck between projects, pick by elimination — which one needs materials you can't get at home? Cross those off first.</a:t>
             </a:r>
             <a:endParaRPr lang="en-US" sz="1200" dirty="0"/>
           </a:p>
@@ -3112,7 +6428,7 @@
                 <a:ea typeface="Georgia" pitchFamily="34" charset="-122"/>
                 <a:cs typeface="Georgia" pitchFamily="34" charset="-120"/>
               </a:rPr>
-              <a:t>Materials</a:t>
+              <a:t>Learning objective</a:t>
             </a:r>
             <a:endParaRPr lang="en-US" sz="1800" dirty="0"/>
           </a:p>
@@ -3127,7 +6443,7 @@
         <p:spPr>
           <a:xfrm>
             <a:off x="406301" y="870942"/>
-            <a:ext cx="8498026" cy="649337"/>
+            <a:ext cx="8498026" cy="426541"/>
           </a:xfrm>
           <a:prstGeom prst="rect">
             <a:avLst/>
@@ -3160,8 +6476,33 @@
                 <a:ea typeface="Arial" pitchFamily="34" charset="-122"/>
                 <a:cs typeface="Arial" pitchFamily="34" charset="-120"/>
               </a:rPr>
-              <a:t>– One printed copy of the project menu per student (lifted from </a:t>
-            </a:r>
+              <a:t>By the end of this lesson, students will name the 10 project options, identify the prior module each anchors to, and shortlist two options they're considering.</a:t>
+            </a:r>
+            <a:endParaRPr lang="en-US" sz="1200" dirty="0"/>
+          </a:p>
+        </p:txBody>
+      </p:sp>
+      <p:sp>
+        <p:nvSpPr>
+          <p:cNvPr id="5" name="Text 3"/>
+          <p:cNvSpPr/>
+          <p:nvPr/>
+        </p:nvSpPr>
+        <p:spPr>
+          <a:xfrm>
+            <a:off x="406301" y="4434929"/>
+            <a:ext cx="8498026" cy="213271"/>
+          </a:xfrm>
+          <a:prstGeom prst="rect">
+            <a:avLst/>
+          </a:prstGeom>
+          <a:noFill/>
+          <a:ln/>
+        </p:spPr>
+        <p:txBody>
+          <a:bodyPr wrap="square" lIns="0" tIns="0" rIns="0" bIns="0" rtlCol="0" anchor="t"/>
+          <a:lstStyle/>
+          <a:p>
             <a:pPr algn="l" indent="0" marL="0">
               <a:lnSpc>
                 <a:spcPts val="1680"/>
@@ -3183,8 +6524,277 @@
                 <a:ea typeface="Arial" pitchFamily="34" charset="-122"/>
                 <a:cs typeface="Arial" pitchFamily="34" charset="-120"/>
               </a:rPr>
-              <a:t>README.md</a:t>
-            </a:r>
+              <a:t>Middle ·  · IKS Curriculum</a:t>
+            </a:r>
+            <a:endParaRPr lang="en-US" sz="1200" dirty="0"/>
+          </a:p>
+        </p:txBody>
+      </p:sp>
+    </p:spTree>
+  </p:cSld>
+  <p:clrMapOvr>
+    <a:masterClrMapping/>
+  </p:clrMapOvr>
+</p:sld>
+</file>
+
+<file path=ppt/slides/slide20.xml><?xml version="1.0" encoding="utf-8"?>
+<p:sld xmlns:a="http://schemas.openxmlformats.org/drawingml/2006/main" xmlns:r="http://schemas.openxmlformats.org/officeDocument/2006/relationships" xmlns:p="http://schemas.openxmlformats.org/presentationml/2006/main">
+  <p:cSld name="Slide 20">
+    <p:bg>
+      <p:bgPr>
+        <a:solidFill>
+          <a:srgbClr val="FFFFFF"/>
+        </a:solidFill>
+      </p:bgPr>
+    </p:bg>
+    <p:spTree>
+      <p:nvGrpSpPr>
+        <p:cNvPr id="1" name=""/>
+        <p:cNvGrpSpPr/>
+        <p:nvPr/>
+      </p:nvGrpSpPr>
+      <p:grpSpPr>
+        <a:xfrm>
+          <a:off x="0" y="0"/>
+          <a:ext cx="0" cy="0"/>
+          <a:chOff x="0" y="0"/>
+          <a:chExt cx="0" cy="0"/>
+        </a:xfrm>
+      </p:grpSpPr>
+      <p:sp>
+        <p:nvSpPr>
+          <p:cNvPr id="2" name="Text 0"/>
+          <p:cNvSpPr/>
+          <p:nvPr/>
+        </p:nvSpPr>
+        <p:spPr>
+          <a:xfrm>
+            <a:off x="0" y="0"/>
+            <a:ext cx="9144000" cy="101501"/>
+          </a:xfrm>
+          <a:prstGeom prst="rect">
+            <a:avLst/>
+          </a:prstGeom>
+          <a:solidFill>
+            <a:srgbClr val="277884"/>
+          </a:solidFill>
+          <a:ln/>
+        </p:spPr>
+        <p:txBody>
+          <a:bodyPr wrap="square" rtlCol="0" anchor="ctr"/>
+          <a:lstStyle/>
+          <a:p>
+            <a:pPr indent="0" marL="0">
+              <a:buNone/>
+            </a:pPr>
+            <a:endParaRPr lang="en-US" dirty="0"/>
+          </a:p>
+        </p:txBody>
+      </p:sp>
+      <p:sp>
+        <p:nvSpPr>
+          <p:cNvPr id="3" name="Text 1"/>
+          <p:cNvSpPr/>
+          <p:nvPr/>
+        </p:nvSpPr>
+        <p:spPr>
+          <a:xfrm>
+            <a:off x="406301" y="457051"/>
+            <a:ext cx="8498026" cy="274290"/>
+          </a:xfrm>
+          <a:prstGeom prst="rect">
+            <a:avLst/>
+          </a:prstGeom>
+          <a:noFill/>
+          <a:ln/>
+        </p:spPr>
+        <p:txBody>
+          <a:bodyPr wrap="square" lIns="0" tIns="0" rIns="0" bIns="0" rtlCol="0" anchor="t"/>
+          <a:lstStyle/>
+          <a:p>
+            <a:pPr algn="l" indent="0" marL="0">
+              <a:lnSpc>
+                <a:spcPts val="2160"/>
+              </a:lnSpc>
+              <a:spcBef>
+                <a:spcPts val="600"/>
+              </a:spcBef>
+              <a:spcAft>
+                <a:spcPts val="800"/>
+              </a:spcAft>
+              <a:buNone/>
+            </a:pPr>
+            <a:r>
+              <a:rPr lang="en-US" sz="1800" b="1" dirty="0">
+                <a:solidFill>
+                  <a:srgbClr val="FE4447"/>
+                </a:solidFill>
+                <a:latin typeface="Georgia" pitchFamily="34" charset="0"/>
+                <a:ea typeface="Georgia" pitchFamily="34" charset="-122"/>
+                <a:cs typeface="Georgia" pitchFamily="34" charset="-120"/>
+              </a:rPr>
+              <a:t>Teacher notes</a:t>
+            </a:r>
+            <a:endParaRPr lang="en-US" sz="1800" dirty="0"/>
+          </a:p>
+        </p:txBody>
+      </p:sp>
+      <p:sp>
+        <p:nvSpPr>
+          <p:cNvPr id="4" name="Text 2"/>
+          <p:cNvSpPr/>
+          <p:nvPr/>
+        </p:nvSpPr>
+        <p:spPr>
+          <a:xfrm>
+            <a:off x="634901" y="883593"/>
+            <a:ext cx="8102798" cy="1180802"/>
+          </a:xfrm>
+          <a:prstGeom prst="rect">
+            <a:avLst/>
+          </a:prstGeom>
+          <a:noFill/>
+          <a:ln/>
+        </p:spPr>
+        <p:txBody>
+          <a:bodyPr wrap="square" lIns="0" tIns="0" rIns="0" bIns="0" rtlCol="0" anchor="t"/>
+          <a:lstStyle/>
+          <a:p>
+            <a:pPr algn="l" marL="342900" indent="-342900">
+              <a:lnSpc>
+                <a:spcPts val="1620"/>
+              </a:lnSpc>
+              <a:spcAft>
+                <a:spcPts val="300"/>
+              </a:spcAft>
+              <a:buSzPct val="100000"/>
+              <a:buChar char="•"/>
+            </a:pPr>
+            <a:r>
+              <a:rPr lang="en-US" sz="1200" dirty="0">
+                <a:solidFill>
+                  <a:srgbClr val="1C2833"/>
+                </a:solidFill>
+                <a:latin typeface="Arial" pitchFamily="34" charset="0"/>
+                <a:ea typeface="Arial" pitchFamily="34" charset="-122"/>
+                <a:cs typeface="Arial" pitchFamily="34" charset="-120"/>
+              </a:rPr>
+              <a:t>Resist the urge to suggest projects to specific students. Let them choose.</a:t>
+            </a:r>
+            <a:endParaRPr lang="en-US" sz="1200" dirty="0"/>
+          </a:p>
+          <a:p>
+            <a:pPr algn="l" marL="342900" indent="-342900">
+              <a:lnSpc>
+                <a:spcPts val="1620"/>
+              </a:lnSpc>
+              <a:spcAft>
+                <a:spcPts val="300"/>
+              </a:spcAft>
+              <a:buSzPct val="100000"/>
+              <a:buChar char="•"/>
+            </a:pPr>
+            <a:r>
+              <a:rPr lang="en-US" sz="1200" dirty="0">
+                <a:solidFill>
+                  <a:srgbClr val="1C2833"/>
+                </a:solidFill>
+                <a:latin typeface="Arial" pitchFamily="34" charset="0"/>
+                <a:ea typeface="Arial" pitchFamily="34" charset="-122"/>
+                <a:cs typeface="Arial" pitchFamily="34" charset="-120"/>
+              </a:rPr>
+              <a:t>Watch the sticky-note clusters: if 8 students all want Project 4 (herbs), you'll need to cap and re-direct tomorrow. Have a quick plan for which projects you'll cap.</a:t>
+            </a:r>
+            <a:endParaRPr lang="en-US" sz="1200" dirty="0"/>
+          </a:p>
+          <a:p>
+            <a:pPr algn="l" marL="342900" indent="-342900">
+              <a:lnSpc>
+                <a:spcPts val="1620"/>
+              </a:lnSpc>
+              <a:spcAft>
+                <a:spcPts val="300"/>
+              </a:spcAft>
+              <a:buSzPct val="100000"/>
+              <a:buChar char="•"/>
+            </a:pPr>
+            <a:r>
+              <a:rPr lang="en-US" sz="1200" dirty="0">
+                <a:solidFill>
+                  <a:srgbClr val="1C2833"/>
+                </a:solidFill>
+                <a:latin typeface="Arial" pitchFamily="34" charset="0"/>
+                <a:ea typeface="Arial" pitchFamily="34" charset="-122"/>
+                <a:cs typeface="Arial" pitchFamily="34" charset="-120"/>
+              </a:rPr>
+              <a:t>The two new Sanskrit terms (</a:t>
+            </a:r>
+            <a:pPr algn="l" indent="0" marL="0">
+              <a:lnSpc>
+                <a:spcPts val="1620"/>
+              </a:lnSpc>
+              <a:spcAft>
+                <a:spcPts val="300"/>
+              </a:spcAft>
+              <a:buNone/>
+            </a:pPr>
+            <a:r>
+              <a:rPr lang="en-US" sz="1200" i="1" dirty="0">
+                <a:solidFill>
+                  <a:srgbClr val="1C2833"/>
+                </a:solidFill>
+                <a:latin typeface="Arial" pitchFamily="34" charset="0"/>
+                <a:ea typeface="Arial" pitchFamily="34" charset="-122"/>
+                <a:cs typeface="Arial" pitchFamily="34" charset="-120"/>
+              </a:rPr>
+              <a:t>abhyāsa, vicāra</a:t>
+            </a:r>
+            <a:pPr algn="l" indent="0" marL="0">
+              <a:lnSpc>
+                <a:spcPts val="1620"/>
+              </a:lnSpc>
+              <a:spcAft>
+                <a:spcPts val="300"/>
+              </a:spcAft>
+              <a:buNone/>
+            </a:pPr>
+            <a:r>
+              <a:rPr lang="en-US" sz="1200" dirty="0">
+                <a:solidFill>
+                  <a:srgbClr val="1C2833"/>
+                </a:solidFill>
+                <a:latin typeface="Arial" pitchFamily="34" charset="0"/>
+                <a:ea typeface="Arial" pitchFamily="34" charset="-122"/>
+                <a:cs typeface="Arial" pitchFamily="34" charset="-120"/>
+              </a:rPr>
+              <a:t>) come back in Day 5 (critique) and Day 8 (documentation). Don't drill them today; introduce and move on.</a:t>
+            </a:r>
+            <a:endParaRPr lang="en-US" sz="1200" dirty="0"/>
+          </a:p>
+        </p:txBody>
+      </p:sp>
+      <p:sp>
+        <p:nvSpPr>
+          <p:cNvPr id="5" name="Text 3"/>
+          <p:cNvSpPr/>
+          <p:nvPr/>
+        </p:nvSpPr>
+        <p:spPr>
+          <a:xfrm>
+            <a:off x="406301" y="4434929"/>
+            <a:ext cx="8498026" cy="213271"/>
+          </a:xfrm>
+          <a:prstGeom prst="rect">
+            <a:avLst/>
+          </a:prstGeom>
+          <a:noFill/>
+          <a:ln/>
+        </p:spPr>
+        <p:txBody>
+          <a:bodyPr wrap="square" lIns="0" tIns="0" rIns="0" bIns="0" rtlCol="0" anchor="t"/>
+          <a:lstStyle/>
+          <a:p>
             <a:pPr algn="l" indent="0" marL="0">
               <a:lnSpc>
                 <a:spcPts val="1680"/>
@@ -3206,7 +6816,203 @@
                 <a:ea typeface="Arial" pitchFamily="34" charset="-122"/>
                 <a:cs typeface="Arial" pitchFamily="34" charset="-120"/>
               </a:rPr>
-              <a:t>) – A large sheet of chart paper at the front of the room labelled "Choose Your Project" – Sticky notes, 2 per student, 2 colours (e.g. yellow for first choice, pink for second) – A wall display or projector showing the icons/photos of the 14 prior modules</a:t>
+              <a:t>Middle ·  · IKS Curriculum</a:t>
+            </a:r>
+            <a:endParaRPr lang="en-US" sz="1200" dirty="0"/>
+          </a:p>
+        </p:txBody>
+      </p:sp>
+    </p:spTree>
+  </p:cSld>
+  <p:clrMapOvr>
+    <a:masterClrMapping/>
+  </p:clrMapOvr>
+</p:sld>
+</file>
+
+<file path=ppt/slides/slide21.xml><?xml version="1.0" encoding="utf-8"?>
+<p:sld xmlns:a="http://schemas.openxmlformats.org/drawingml/2006/main" xmlns:r="http://schemas.openxmlformats.org/officeDocument/2006/relationships" xmlns:p="http://schemas.openxmlformats.org/presentationml/2006/main">
+  <p:cSld name="Slide 21">
+    <p:bg>
+      <p:bgPr>
+        <a:solidFill>
+          <a:srgbClr val="FFFFFF"/>
+        </a:solidFill>
+      </p:bgPr>
+    </p:bg>
+    <p:spTree>
+      <p:nvGrpSpPr>
+        <p:cNvPr id="1" name=""/>
+        <p:cNvGrpSpPr/>
+        <p:nvPr/>
+      </p:nvGrpSpPr>
+      <p:grpSpPr>
+        <a:xfrm>
+          <a:off x="0" y="0"/>
+          <a:ext cx="0" cy="0"/>
+          <a:chOff x="0" y="0"/>
+          <a:chExt cx="0" cy="0"/>
+        </a:xfrm>
+      </p:grpSpPr>
+      <p:sp>
+        <p:nvSpPr>
+          <p:cNvPr id="2" name="Text 0"/>
+          <p:cNvSpPr/>
+          <p:nvPr/>
+        </p:nvSpPr>
+        <p:spPr>
+          <a:xfrm>
+            <a:off x="0" y="0"/>
+            <a:ext cx="9144000" cy="101501"/>
+          </a:xfrm>
+          <a:prstGeom prst="rect">
+            <a:avLst/>
+          </a:prstGeom>
+          <a:solidFill>
+            <a:srgbClr val="277884"/>
+          </a:solidFill>
+          <a:ln/>
+        </p:spPr>
+        <p:txBody>
+          <a:bodyPr wrap="square" rtlCol="0" anchor="ctr"/>
+          <a:lstStyle/>
+          <a:p>
+            <a:pPr indent="0" marL="0">
+              <a:buNone/>
+            </a:pPr>
+            <a:endParaRPr lang="en-US" dirty="0"/>
+          </a:p>
+        </p:txBody>
+      </p:sp>
+      <p:sp>
+        <p:nvSpPr>
+          <p:cNvPr id="3" name="Text 1"/>
+          <p:cNvSpPr/>
+          <p:nvPr/>
+        </p:nvSpPr>
+        <p:spPr>
+          <a:xfrm>
+            <a:off x="406301" y="457051"/>
+            <a:ext cx="8498026" cy="274290"/>
+          </a:xfrm>
+          <a:prstGeom prst="rect">
+            <a:avLst/>
+          </a:prstGeom>
+          <a:noFill/>
+          <a:ln/>
+        </p:spPr>
+        <p:txBody>
+          <a:bodyPr wrap="square" lIns="0" tIns="0" rIns="0" bIns="0" rtlCol="0" anchor="t"/>
+          <a:lstStyle/>
+          <a:p>
+            <a:pPr algn="l" indent="0" marL="0">
+              <a:lnSpc>
+                <a:spcPts val="2160"/>
+              </a:lnSpc>
+              <a:spcBef>
+                <a:spcPts val="600"/>
+              </a:spcBef>
+              <a:spcAft>
+                <a:spcPts val="800"/>
+              </a:spcAft>
+              <a:buNone/>
+            </a:pPr>
+            <a:r>
+              <a:rPr lang="en-US" sz="1800" b="1" dirty="0">
+                <a:solidFill>
+                  <a:srgbClr val="FE4447"/>
+                </a:solidFill>
+                <a:latin typeface="Georgia" pitchFamily="34" charset="0"/>
+                <a:ea typeface="Georgia" pitchFamily="34" charset="-122"/>
+                <a:cs typeface="Georgia" pitchFamily="34" charset="-120"/>
+              </a:rPr>
+              <a:t>Citation(s) used in this lesson</a:t>
+            </a:r>
+            <a:endParaRPr lang="en-US" sz="1800" dirty="0"/>
+          </a:p>
+        </p:txBody>
+      </p:sp>
+      <p:sp>
+        <p:nvSpPr>
+          <p:cNvPr id="4" name="Text 2"/>
+          <p:cNvSpPr/>
+          <p:nvPr/>
+        </p:nvSpPr>
+        <p:spPr>
+          <a:xfrm>
+            <a:off x="634901" y="883593"/>
+            <a:ext cx="8102798" cy="506611"/>
+          </a:xfrm>
+          <a:prstGeom prst="rect">
+            <a:avLst/>
+          </a:prstGeom>
+          <a:noFill/>
+          <a:ln/>
+        </p:spPr>
+        <p:txBody>
+          <a:bodyPr wrap="square" lIns="0" tIns="0" rIns="0" bIns="0" rtlCol="0" anchor="t"/>
+          <a:lstStyle/>
+          <a:p>
+            <a:pPr algn="l" marL="342900" indent="-342900">
+              <a:lnSpc>
+                <a:spcPts val="1620"/>
+              </a:lnSpc>
+              <a:spcAft>
+                <a:spcPts val="300"/>
+              </a:spcAft>
+              <a:buSzPct val="100000"/>
+              <a:buChar char="•"/>
+            </a:pPr>
+            <a:r>
+              <a:rPr lang="en-US" sz="1200" dirty="0">
+                <a:solidFill>
+                  <a:srgbClr val="1C2833"/>
+                </a:solidFill>
+                <a:latin typeface="Arial" pitchFamily="34" charset="0"/>
+                <a:ea typeface="Arial" pitchFamily="34" charset="-122"/>
+                <a:cs typeface="Arial" pitchFamily="34" charset="-120"/>
+              </a:rPr>
+              <a:t>No primary-source citation needed today — this is a process-orientation lesson. Sanskrit terms drawn from </a:t>
+            </a:r>
+            <a:pPr algn="l" indent="0" marL="0">
+              <a:lnSpc>
+                <a:spcPts val="1620"/>
+              </a:lnSpc>
+              <a:spcAft>
+                <a:spcPts val="300"/>
+              </a:spcAft>
+              <a:buNone/>
+            </a:pPr>
+            <a:r>
+              <a:rPr lang="en-US" sz="1200" dirty="0">
+                <a:solidFill>
+                  <a:srgbClr val="1C2833"/>
+                </a:solidFill>
+                <a:latin typeface="Arial" pitchFamily="34" charset="0"/>
+                <a:ea typeface="Arial" pitchFamily="34" charset="-122"/>
+                <a:cs typeface="Arial" pitchFamily="34" charset="-120"/>
+              </a:rPr>
+              <a:t>_shared/glossary.md</a:t>
+            </a:r>
+            <a:pPr algn="l" indent="0" marL="0">
+              <a:lnSpc>
+                <a:spcPts val="1620"/>
+              </a:lnSpc>
+              <a:spcAft>
+                <a:spcPts val="300"/>
+              </a:spcAft>
+              <a:buNone/>
+            </a:pPr>
+            <a:r>
+              <a:rPr lang="en-US" sz="1200" dirty="0">
+                <a:solidFill>
+                  <a:srgbClr val="1C2833"/>
+                </a:solidFill>
+                <a:latin typeface="Arial" pitchFamily="34" charset="0"/>
+                <a:ea typeface="Arial" pitchFamily="34" charset="-122"/>
+                <a:cs typeface="Arial" pitchFamily="34" charset="-120"/>
+              </a:rPr>
+              <a:t>.</a:t>
             </a:r>
             <a:endParaRPr lang="en-US" sz="1200" dirty="0"/>
           </a:p>
@@ -3364,7 +7170,7 @@
                 <a:ea typeface="Georgia" pitchFamily="34" charset="-122"/>
                 <a:cs typeface="Georgia" pitchFamily="34" charset="-120"/>
               </a:rPr>
-              <a:t>Vocabulary introduced today</a:t>
+              <a:t>Materials</a:t>
             </a:r>
             <a:endParaRPr lang="en-US" sz="1800" dirty="0"/>
           </a:p>
@@ -3379,7 +7185,7 @@
         <p:spPr>
           <a:xfrm>
             <a:off x="634901" y="883593"/>
-            <a:ext cx="8102798" cy="937022"/>
+            <a:ext cx="8102798" cy="1032272"/>
           </a:xfrm>
           <a:prstGeom prst="rect">
             <a:avLst/>
@@ -3402,15 +7208,15 @@
               <a:buChar char="•"/>
             </a:pPr>
             <a:r>
-              <a:rPr lang="en-US" sz="1200" i="1" dirty="0">
-                <a:solidFill>
-                  <a:srgbClr val="1C2833"/>
-                </a:solidFill>
-                <a:latin typeface="Arial" pitchFamily="34" charset="0"/>
-                <a:ea typeface="Arial" pitchFamily="34" charset="-122"/>
-                <a:cs typeface="Arial" pitchFamily="34" charset="-120"/>
-              </a:rPr>
-              <a:t>abhyāsa</a:t>
+              <a:rPr lang="en-US" sz="1200" dirty="0">
+                <a:solidFill>
+                  <a:srgbClr val="1C2833"/>
+                </a:solidFill>
+                <a:latin typeface="Arial" pitchFamily="34" charset="0"/>
+                <a:ea typeface="Arial" pitchFamily="34" charset="-122"/>
+                <a:cs typeface="Arial" pitchFamily="34" charset="-120"/>
+              </a:rPr>
+              <a:t>One printed copy of the project menu per student (lifted from </a:t>
             </a:r>
             <a:pPr algn="l" indent="0" marL="0">
               <a:lnSpc>
@@ -3430,7 +7236,7 @@
                 <a:ea typeface="Arial" pitchFamily="34" charset="-122"/>
                 <a:cs typeface="Arial" pitchFamily="34" charset="-120"/>
               </a:rPr>
-              <a:t> (IAST: abhyāsa; lit. "repeated practice") — the disciplined repetition that turns a draft into a finished artefact. The capstone is a sustained piece of </a:t>
+              <a:t>README.md</a:t>
             </a:r>
             <a:pPr algn="l" indent="0" marL="0">
               <a:lnSpc>
@@ -3442,26 +7248,6 @@
               <a:buNone/>
             </a:pPr>
             <a:r>
-              <a:rPr lang="en-US" sz="1200" i="1" dirty="0">
-                <a:solidFill>
-                  <a:srgbClr val="1C2833"/>
-                </a:solidFill>
-                <a:latin typeface="Arial" pitchFamily="34" charset="0"/>
-                <a:ea typeface="Arial" pitchFamily="34" charset="-122"/>
-                <a:cs typeface="Arial" pitchFamily="34" charset="-120"/>
-              </a:rPr>
-              <a:t>abhyāsa</a:t>
-            </a:r>
-            <a:pPr algn="l" indent="0" marL="0">
-              <a:lnSpc>
-                <a:spcPts val="1620"/>
-              </a:lnSpc>
-              <a:spcAft>
-                <a:spcPts val="300"/>
-              </a:spcAft>
-              <a:buNone/>
-            </a:pPr>
-            <a:r>
               <a:rPr lang="en-US" sz="1200" dirty="0">
                 <a:solidFill>
                   <a:srgbClr val="1C2833"/>
@@ -3470,7 +7256,7 @@
                 <a:ea typeface="Arial" pitchFamily="34" charset="-122"/>
                 <a:cs typeface="Arial" pitchFamily="34" charset="-120"/>
               </a:rPr>
-              <a:t>.</a:t>
+              <a:t>)</a:t>
             </a:r>
             <a:endParaRPr lang="en-US" sz="1200" dirty="0"/>
           </a:p>
@@ -3486,24 +7272,28 @@
               <a:buChar char="•"/>
             </a:pPr>
             <a:r>
-              <a:rPr lang="en-US" sz="1200" i="1" dirty="0">
-                <a:solidFill>
-                  <a:srgbClr val="1C2833"/>
-                </a:solidFill>
-                <a:latin typeface="Arial" pitchFamily="34" charset="0"/>
-                <a:ea typeface="Arial" pitchFamily="34" charset="-122"/>
-                <a:cs typeface="Arial" pitchFamily="34" charset="-120"/>
-              </a:rPr>
-              <a:t>vicāra</a:t>
-            </a:r>
-            <a:pPr algn="l" indent="0" marL="0">
+              <a:rPr lang="en-US" sz="1200" dirty="0">
+                <a:solidFill>
+                  <a:srgbClr val="1C2833"/>
+                </a:solidFill>
+                <a:latin typeface="Arial" pitchFamily="34" charset="0"/>
+                <a:ea typeface="Arial" pitchFamily="34" charset="-122"/>
+                <a:cs typeface="Arial" pitchFamily="34" charset="-120"/>
+              </a:rPr>
+              <a:t>A large sheet of chart paper at the front of the room labelled "Choose Your Project"</a:t>
+            </a:r>
+            <a:endParaRPr lang="en-US" sz="1200" dirty="0"/>
+          </a:p>
+          <a:p>
+            <a:pPr algn="l" marL="342900" indent="-342900">
               <a:lnSpc>
                 <a:spcPts val="1620"/>
               </a:lnSpc>
               <a:spcAft>
                 <a:spcPts val="300"/>
               </a:spcAft>
-              <a:buNone/>
+              <a:buSzPct val="100000"/>
+              <a:buChar char="•"/>
             </a:pPr>
             <a:r>
               <a:rPr lang="en-US" sz="1200" dirty="0">
@@ -3514,36 +7304,20 @@
                 <a:ea typeface="Arial" pitchFamily="34" charset="-122"/>
                 <a:cs typeface="Arial" pitchFamily="34" charset="-120"/>
               </a:rPr>
-              <a:t> (IAST: vicāra; lit. "inquiry, reflection") — the thinking-step that turns an observation into a question worth investigating. Every project begins with a </a:t>
-            </a:r>
-            <a:pPr algn="l" indent="0" marL="0">
+              <a:t>Sticky notes, 2 per student, 2 colours (e.g. yellow for first choice, pink for second)</a:t>
+            </a:r>
+            <a:endParaRPr lang="en-US" sz="1200" dirty="0"/>
+          </a:p>
+          <a:p>
+            <a:pPr algn="l" marL="342900" indent="-342900">
               <a:lnSpc>
                 <a:spcPts val="1620"/>
               </a:lnSpc>
               <a:spcAft>
                 <a:spcPts val="300"/>
               </a:spcAft>
-              <a:buNone/>
-            </a:pPr>
-            <a:r>
-              <a:rPr lang="en-US" sz="1200" i="1" dirty="0">
-                <a:solidFill>
-                  <a:srgbClr val="1C2833"/>
-                </a:solidFill>
-                <a:latin typeface="Arial" pitchFamily="34" charset="0"/>
-                <a:ea typeface="Arial" pitchFamily="34" charset="-122"/>
-                <a:cs typeface="Arial" pitchFamily="34" charset="-120"/>
-              </a:rPr>
-              <a:t>vicāra</a:t>
-            </a:r>
-            <a:pPr algn="l" indent="0" marL="0">
-              <a:lnSpc>
-                <a:spcPts val="1620"/>
-              </a:lnSpc>
-              <a:spcAft>
-                <a:spcPts val="300"/>
-              </a:spcAft>
-              <a:buNone/>
+              <a:buSzPct val="100000"/>
+              <a:buChar char="•"/>
             </a:pPr>
             <a:r>
               <a:rPr lang="en-US" sz="1200" dirty="0">
@@ -3554,7 +7328,7 @@
                 <a:ea typeface="Arial" pitchFamily="34" charset="-122"/>
                 <a:cs typeface="Arial" pitchFamily="34" charset="-120"/>
               </a:rPr>
-              <a:t>.</a:t>
+              <a:t>A wall display or projector showing the icons/photos of the 14 prior modules</a:t>
             </a:r>
             <a:endParaRPr lang="en-US" sz="1200" dirty="0"/>
           </a:p>
@@ -3712,7 +7486,7 @@
                 <a:ea typeface="Georgia" pitchFamily="34" charset="-122"/>
                 <a:cs typeface="Georgia" pitchFamily="34" charset="-120"/>
               </a:rPr>
-              <a:t>Lesson flow</a:t>
+              <a:t>Vocabulary introduced today</a:t>
             </a:r>
             <a:endParaRPr lang="en-US" sz="1800" dirty="0"/>
           </a:p>
@@ -3721,6 +7495,196 @@
       <p:sp>
         <p:nvSpPr>
           <p:cNvPr id="4" name="Text 2"/>
+          <p:cNvSpPr/>
+          <p:nvPr/>
+        </p:nvSpPr>
+        <p:spPr>
+          <a:xfrm>
+            <a:off x="634901" y="883593"/>
+            <a:ext cx="8102798" cy="937022"/>
+          </a:xfrm>
+          <a:prstGeom prst="rect">
+            <a:avLst/>
+          </a:prstGeom>
+          <a:noFill/>
+          <a:ln/>
+        </p:spPr>
+        <p:txBody>
+          <a:bodyPr wrap="square" lIns="0" tIns="0" rIns="0" bIns="0" rtlCol="0" anchor="t"/>
+          <a:lstStyle/>
+          <a:p>
+            <a:pPr algn="l" marL="342900" indent="-342900">
+              <a:lnSpc>
+                <a:spcPts val="1620"/>
+              </a:lnSpc>
+              <a:spcAft>
+                <a:spcPts val="300"/>
+              </a:spcAft>
+              <a:buSzPct val="100000"/>
+              <a:buChar char="•"/>
+            </a:pPr>
+            <a:r>
+              <a:rPr lang="en-US" sz="1200" i="1" dirty="0">
+                <a:solidFill>
+                  <a:srgbClr val="1C2833"/>
+                </a:solidFill>
+                <a:latin typeface="Arial" pitchFamily="34" charset="0"/>
+                <a:ea typeface="Arial" pitchFamily="34" charset="-122"/>
+                <a:cs typeface="Arial" pitchFamily="34" charset="-120"/>
+              </a:rPr>
+              <a:t>abhyāsa</a:t>
+            </a:r>
+            <a:pPr algn="l" indent="0" marL="0">
+              <a:lnSpc>
+                <a:spcPts val="1620"/>
+              </a:lnSpc>
+              <a:spcAft>
+                <a:spcPts val="300"/>
+              </a:spcAft>
+              <a:buNone/>
+            </a:pPr>
+            <a:r>
+              <a:rPr lang="en-US" sz="1200" dirty="0">
+                <a:solidFill>
+                  <a:srgbClr val="1C2833"/>
+                </a:solidFill>
+                <a:latin typeface="Arial" pitchFamily="34" charset="0"/>
+                <a:ea typeface="Arial" pitchFamily="34" charset="-122"/>
+                <a:cs typeface="Arial" pitchFamily="34" charset="-120"/>
+              </a:rPr>
+              <a:t> (IAST: abhyāsa; lit. "repeated practice") — the disciplined repetition that turns a draft into a finished artefact. The capstone is a sustained piece of </a:t>
+            </a:r>
+            <a:pPr algn="l" indent="0" marL="0">
+              <a:lnSpc>
+                <a:spcPts val="1620"/>
+              </a:lnSpc>
+              <a:spcAft>
+                <a:spcPts val="300"/>
+              </a:spcAft>
+              <a:buNone/>
+            </a:pPr>
+            <a:r>
+              <a:rPr lang="en-US" sz="1200" i="1" dirty="0">
+                <a:solidFill>
+                  <a:srgbClr val="1C2833"/>
+                </a:solidFill>
+                <a:latin typeface="Arial" pitchFamily="34" charset="0"/>
+                <a:ea typeface="Arial" pitchFamily="34" charset="-122"/>
+                <a:cs typeface="Arial" pitchFamily="34" charset="-120"/>
+              </a:rPr>
+              <a:t>abhyāsa</a:t>
+            </a:r>
+            <a:pPr algn="l" indent="0" marL="0">
+              <a:lnSpc>
+                <a:spcPts val="1620"/>
+              </a:lnSpc>
+              <a:spcAft>
+                <a:spcPts val="300"/>
+              </a:spcAft>
+              <a:buNone/>
+            </a:pPr>
+            <a:r>
+              <a:rPr lang="en-US" sz="1200" dirty="0">
+                <a:solidFill>
+                  <a:srgbClr val="1C2833"/>
+                </a:solidFill>
+                <a:latin typeface="Arial" pitchFamily="34" charset="0"/>
+                <a:ea typeface="Arial" pitchFamily="34" charset="-122"/>
+                <a:cs typeface="Arial" pitchFamily="34" charset="-120"/>
+              </a:rPr>
+              <a:t>.</a:t>
+            </a:r>
+            <a:endParaRPr lang="en-US" sz="1200" dirty="0"/>
+          </a:p>
+          <a:p>
+            <a:pPr algn="l" marL="342900" indent="-342900">
+              <a:lnSpc>
+                <a:spcPts val="1620"/>
+              </a:lnSpc>
+              <a:spcAft>
+                <a:spcPts val="300"/>
+              </a:spcAft>
+              <a:buSzPct val="100000"/>
+              <a:buChar char="•"/>
+            </a:pPr>
+            <a:r>
+              <a:rPr lang="en-US" sz="1200" i="1" dirty="0">
+                <a:solidFill>
+                  <a:srgbClr val="1C2833"/>
+                </a:solidFill>
+                <a:latin typeface="Arial" pitchFamily="34" charset="0"/>
+                <a:ea typeface="Arial" pitchFamily="34" charset="-122"/>
+                <a:cs typeface="Arial" pitchFamily="34" charset="-120"/>
+              </a:rPr>
+              <a:t>vicāra</a:t>
+            </a:r>
+            <a:pPr algn="l" indent="0" marL="0">
+              <a:lnSpc>
+                <a:spcPts val="1620"/>
+              </a:lnSpc>
+              <a:spcAft>
+                <a:spcPts val="300"/>
+              </a:spcAft>
+              <a:buNone/>
+            </a:pPr>
+            <a:r>
+              <a:rPr lang="en-US" sz="1200" dirty="0">
+                <a:solidFill>
+                  <a:srgbClr val="1C2833"/>
+                </a:solidFill>
+                <a:latin typeface="Arial" pitchFamily="34" charset="0"/>
+                <a:ea typeface="Arial" pitchFamily="34" charset="-122"/>
+                <a:cs typeface="Arial" pitchFamily="34" charset="-120"/>
+              </a:rPr>
+              <a:t> (IAST: vicāra; lit. "inquiry, reflection") — the thinking-step that turns an observation into a question worth investigating. Every project begins with a </a:t>
+            </a:r>
+            <a:pPr algn="l" indent="0" marL="0">
+              <a:lnSpc>
+                <a:spcPts val="1620"/>
+              </a:lnSpc>
+              <a:spcAft>
+                <a:spcPts val="300"/>
+              </a:spcAft>
+              <a:buNone/>
+            </a:pPr>
+            <a:r>
+              <a:rPr lang="en-US" sz="1200" i="1" dirty="0">
+                <a:solidFill>
+                  <a:srgbClr val="1C2833"/>
+                </a:solidFill>
+                <a:latin typeface="Arial" pitchFamily="34" charset="0"/>
+                <a:ea typeface="Arial" pitchFamily="34" charset="-122"/>
+                <a:cs typeface="Arial" pitchFamily="34" charset="-120"/>
+              </a:rPr>
+              <a:t>vicāra</a:t>
+            </a:r>
+            <a:pPr algn="l" indent="0" marL="0">
+              <a:lnSpc>
+                <a:spcPts val="1620"/>
+              </a:lnSpc>
+              <a:spcAft>
+                <a:spcPts val="300"/>
+              </a:spcAft>
+              <a:buNone/>
+            </a:pPr>
+            <a:r>
+              <a:rPr lang="en-US" sz="1200" dirty="0">
+                <a:solidFill>
+                  <a:srgbClr val="1C2833"/>
+                </a:solidFill>
+                <a:latin typeface="Arial" pitchFamily="34" charset="0"/>
+                <a:ea typeface="Arial" pitchFamily="34" charset="-122"/>
+                <a:cs typeface="Arial" pitchFamily="34" charset="-120"/>
+              </a:rPr>
+              <a:t>.</a:t>
+            </a:r>
+            <a:endParaRPr lang="en-US" sz="1200" dirty="0"/>
+          </a:p>
+        </p:txBody>
+      </p:sp>
+      <p:sp>
+        <p:nvSpPr>
+          <p:cNvPr id="5" name="Text 3"/>
           <p:cNvSpPr/>
           <p:nvPr/>
         </p:nvSpPr>
@@ -3870,7 +7834,7 @@
                 <a:ea typeface="Georgia" pitchFamily="34" charset="-122"/>
                 <a:cs typeface="Georgia" pitchFamily="34" charset="-120"/>
               </a:rPr>
-              <a:t>Warm-up (5 min)</a:t>
+              <a:t>Lesson flow</a:t>
             </a:r>
             <a:endParaRPr lang="en-US" sz="1800" dirty="0"/>
           </a:p>
@@ -3879,146 +7843,6 @@
       <p:sp>
         <p:nvSpPr>
           <p:cNvPr id="4" name="Text 2"/>
-          <p:cNvSpPr/>
-          <p:nvPr/>
-        </p:nvSpPr>
-        <p:spPr>
-          <a:xfrm>
-            <a:off x="406301" y="870942"/>
-            <a:ext cx="8498026" cy="639812"/>
-          </a:xfrm>
-          <a:prstGeom prst="rect">
-            <a:avLst/>
-          </a:prstGeom>
-          <a:noFill/>
-          <a:ln/>
-        </p:spPr>
-        <p:txBody>
-          <a:bodyPr wrap="square" lIns="0" tIns="0" rIns="0" bIns="0" rtlCol="0" anchor="t"/>
-          <a:lstStyle/>
-          <a:p>
-            <a:pPr algn="l" indent="0" marL="0">
-              <a:lnSpc>
-                <a:spcPts val="1680"/>
-              </a:lnSpc>
-              <a:spcBef>
-                <a:spcPts val="300"/>
-              </a:spcBef>
-              <a:spcAft>
-                <a:spcPts val="300"/>
-              </a:spcAft>
-              <a:buNone/>
-            </a:pPr>
-            <a:r>
-              <a:rPr lang="en-US" sz="1200" dirty="0">
-                <a:solidFill>
-                  <a:srgbClr val="1C2833"/>
-                </a:solidFill>
-                <a:latin typeface="Arial" pitchFamily="34" charset="0"/>
-                <a:ea typeface="Arial" pitchFamily="34" charset="-122"/>
-                <a:cs typeface="Arial" pitchFamily="34" charset="-120"/>
-              </a:rPr>
-              <a:t>– On the board: </a:t>
-            </a:r>
-            <a:pPr algn="l" indent="0" marL="0">
-              <a:lnSpc>
-                <a:spcPts val="1680"/>
-              </a:lnSpc>
-              <a:spcBef>
-                <a:spcPts val="300"/>
-              </a:spcBef>
-              <a:spcAft>
-                <a:spcPts val="300"/>
-              </a:spcAft>
-              <a:buNone/>
-            </a:pPr>
-            <a:r>
-              <a:rPr lang="en-US" sz="1200" i="1" dirty="0">
-                <a:solidFill>
-                  <a:srgbClr val="1C2833"/>
-                </a:solidFill>
-                <a:latin typeface="Arial" pitchFamily="34" charset="0"/>
-                <a:ea typeface="Arial" pitchFamily="34" charset="-122"/>
-                <a:cs typeface="Arial" pitchFamily="34" charset="-120"/>
-              </a:rPr>
-              <a:t>"You've spent the last X months learning frameworks. Today you'll pick ONE and put it to work."</a:t>
-            </a:r>
-            <a:pPr algn="l" indent="0" marL="0">
-              <a:lnSpc>
-                <a:spcPts val="1680"/>
-              </a:lnSpc>
-              <a:spcBef>
-                <a:spcPts val="300"/>
-              </a:spcBef>
-              <a:spcAft>
-                <a:spcPts val="300"/>
-              </a:spcAft>
-              <a:buNone/>
-            </a:pPr>
-            <a:r>
-              <a:rPr lang="en-US" sz="1200" dirty="0">
-                <a:solidFill>
-                  <a:srgbClr val="1C2833"/>
-                </a:solidFill>
-                <a:latin typeface="Arial" pitchFamily="34" charset="0"/>
-                <a:ea typeface="Arial" pitchFamily="34" charset="-122"/>
-                <a:cs typeface="Arial" pitchFamily="34" charset="-120"/>
-              </a:rPr>
-              <a:t> – Daily prompt: </a:t>
-            </a:r>
-            <a:pPr algn="l" indent="0" marL="0">
-              <a:lnSpc>
-                <a:spcPts val="1680"/>
-              </a:lnSpc>
-              <a:spcBef>
-                <a:spcPts val="300"/>
-              </a:spcBef>
-              <a:spcAft>
-                <a:spcPts val="300"/>
-              </a:spcAft>
-              <a:buNone/>
-            </a:pPr>
-            <a:r>
-              <a:rPr lang="en-US" sz="1200" i="1" dirty="0">
-                <a:solidFill>
-                  <a:srgbClr val="1C2833"/>
-                </a:solidFill>
-                <a:latin typeface="Arial" pitchFamily="34" charset="0"/>
-                <a:ea typeface="Arial" pitchFamily="34" charset="-122"/>
-                <a:cs typeface="Arial" pitchFamily="34" charset="-120"/>
-              </a:rPr>
-              <a:t>"Name one framework from any prior module that stuck with you. Why?"</a:t>
-            </a:r>
-            <a:pPr algn="l" indent="0" marL="0">
-              <a:lnSpc>
-                <a:spcPts val="1680"/>
-              </a:lnSpc>
-              <a:spcBef>
-                <a:spcPts val="300"/>
-              </a:spcBef>
-              <a:spcAft>
-                <a:spcPts val="300"/>
-              </a:spcAft>
-              <a:buNone/>
-            </a:pPr>
-            <a:r>
-              <a:rPr lang="en-US" sz="1200" dirty="0">
-                <a:solidFill>
-                  <a:srgbClr val="1C2833"/>
-                </a:solidFill>
-                <a:latin typeface="Arial" pitchFamily="34" charset="0"/>
-                <a:ea typeface="Arial" pitchFamily="34" charset="-122"/>
-                <a:cs typeface="Arial" pitchFamily="34" charset="-120"/>
-              </a:rPr>
-              <a:t> — 3 students share, 30 seconds each. – This is the running theme for the module: each class opens with a 30-second share, so everyone speaks by Day 10.</a:t>
-            </a:r>
-            <a:endParaRPr lang="en-US" sz="1200" dirty="0"/>
-          </a:p>
-        </p:txBody>
-      </p:sp>
-      <p:sp>
-        <p:nvSpPr>
-          <p:cNvPr id="5" name="Text 3"/>
           <p:cNvSpPr/>
           <p:nvPr/>
         </p:nvSpPr>
@@ -4168,7 +7992,7 @@
                 <a:ea typeface="Georgia" pitchFamily="34" charset="-122"/>
                 <a:cs typeface="Georgia" pitchFamily="34" charset="-120"/>
               </a:rPr>
-              <a:t>Activity (15 min) — Shortlist + sticky note</a:t>
+              <a:t>Warm-up (5 min)</a:t>
             </a:r>
             <a:endParaRPr lang="en-US" sz="1800" dirty="0"/>
           </a:p>
@@ -4182,8 +8006,8 @@
         </p:nvSpPr>
         <p:spPr>
           <a:xfrm>
-            <a:off x="406301" y="870942"/>
-            <a:ext cx="8498026" cy="853083"/>
+            <a:off x="634901" y="883593"/>
+            <a:ext cx="8102798" cy="975122"/>
           </a:xfrm>
           <a:prstGeom prst="rect">
             <a:avLst/>
@@ -4195,17 +8019,15 @@
           <a:bodyPr wrap="square" lIns="0" tIns="0" rIns="0" bIns="0" rtlCol="0" anchor="t"/>
           <a:lstStyle/>
           <a:p>
-            <a:pPr algn="l" indent="0" marL="0">
-              <a:lnSpc>
-                <a:spcPts val="1680"/>
-              </a:lnSpc>
-              <a:spcBef>
-                <a:spcPts val="300"/>
-              </a:spcBef>
-              <a:spcAft>
-                <a:spcPts val="300"/>
-              </a:spcAft>
-              <a:buNone/>
+            <a:pPr algn="l" marL="342900" indent="-342900">
+              <a:lnSpc>
+                <a:spcPts val="1620"/>
+              </a:lnSpc>
+              <a:spcAft>
+                <a:spcPts val="300"/>
+              </a:spcAft>
+              <a:buSzPct val="100000"/>
+              <a:buChar char="•"/>
             </a:pPr>
             <a:r>
               <a:rPr lang="en-US" sz="1200" dirty="0">
@@ -4216,42 +8038,40 @@
                 <a:ea typeface="Arial" pitchFamily="34" charset="-122"/>
                 <a:cs typeface="Arial" pitchFamily="34" charset="-120"/>
               </a:rPr>
-              <a:t>– Hand out the printed menu. 2 minutes of silent reading. – 5 minutes: pair-share — "Which two are you considering? Why?" – 5 minutes: each student writes their </a:t>
-            </a:r>
-            <a:pPr algn="l" indent="0" marL="0">
-              <a:lnSpc>
-                <a:spcPts val="1680"/>
-              </a:lnSpc>
-              <a:spcBef>
-                <a:spcPts val="300"/>
-              </a:spcBef>
-              <a:spcAft>
-                <a:spcPts val="300"/>
-              </a:spcAft>
-              <a:buNone/>
-            </a:pPr>
-            <a:r>
-              <a:rPr lang="en-US" sz="1200" b="1" dirty="0">
-                <a:solidFill>
-                  <a:srgbClr val="1C2833"/>
-                </a:solidFill>
-                <a:latin typeface="Arial" pitchFamily="34" charset="0"/>
-                <a:ea typeface="Arial" pitchFamily="34" charset="-122"/>
-                <a:cs typeface="Arial" pitchFamily="34" charset="-120"/>
-              </a:rPr>
-              <a:t>top choice</a:t>
-            </a:r>
-            <a:pPr algn="l" indent="0" marL="0">
-              <a:lnSpc>
-                <a:spcPts val="1680"/>
-              </a:lnSpc>
-              <a:spcBef>
-                <a:spcPts val="300"/>
-              </a:spcBef>
-              <a:spcAft>
-                <a:spcPts val="300"/>
-              </a:spcAft>
-              <a:buNone/>
+              <a:t>On the board: </a:t>
+            </a:r>
+            <a:pPr algn="l" indent="0" marL="0">
+              <a:lnSpc>
+                <a:spcPts val="1620"/>
+              </a:lnSpc>
+              <a:spcAft>
+                <a:spcPts val="300"/>
+              </a:spcAft>
+              <a:buNone/>
+            </a:pPr>
+            <a:r>
+              <a:rPr lang="en-US" sz="1200" i="1" dirty="0">
+                <a:solidFill>
+                  <a:srgbClr val="1C2833"/>
+                </a:solidFill>
+                <a:latin typeface="Arial" pitchFamily="34" charset="0"/>
+                <a:ea typeface="Arial" pitchFamily="34" charset="-122"/>
+                <a:cs typeface="Arial" pitchFamily="34" charset="-120"/>
+              </a:rPr>
+              <a:t>"You've spent the last X months learning frameworks. Today you'll pick ONE and put it to work."</a:t>
+            </a:r>
+            <a:endParaRPr lang="en-US" sz="1200" dirty="0"/>
+          </a:p>
+          <a:p>
+            <a:pPr algn="l" marL="342900" indent="-342900">
+              <a:lnSpc>
+                <a:spcPts val="1620"/>
+              </a:lnSpc>
+              <a:spcAft>
+                <a:spcPts val="300"/>
+              </a:spcAft>
+              <a:buSzPct val="100000"/>
+              <a:buChar char="•"/>
             </a:pPr>
             <a:r>
               <a:rPr lang="en-US" sz="1200" dirty="0">
@@ -4262,38 +8082,32 @@
                 <a:ea typeface="Arial" pitchFamily="34" charset="-122"/>
                 <a:cs typeface="Arial" pitchFamily="34" charset="-120"/>
               </a:rPr>
-              <a:t> on a yellow sticky and </a:t>
-            </a:r>
-            <a:pPr algn="l" indent="0" marL="0">
-              <a:lnSpc>
-                <a:spcPts val="1680"/>
-              </a:lnSpc>
-              <a:spcBef>
-                <a:spcPts val="300"/>
-              </a:spcBef>
-              <a:spcAft>
-                <a:spcPts val="300"/>
-              </a:spcAft>
-              <a:buNone/>
-            </a:pPr>
-            <a:r>
-              <a:rPr lang="en-US" sz="1200" b="1" dirty="0">
-                <a:solidFill>
-                  <a:srgbClr val="1C2833"/>
-                </a:solidFill>
-                <a:latin typeface="Arial" pitchFamily="34" charset="0"/>
-                <a:ea typeface="Arial" pitchFamily="34" charset="-122"/>
-                <a:cs typeface="Arial" pitchFamily="34" charset="-120"/>
-              </a:rPr>
-              <a:t>second choice</a:t>
-            </a:r>
-            <a:pPr algn="l" indent="0" marL="0">
-              <a:lnSpc>
-                <a:spcPts val="1680"/>
-              </a:lnSpc>
-              <a:spcBef>
-                <a:spcPts val="300"/>
-              </a:spcBef>
+              <a:t>Daily prompt: </a:t>
+            </a:r>
+            <a:pPr algn="l" indent="0" marL="0">
+              <a:lnSpc>
+                <a:spcPts val="1620"/>
+              </a:lnSpc>
+              <a:spcAft>
+                <a:spcPts val="300"/>
+              </a:spcAft>
+              <a:buNone/>
+            </a:pPr>
+            <a:r>
+              <a:rPr lang="en-US" sz="1200" i="1" dirty="0">
+                <a:solidFill>
+                  <a:srgbClr val="1C2833"/>
+                </a:solidFill>
+                <a:latin typeface="Arial" pitchFamily="34" charset="0"/>
+                <a:ea typeface="Arial" pitchFamily="34" charset="-122"/>
+                <a:cs typeface="Arial" pitchFamily="34" charset="-120"/>
+              </a:rPr>
+              <a:t>"Name one framework from any prior module that stuck with you. Why?"</a:t>
+            </a:r>
+            <a:pPr algn="l" indent="0" marL="0">
+              <a:lnSpc>
+                <a:spcPts val="1620"/>
+              </a:lnSpc>
               <a:spcAft>
                 <a:spcPts val="300"/>
               </a:spcAft>
@@ -4308,7 +8122,31 @@
                 <a:ea typeface="Arial" pitchFamily="34" charset="-122"/>
                 <a:cs typeface="Arial" pitchFamily="34" charset="-120"/>
               </a:rPr>
-              <a:t> on a pink sticky. Both go on the chart paper at the front of the room. – 3 minutes: gallery walk. Students see the clusters that form. Teacher counts heads silently.</a:t>
+              <a:t> — 3 students share, 30 seconds each.</a:t>
+            </a:r>
+            <a:endParaRPr lang="en-US" sz="1200" dirty="0"/>
+          </a:p>
+          <a:p>
+            <a:pPr algn="l" marL="342900" indent="-342900">
+              <a:lnSpc>
+                <a:spcPts val="1620"/>
+              </a:lnSpc>
+              <a:spcAft>
+                <a:spcPts val="300"/>
+              </a:spcAft>
+              <a:buSzPct val="100000"/>
+              <a:buChar char="•"/>
+            </a:pPr>
+            <a:r>
+              <a:rPr lang="en-US" sz="1200" dirty="0">
+                <a:solidFill>
+                  <a:srgbClr val="1C2833"/>
+                </a:solidFill>
+                <a:latin typeface="Arial" pitchFamily="34" charset="0"/>
+                <a:ea typeface="Arial" pitchFamily="34" charset="-122"/>
+                <a:cs typeface="Arial" pitchFamily="34" charset="-120"/>
+              </a:rPr>
+              <a:t>This is the running theme for the module: each class opens with a 30-second share, so everyone speaks by Day 10.</a:t>
             </a:r>
             <a:endParaRPr lang="en-US" sz="1200" dirty="0"/>
           </a:p>
@@ -4466,7 +8304,7 @@
                 <a:ea typeface="Georgia" pitchFamily="34" charset="-122"/>
                 <a:cs typeface="Georgia" pitchFamily="34" charset="-120"/>
               </a:rPr>
-              <a:t>Wrap-up (5 min)</a:t>
+              <a:t>Core (20 min)</a:t>
             </a:r>
             <a:endParaRPr lang="en-US" sz="1800" dirty="0"/>
           </a:p>
@@ -4481,7 +8319,7 @@
         <p:spPr>
           <a:xfrm>
             <a:off x="634901" y="883593"/>
-            <a:ext cx="8102798" cy="693241"/>
+            <a:ext cx="8102798" cy="281880"/>
           </a:xfrm>
           <a:prstGeom prst="rect">
             <a:avLst/>
@@ -4504,15 +8342,35 @@
               <a:buChar char="•"/>
             </a:pPr>
             <a:r>
-              <a:rPr lang="en-US" sz="1200" i="1" dirty="0">
-                <a:solidFill>
-                  <a:srgbClr val="1C2833"/>
-                </a:solidFill>
-                <a:latin typeface="Arial" pitchFamily="34" charset="0"/>
-                <a:ea typeface="Arial" pitchFamily="34" charset="-122"/>
-                <a:cs typeface="Arial" pitchFamily="34" charset="-120"/>
-              </a:rPr>
-              <a:t>"Tomorrow you'll commit and write a one-page plan. Tonight: skim the project menu one more time. Look at the sources.md for the module your top choice anchors to. Don't pick what you think is impressive — pick what you're actually curious about."</a:t>
+              <a:rPr lang="en-US" sz="1200" b="1" dirty="0">
+                <a:solidFill>
+                  <a:srgbClr val="1C2833"/>
+                </a:solidFill>
+                <a:latin typeface="Arial" pitchFamily="34" charset="0"/>
+                <a:ea typeface="Arial" pitchFamily="34" charset="-122"/>
+                <a:cs typeface="Arial" pitchFamily="34" charset="-120"/>
+              </a:rPr>
+              <a:t>Why a capstone?</a:t>
+            </a:r>
+            <a:pPr algn="l" indent="0" marL="0">
+              <a:lnSpc>
+                <a:spcPts val="1620"/>
+              </a:lnSpc>
+              <a:spcAft>
+                <a:spcPts val="300"/>
+              </a:spcAft>
+              <a:buNone/>
+            </a:pPr>
+            <a:r>
+              <a:rPr lang="en-US" sz="1200" dirty="0">
+                <a:solidFill>
+                  <a:srgbClr val="1C2833"/>
+                </a:solidFill>
+                <a:latin typeface="Arial" pitchFamily="34" charset="0"/>
+                <a:ea typeface="Arial" pitchFamily="34" charset="-122"/>
+                <a:cs typeface="Arial" pitchFamily="34" charset="-120"/>
+              </a:rPr>
+              <a:t> (4 min) Three things the module does that nothing else does:</a:t>
             </a:r>
             <a:endParaRPr lang="en-US" sz="1200" dirty="0"/>
           </a:p>
@@ -4526,8 +8384,8 @@
         </p:nvSpPr>
         <p:spPr>
           <a:xfrm>
-            <a:off x="406301" y="1665684"/>
-            <a:ext cx="8498026" cy="213271"/>
+            <a:off x="634901" y="1266974"/>
+            <a:ext cx="8102798" cy="769441"/>
           </a:xfrm>
           <a:prstGeom prst="rect">
             <a:avLst/>
@@ -4539,17 +8397,15 @@
           <a:bodyPr wrap="square" lIns="0" tIns="0" rIns="0" bIns="0" rtlCol="0" anchor="t"/>
           <a:lstStyle/>
           <a:p>
-            <a:pPr algn="l" indent="0" marL="0">
-              <a:lnSpc>
-                <a:spcPts val="1680"/>
-              </a:lnSpc>
-              <a:spcBef>
-                <a:spcPts val="300"/>
-              </a:spcBef>
-              <a:spcAft>
-                <a:spcPts val="300"/>
-              </a:spcAft>
-              <a:buNone/>
+            <a:pPr algn="l" marL="342900" indent="-342900">
+              <a:lnSpc>
+                <a:spcPts val="1620"/>
+              </a:lnSpc>
+              <a:spcAft>
+                <a:spcPts val="300"/>
+              </a:spcAft>
+              <a:buSzPct val="100000"/>
+              <a:buChar char="•"/>
             </a:pPr>
             <a:r>
               <a:rPr lang="en-US" sz="1200" dirty="0">
@@ -4560,15 +8416,12 @@
                 <a:ea typeface="Arial" pitchFamily="34" charset="-122"/>
                 <a:cs typeface="Arial" pitchFamily="34" charset="-120"/>
               </a:rPr>
-              <a:t>– Exit ticket: a single sentence in their journal: </a:t>
-            </a:r>
-            <a:pPr algn="l" indent="0" marL="0">
-              <a:lnSpc>
-                <a:spcPts val="1680"/>
-              </a:lnSpc>
-              <a:spcBef>
-                <a:spcPts val="300"/>
-              </a:spcBef>
+              <a:t>It asks you to </a:t>
+            </a:r>
+            <a:pPr algn="l" indent="0" marL="0">
+              <a:lnSpc>
+                <a:spcPts val="1620"/>
+              </a:lnSpc>
               <a:spcAft>
                 <a:spcPts val="300"/>
               </a:spcAft>
@@ -4583,7 +8436,155 @@
                 <a:ea typeface="Arial" pitchFamily="34" charset="-122"/>
                 <a:cs typeface="Arial" pitchFamily="34" charset="-120"/>
               </a:rPr>
-              <a:t>"My top choice is ___ because ___."</a:t>
+              <a:t>apply</a:t>
+            </a:r>
+            <a:pPr algn="l" indent="0" marL="0">
+              <a:lnSpc>
+                <a:spcPts val="1620"/>
+              </a:lnSpc>
+              <a:spcAft>
+                <a:spcPts val="300"/>
+              </a:spcAft>
+              <a:buNone/>
+            </a:pPr>
+            <a:r>
+              <a:rPr lang="en-US" sz="1200" dirty="0">
+                <a:solidFill>
+                  <a:srgbClr val="1C2833"/>
+                </a:solidFill>
+                <a:latin typeface="Arial" pitchFamily="34" charset="0"/>
+                <a:ea typeface="Arial" pitchFamily="34" charset="-122"/>
+                <a:cs typeface="Arial" pitchFamily="34" charset="-120"/>
+              </a:rPr>
+              <a:t> a framework, not just learn it.</a:t>
+            </a:r>
+            <a:endParaRPr lang="en-US" sz="1200" dirty="0"/>
+          </a:p>
+          <a:p>
+            <a:pPr algn="l" marL="342900" indent="-342900">
+              <a:lnSpc>
+                <a:spcPts val="1620"/>
+              </a:lnSpc>
+              <a:spcAft>
+                <a:spcPts val="300"/>
+              </a:spcAft>
+              <a:buSzPct val="100000"/>
+              <a:buChar char="•"/>
+            </a:pPr>
+            <a:r>
+              <a:rPr lang="en-US" sz="1200" dirty="0">
+                <a:solidFill>
+                  <a:srgbClr val="1C2833"/>
+                </a:solidFill>
+                <a:latin typeface="Arial" pitchFamily="34" charset="0"/>
+                <a:ea typeface="Arial" pitchFamily="34" charset="-122"/>
+                <a:cs typeface="Arial" pitchFamily="34" charset="-120"/>
+              </a:rPr>
+              <a:t>It asks you to </a:t>
+            </a:r>
+            <a:pPr algn="l" indent="0" marL="0">
+              <a:lnSpc>
+                <a:spcPts val="1620"/>
+              </a:lnSpc>
+              <a:spcAft>
+                <a:spcPts val="300"/>
+              </a:spcAft>
+              <a:buNone/>
+            </a:pPr>
+            <a:r>
+              <a:rPr lang="en-US" sz="1200" i="1" dirty="0">
+                <a:solidFill>
+                  <a:srgbClr val="1C2833"/>
+                </a:solidFill>
+                <a:latin typeface="Arial" pitchFamily="34" charset="0"/>
+                <a:ea typeface="Arial" pitchFamily="34" charset="-122"/>
+                <a:cs typeface="Arial" pitchFamily="34" charset="-120"/>
+              </a:rPr>
+              <a:t>finish</a:t>
+            </a:r>
+            <a:pPr algn="l" indent="0" marL="0">
+              <a:lnSpc>
+                <a:spcPts val="1620"/>
+              </a:lnSpc>
+              <a:spcAft>
+                <a:spcPts val="300"/>
+              </a:spcAft>
+              <a:buNone/>
+            </a:pPr>
+            <a:r>
+              <a:rPr lang="en-US" sz="1200" dirty="0">
+                <a:solidFill>
+                  <a:srgbClr val="1C2833"/>
+                </a:solidFill>
+                <a:latin typeface="Arial" pitchFamily="34" charset="0"/>
+                <a:ea typeface="Arial" pitchFamily="34" charset="-122"/>
+                <a:cs typeface="Arial" pitchFamily="34" charset="-120"/>
+              </a:rPr>
+              <a:t> — not start six things and abandon them.</a:t>
+            </a:r>
+            <a:endParaRPr lang="en-US" sz="1200" dirty="0"/>
+          </a:p>
+          <a:p>
+            <a:pPr algn="l" marL="342900" indent="-342900">
+              <a:lnSpc>
+                <a:spcPts val="1620"/>
+              </a:lnSpc>
+              <a:spcAft>
+                <a:spcPts val="300"/>
+              </a:spcAft>
+              <a:buSzPct val="100000"/>
+              <a:buChar char="•"/>
+            </a:pPr>
+            <a:r>
+              <a:rPr lang="en-US" sz="1200" dirty="0">
+                <a:solidFill>
+                  <a:srgbClr val="1C2833"/>
+                </a:solidFill>
+                <a:latin typeface="Arial" pitchFamily="34" charset="0"/>
+                <a:ea typeface="Arial" pitchFamily="34" charset="-122"/>
+                <a:cs typeface="Arial" pitchFamily="34" charset="-120"/>
+              </a:rPr>
+              <a:t>It asks you to </a:t>
+            </a:r>
+            <a:pPr algn="l" indent="0" marL="0">
+              <a:lnSpc>
+                <a:spcPts val="1620"/>
+              </a:lnSpc>
+              <a:spcAft>
+                <a:spcPts val="300"/>
+              </a:spcAft>
+              <a:buNone/>
+            </a:pPr>
+            <a:r>
+              <a:rPr lang="en-US" sz="1200" i="1" dirty="0">
+                <a:solidFill>
+                  <a:srgbClr val="1C2833"/>
+                </a:solidFill>
+                <a:latin typeface="Arial" pitchFamily="34" charset="0"/>
+                <a:ea typeface="Arial" pitchFamily="34" charset="-122"/>
+                <a:cs typeface="Arial" pitchFamily="34" charset="-120"/>
+              </a:rPr>
+              <a:t>show your work</a:t>
+            </a:r>
+            <a:pPr algn="l" indent="0" marL="0">
+              <a:lnSpc>
+                <a:spcPts val="1620"/>
+              </a:lnSpc>
+              <a:spcAft>
+                <a:spcPts val="300"/>
+              </a:spcAft>
+              <a:buNone/>
+            </a:pPr>
+            <a:r>
+              <a:rPr lang="en-US" sz="1200" dirty="0">
+                <a:solidFill>
+                  <a:srgbClr val="1C2833"/>
+                </a:solidFill>
+                <a:latin typeface="Arial" pitchFamily="34" charset="0"/>
+                <a:ea typeface="Arial" pitchFamily="34" charset="-122"/>
+                <a:cs typeface="Arial" pitchFamily="34" charset="-120"/>
+              </a:rPr>
+              <a:t>, including what didn't work.</a:t>
             </a:r>
             <a:endParaRPr lang="en-US" sz="1200" dirty="0"/>
           </a:p>
@@ -4741,7 +8742,7 @@
                 <a:ea typeface="Georgia" pitchFamily="34" charset="-122"/>
                 <a:cs typeface="Georgia" pitchFamily="34" charset="-120"/>
               </a:rPr>
-              <a:t>Student-facing content</a:t>
+              <a:t>Core (20 min) (cont.)</a:t>
             </a:r>
             <a:endParaRPr lang="en-US" sz="1800" dirty="0"/>
           </a:p>
@@ -4755,61 +8756,8 @@
         </p:nvSpPr>
         <p:spPr>
           <a:xfrm>
-            <a:off x="406301" y="883593"/>
-            <a:ext cx="8331398" cy="1881187"/>
-          </a:xfrm>
-          <a:prstGeom prst="rect">
-            <a:avLst/>
-          </a:prstGeom>
-          <a:solidFill>
-            <a:srgbClr val="F4F8F9"/>
-          </a:solidFill>
-          <a:ln/>
-        </p:spPr>
-        <p:txBody>
-          <a:bodyPr wrap="square" rtlCol="0" anchor="ctr"/>
-          <a:lstStyle/>
-          <a:p>
-            <a:pPr indent="0" marL="0">
-              <a:buNone/>
-            </a:pPr>
-            <a:endParaRPr lang="en-US" dirty="0"/>
-          </a:p>
-        </p:txBody>
-      </p:sp>
-      <p:sp>
-        <p:nvSpPr>
-          <p:cNvPr id="5" name="Shape 3"/>
-          <p:cNvSpPr/>
-          <p:nvPr/>
-        </p:nvSpPr>
-        <p:spPr>
-          <a:xfrm>
-            <a:off x="434876" y="883593"/>
-            <a:ext cx="0" cy="1881187"/>
-          </a:xfrm>
-          <a:prstGeom prst="line">
-            <a:avLst/>
-          </a:prstGeom>
-          <a:noFill/>
-          <a:ln w="57150">
-            <a:solidFill>
-              <a:srgbClr val="FE4447"/>
-            </a:solidFill>
-            <a:prstDash val="solid"/>
-          </a:ln>
-        </p:spPr>
-      </p:sp>
-      <p:sp>
-        <p:nvSpPr>
-          <p:cNvPr id="6" name="Text 4"/>
-          <p:cNvSpPr/>
-          <p:nvPr/>
-        </p:nvSpPr>
-        <p:spPr>
-          <a:xfrm>
-            <a:off x="692051" y="1074093"/>
-            <a:ext cx="7973389" cy="230981"/>
+            <a:off x="406301" y="870942"/>
+            <a:ext cx="8498026" cy="426541"/>
           </a:xfrm>
           <a:prstGeom prst="rect">
             <a:avLst/>
@@ -4823,7 +8771,7 @@
           <a:p>
             <a:pPr algn="l" indent="0" marL="0">
               <a:lnSpc>
-                <a:spcPts val="1820"/>
+                <a:spcPts val="1680"/>
               </a:lnSpc>
               <a:spcBef>
                 <a:spcPts val="300"/>
@@ -4834,351 +8782,23 @@
               <a:buNone/>
             </a:pPr>
             <a:r>
-              <a:rPr lang="en-US" sz="1300" b="1" i="1" dirty="0">
-                <a:solidFill>
-                  <a:srgbClr val="1C2833"/>
-                </a:solidFill>
-                <a:latin typeface="Georgia" pitchFamily="34" charset="0"/>
-                <a:ea typeface="Georgia" pitchFamily="34" charset="-122"/>
-                <a:cs typeface="Georgia" pitchFamily="34" charset="-120"/>
-              </a:rPr>
-              <a:t>Today you'll meet the project menu and shortlist two options.</a:t>
-            </a:r>
-            <a:endParaRPr lang="en-US" sz="1300" dirty="0"/>
-          </a:p>
-        </p:txBody>
-      </p:sp>
-      <p:sp>
-        <p:nvSpPr>
-          <p:cNvPr id="7" name="Text 5"/>
-          <p:cNvSpPr/>
-          <p:nvPr/>
-        </p:nvSpPr>
-        <p:spPr>
-          <a:xfrm>
-            <a:off x="692051" y="1343174"/>
-            <a:ext cx="7973389" cy="461963"/>
-          </a:xfrm>
-          <a:prstGeom prst="rect">
-            <a:avLst/>
-          </a:prstGeom>
-          <a:noFill/>
-          <a:ln/>
-        </p:spPr>
-        <p:txBody>
-          <a:bodyPr wrap="square" lIns="0" tIns="0" rIns="0" bIns="0" rtlCol="0" anchor="t"/>
-          <a:lstStyle/>
-          <a:p>
-            <a:pPr algn="l" indent="0" marL="0">
-              <a:lnSpc>
-                <a:spcPts val="1820"/>
-              </a:lnSpc>
-              <a:spcBef>
-                <a:spcPts val="300"/>
-              </a:spcBef>
-              <a:spcAft>
-                <a:spcPts val="300"/>
-              </a:spcAft>
-              <a:buNone/>
-            </a:pPr>
-            <a:r>
-              <a:rPr lang="en-US" sz="1300" i="1" dirty="0">
-                <a:solidFill>
-                  <a:srgbClr val="1C2833"/>
-                </a:solidFill>
-                <a:latin typeface="Georgia" pitchFamily="34" charset="0"/>
-                <a:ea typeface="Georgia" pitchFamily="34" charset="-122"/>
-                <a:cs typeface="Georgia" pitchFamily="34" charset="-120"/>
-              </a:rPr>
-              <a:t>A capstone is not a final exam. It's a piece of sustained work — ten classes from question to share. You'll pick ONE project, anchored to ONE prior module, and run it from start to finish.</a:t>
-            </a:r>
-            <a:endParaRPr lang="en-US" sz="1300" dirty="0"/>
-          </a:p>
-        </p:txBody>
-      </p:sp>
-      <p:sp>
-        <p:nvSpPr>
-          <p:cNvPr id="8" name="Text 6"/>
-          <p:cNvSpPr/>
-          <p:nvPr/>
-        </p:nvSpPr>
-        <p:spPr>
-          <a:xfrm>
-            <a:off x="692051" y="1843236"/>
-            <a:ext cx="7973389" cy="461963"/>
-          </a:xfrm>
-          <a:prstGeom prst="rect">
-            <a:avLst/>
-          </a:prstGeom>
-          <a:noFill/>
-          <a:ln/>
-        </p:spPr>
-        <p:txBody>
-          <a:bodyPr wrap="square" lIns="0" tIns="0" rIns="0" bIns="0" rtlCol="0" anchor="t"/>
-          <a:lstStyle/>
-          <a:p>
-            <a:pPr algn="l" indent="0" marL="0">
-              <a:lnSpc>
-                <a:spcPts val="1820"/>
-              </a:lnSpc>
-              <a:spcBef>
-                <a:spcPts val="300"/>
-              </a:spcBef>
-              <a:spcAft>
-                <a:spcPts val="300"/>
-              </a:spcAft>
-              <a:buNone/>
-            </a:pPr>
-            <a:r>
-              <a:rPr lang="en-US" sz="1300" dirty="0">
-                <a:solidFill>
-                  <a:srgbClr val="1C2833"/>
-                </a:solidFill>
-                <a:latin typeface="Georgia" pitchFamily="34" charset="0"/>
-                <a:ea typeface="Georgia" pitchFamily="34" charset="-122"/>
-                <a:cs typeface="Georgia" pitchFamily="34" charset="-120"/>
-              </a:rPr>
-              <a:t>Two new words for this module: - </a:t>
-            </a:r>
-            <a:pPr algn="l" indent="0" marL="0">
-              <a:lnSpc>
-                <a:spcPts val="1820"/>
-              </a:lnSpc>
-              <a:spcBef>
-                <a:spcPts val="300"/>
-              </a:spcBef>
-              <a:spcAft>
-                <a:spcPts val="300"/>
-              </a:spcAft>
-              <a:buNone/>
-            </a:pPr>
-            <a:r>
-              <a:rPr lang="en-US" sz="1300" i="1" dirty="0">
-                <a:solidFill>
-                  <a:srgbClr val="1C2833"/>
-                </a:solidFill>
-                <a:latin typeface="Georgia" pitchFamily="34" charset="0"/>
-                <a:ea typeface="Georgia" pitchFamily="34" charset="-122"/>
-                <a:cs typeface="Georgia" pitchFamily="34" charset="-120"/>
-              </a:rPr>
-              <a:t>abhyāsa</a:t>
-            </a:r>
-            <a:pPr algn="l" indent="0" marL="0">
-              <a:lnSpc>
-                <a:spcPts val="1820"/>
-              </a:lnSpc>
-              <a:spcBef>
-                <a:spcPts val="300"/>
-              </a:spcBef>
-              <a:spcAft>
-                <a:spcPts val="300"/>
-              </a:spcAft>
-              <a:buNone/>
-            </a:pPr>
-            <a:r>
-              <a:rPr lang="en-US" sz="1300" dirty="0">
-                <a:solidFill>
-                  <a:srgbClr val="1C2833"/>
-                </a:solidFill>
-                <a:latin typeface="Georgia" pitchFamily="34" charset="0"/>
-                <a:ea typeface="Georgia" pitchFamily="34" charset="-122"/>
-                <a:cs typeface="Georgia" pitchFamily="34" charset="-120"/>
-              </a:rPr>
-              <a:t> — repeated practice; what turns a draft into a finished piece. - </a:t>
-            </a:r>
-            <a:pPr algn="l" indent="0" marL="0">
-              <a:lnSpc>
-                <a:spcPts val="1820"/>
-              </a:lnSpc>
-              <a:spcBef>
-                <a:spcPts val="300"/>
-              </a:spcBef>
-              <a:spcAft>
-                <a:spcPts val="300"/>
-              </a:spcAft>
-              <a:buNone/>
-            </a:pPr>
-            <a:r>
-              <a:rPr lang="en-US" sz="1300" i="1" dirty="0">
-                <a:solidFill>
-                  <a:srgbClr val="1C2833"/>
-                </a:solidFill>
-                <a:latin typeface="Georgia" pitchFamily="34" charset="0"/>
-                <a:ea typeface="Georgia" pitchFamily="34" charset="-122"/>
-                <a:cs typeface="Georgia" pitchFamily="34" charset="-120"/>
-              </a:rPr>
-              <a:t>vicāra</a:t>
-            </a:r>
-            <a:pPr algn="l" indent="0" marL="0">
-              <a:lnSpc>
-                <a:spcPts val="1820"/>
-              </a:lnSpc>
-              <a:spcBef>
-                <a:spcPts val="300"/>
-              </a:spcBef>
-              <a:spcAft>
-                <a:spcPts val="300"/>
-              </a:spcAft>
-              <a:buNone/>
-            </a:pPr>
-            <a:r>
-              <a:rPr lang="en-US" sz="1300" dirty="0">
-                <a:solidFill>
-                  <a:srgbClr val="1C2833"/>
-                </a:solidFill>
-                <a:latin typeface="Georgia" pitchFamily="34" charset="0"/>
-                <a:ea typeface="Georgia" pitchFamily="34" charset="-122"/>
-                <a:cs typeface="Georgia" pitchFamily="34" charset="-120"/>
-              </a:rPr>
-              <a:t> — inquiry, reflection; what turns an observation into a question.</a:t>
-            </a:r>
-            <a:endParaRPr lang="en-US" sz="1300" dirty="0"/>
-          </a:p>
-        </p:txBody>
-      </p:sp>
-      <p:sp>
-        <p:nvSpPr>
-          <p:cNvPr id="9" name="Text 7"/>
-          <p:cNvSpPr/>
-          <p:nvPr/>
-        </p:nvSpPr>
-        <p:spPr>
-          <a:xfrm>
-            <a:off x="692051" y="2343299"/>
-            <a:ext cx="7973389" cy="230981"/>
-          </a:xfrm>
-          <a:prstGeom prst="rect">
-            <a:avLst/>
-          </a:prstGeom>
-          <a:noFill/>
-          <a:ln/>
-        </p:spPr>
-        <p:txBody>
-          <a:bodyPr wrap="square" lIns="0" tIns="0" rIns="0" bIns="0" rtlCol="0" anchor="t"/>
-          <a:lstStyle/>
-          <a:p>
-            <a:pPr algn="l" indent="0" marL="0">
-              <a:lnSpc>
-                <a:spcPts val="1820"/>
-              </a:lnSpc>
-              <a:spcBef>
-                <a:spcPts val="300"/>
-              </a:spcBef>
-              <a:spcAft>
-                <a:spcPts val="300"/>
-              </a:spcAft>
-              <a:buNone/>
-            </a:pPr>
-            <a:r>
-              <a:rPr lang="en-US" sz="1300" dirty="0">
-                <a:solidFill>
-                  <a:srgbClr val="1C2833"/>
-                </a:solidFill>
-                <a:latin typeface="Georgia" pitchFamily="34" charset="0"/>
-                <a:ea typeface="Georgia" pitchFamily="34" charset="-122"/>
-                <a:cs typeface="Georgia" pitchFamily="34" charset="-120"/>
-              </a:rPr>
-              <a:t>A capstone is </a:t>
-            </a:r>
-            <a:pPr algn="l" indent="0" marL="0">
-              <a:lnSpc>
-                <a:spcPts val="1820"/>
-              </a:lnSpc>
-              <a:spcBef>
-                <a:spcPts val="300"/>
-              </a:spcBef>
-              <a:spcAft>
-                <a:spcPts val="300"/>
-              </a:spcAft>
-              <a:buNone/>
-            </a:pPr>
-            <a:r>
-              <a:rPr lang="en-US" sz="1300" i="1" dirty="0">
-                <a:solidFill>
-                  <a:srgbClr val="1C2833"/>
-                </a:solidFill>
-                <a:latin typeface="Georgia" pitchFamily="34" charset="0"/>
-                <a:ea typeface="Georgia" pitchFamily="34" charset="-122"/>
-                <a:cs typeface="Georgia" pitchFamily="34" charset="-120"/>
-              </a:rPr>
-              <a:t>abhyāsa</a:t>
-            </a:r>
-            <a:pPr algn="l" indent="0" marL="0">
-              <a:lnSpc>
-                <a:spcPts val="1820"/>
-              </a:lnSpc>
-              <a:spcBef>
-                <a:spcPts val="300"/>
-              </a:spcBef>
-              <a:spcAft>
-                <a:spcPts val="300"/>
-              </a:spcAft>
-              <a:buNone/>
-            </a:pPr>
-            <a:r>
-              <a:rPr lang="en-US" sz="1300" dirty="0">
-                <a:solidFill>
-                  <a:srgbClr val="1C2833"/>
-                </a:solidFill>
-                <a:latin typeface="Georgia" pitchFamily="34" charset="0"/>
-                <a:ea typeface="Georgia" pitchFamily="34" charset="-122"/>
-                <a:cs typeface="Georgia" pitchFamily="34" charset="-120"/>
-              </a:rPr>
-              <a:t> applied to a </a:t>
-            </a:r>
-            <a:pPr algn="l" indent="0" marL="0">
-              <a:lnSpc>
-                <a:spcPts val="1820"/>
-              </a:lnSpc>
-              <a:spcBef>
-                <a:spcPts val="300"/>
-              </a:spcBef>
-              <a:spcAft>
-                <a:spcPts val="300"/>
-              </a:spcAft>
-              <a:buNone/>
-            </a:pPr>
-            <a:r>
-              <a:rPr lang="en-US" sz="1300" i="1" dirty="0">
-                <a:solidFill>
-                  <a:srgbClr val="1C2833"/>
-                </a:solidFill>
-                <a:latin typeface="Georgia" pitchFamily="34" charset="0"/>
-                <a:ea typeface="Georgia" pitchFamily="34" charset="-122"/>
-                <a:cs typeface="Georgia" pitchFamily="34" charset="-120"/>
-              </a:rPr>
-              <a:t>vicāra</a:t>
-            </a:r>
-            <a:pPr algn="l" indent="0" marL="0">
-              <a:lnSpc>
-                <a:spcPts val="1820"/>
-              </a:lnSpc>
-              <a:spcBef>
-                <a:spcPts val="300"/>
-              </a:spcBef>
-              <a:spcAft>
-                <a:spcPts val="300"/>
-              </a:spcAft>
-              <a:buNone/>
-            </a:pPr>
-            <a:r>
-              <a:rPr lang="en-US" sz="1300" dirty="0">
-                <a:solidFill>
-                  <a:srgbClr val="1C2833"/>
-                </a:solidFill>
-                <a:latin typeface="Georgia" pitchFamily="34" charset="0"/>
-                <a:ea typeface="Georgia" pitchFamily="34" charset="-122"/>
-                <a:cs typeface="Georgia" pitchFamily="34" charset="-120"/>
-              </a:rPr>
-              <a:t>.</a:t>
-            </a:r>
-            <a:endParaRPr lang="en-US" sz="1300" dirty="0"/>
-          </a:p>
-        </p:txBody>
-      </p:sp>
-      <p:sp>
-        <p:nvSpPr>
-          <p:cNvPr id="10" name="Text 8"/>
+              <a:rPr lang="en-US" sz="1200" dirty="0">
+                <a:solidFill>
+                  <a:srgbClr val="1C2833"/>
+                </a:solidFill>
+                <a:latin typeface="Arial" pitchFamily="34" charset="0"/>
+                <a:ea typeface="Arial" pitchFamily="34" charset="-122"/>
+                <a:cs typeface="Arial" pitchFamily="34" charset="-120"/>
+              </a:rPr>
+              <a:t>"Many of you have done short activities in earlier modules. This is different. You'll spend ten classes on one piece of work, and the world will see the result."</a:t>
+            </a:r>
+            <a:endParaRPr lang="en-US" sz="1200" dirty="0"/>
+          </a:p>
+        </p:txBody>
+      </p:sp>
+      <p:sp>
+        <p:nvSpPr>
+          <p:cNvPr id="5" name="Text 3"/>
           <p:cNvSpPr/>
           <p:nvPr/>
         </p:nvSpPr>
@@ -5328,7 +8948,7 @@
                 <a:ea typeface="Georgia" pitchFamily="34" charset="-122"/>
                 <a:cs typeface="Georgia" pitchFamily="34" charset="-120"/>
               </a:rPr>
-              <a:t>Homework</a:t>
+              <a:t>Core (20 min) (cont.)</a:t>
             </a:r>
             <a:endParaRPr lang="en-US" sz="1800" dirty="0"/>
           </a:p>
@@ -5342,8 +8962,8 @@
         </p:nvSpPr>
         <p:spPr>
           <a:xfrm>
-            <a:off x="406301" y="870942"/>
-            <a:ext cx="8498026" cy="436066"/>
+            <a:off x="634901" y="883593"/>
+            <a:ext cx="8102798" cy="281880"/>
           </a:xfrm>
           <a:prstGeom prst="rect">
             <a:avLst/>
@@ -5355,6 +8975,166 @@
           <a:bodyPr wrap="square" lIns="0" tIns="0" rIns="0" bIns="0" rtlCol="0" anchor="t"/>
           <a:lstStyle/>
           <a:p>
+            <a:pPr algn="l" marL="342900" indent="-342900">
+              <a:lnSpc>
+                <a:spcPts val="1620"/>
+              </a:lnSpc>
+              <a:spcAft>
+                <a:spcPts val="300"/>
+              </a:spcAft>
+              <a:buSzPct val="100000"/>
+              <a:buChar char="•"/>
+            </a:pPr>
+            <a:r>
+              <a:rPr lang="en-US" sz="1200" b="1" dirty="0">
+                <a:solidFill>
+                  <a:srgbClr val="1C2833"/>
+                </a:solidFill>
+                <a:latin typeface="Arial" pitchFamily="34" charset="0"/>
+                <a:ea typeface="Arial" pitchFamily="34" charset="-122"/>
+                <a:cs typeface="Arial" pitchFamily="34" charset="-120"/>
+              </a:rPr>
+              <a:t>Tour the menu</a:t>
+            </a:r>
+            <a:pPr algn="l" indent="0" marL="0">
+              <a:lnSpc>
+                <a:spcPts val="1620"/>
+              </a:lnSpc>
+              <a:spcAft>
+                <a:spcPts val="300"/>
+              </a:spcAft>
+              <a:buNone/>
+            </a:pPr>
+            <a:r>
+              <a:rPr lang="en-US" sz="1200" dirty="0">
+                <a:solidFill>
+                  <a:srgbClr val="1C2833"/>
+                </a:solidFill>
+                <a:latin typeface="Arial" pitchFamily="34" charset="0"/>
+                <a:ea typeface="Arial" pitchFamily="34" charset="-122"/>
+                <a:cs typeface="Arial" pitchFamily="34" charset="-120"/>
+              </a:rPr>
+              <a:t> (12 min) — walk through all 10 options, ~70 seconds each. For each, name:</a:t>
+            </a:r>
+            <a:endParaRPr lang="en-US" sz="1200" dirty="0"/>
+          </a:p>
+        </p:txBody>
+      </p:sp>
+      <p:sp>
+        <p:nvSpPr>
+          <p:cNvPr id="5" name="Text 3"/>
+          <p:cNvSpPr/>
+          <p:nvPr/>
+        </p:nvSpPr>
+        <p:spPr>
+          <a:xfrm>
+            <a:off x="634901" y="1266974"/>
+            <a:ext cx="8102798" cy="769441"/>
+          </a:xfrm>
+          <a:prstGeom prst="rect">
+            <a:avLst/>
+          </a:prstGeom>
+          <a:noFill/>
+          <a:ln/>
+        </p:spPr>
+        <p:txBody>
+          <a:bodyPr wrap="square" lIns="0" tIns="0" rIns="0" bIns="0" rtlCol="0" anchor="t"/>
+          <a:lstStyle/>
+          <a:p>
+            <a:pPr algn="l" marL="342900" indent="-342900">
+              <a:lnSpc>
+                <a:spcPts val="1620"/>
+              </a:lnSpc>
+              <a:spcAft>
+                <a:spcPts val="300"/>
+              </a:spcAft>
+              <a:buSzPct val="100000"/>
+              <a:buChar char="•"/>
+            </a:pPr>
+            <a:r>
+              <a:rPr lang="en-US" sz="1200" dirty="0">
+                <a:solidFill>
+                  <a:srgbClr val="1C2833"/>
+                </a:solidFill>
+                <a:latin typeface="Arial" pitchFamily="34" charset="0"/>
+                <a:ea typeface="Arial" pitchFamily="34" charset="-122"/>
+                <a:cs typeface="Arial" pitchFamily="34" charset="-120"/>
+              </a:rPr>
+              <a:t>the project,</a:t>
+            </a:r>
+            <a:endParaRPr lang="en-US" sz="1200" dirty="0"/>
+          </a:p>
+          <a:p>
+            <a:pPr algn="l" marL="342900" indent="-342900">
+              <a:lnSpc>
+                <a:spcPts val="1620"/>
+              </a:lnSpc>
+              <a:spcAft>
+                <a:spcPts val="300"/>
+              </a:spcAft>
+              <a:buSzPct val="100000"/>
+              <a:buChar char="•"/>
+            </a:pPr>
+            <a:r>
+              <a:rPr lang="en-US" sz="1200" dirty="0">
+                <a:solidFill>
+                  <a:srgbClr val="1C2833"/>
+                </a:solidFill>
+                <a:latin typeface="Arial" pitchFamily="34" charset="0"/>
+                <a:ea typeface="Arial" pitchFamily="34" charset="-122"/>
+                <a:cs typeface="Arial" pitchFamily="34" charset="-120"/>
+              </a:rPr>
+              <a:t>the prior module it anchors to,</a:t>
+            </a:r>
+            <a:endParaRPr lang="en-US" sz="1200" dirty="0"/>
+          </a:p>
+          <a:p>
+            <a:pPr algn="l" marL="342900" indent="-342900">
+              <a:lnSpc>
+                <a:spcPts val="1620"/>
+              </a:lnSpc>
+              <a:spcAft>
+                <a:spcPts val="300"/>
+              </a:spcAft>
+              <a:buSzPct val="100000"/>
+              <a:buChar char="•"/>
+            </a:pPr>
+            <a:r>
+              <a:rPr lang="en-US" sz="1200" dirty="0">
+                <a:solidFill>
+                  <a:srgbClr val="1C2833"/>
+                </a:solidFill>
+                <a:latin typeface="Arial" pitchFamily="34" charset="0"/>
+                <a:ea typeface="Arial" pitchFamily="34" charset="-122"/>
+                <a:cs typeface="Arial" pitchFamily="34" charset="-120"/>
+              </a:rPr>
+              <a:t>one realistic-scope example.</a:t>
+            </a:r>
+            <a:endParaRPr lang="en-US" sz="1200" dirty="0"/>
+          </a:p>
+        </p:txBody>
+      </p:sp>
+      <p:sp>
+        <p:nvSpPr>
+          <p:cNvPr id="6" name="Text 4"/>
+          <p:cNvSpPr/>
+          <p:nvPr/>
+        </p:nvSpPr>
+        <p:spPr>
+          <a:xfrm>
+            <a:off x="406301" y="2125266"/>
+            <a:ext cx="8498026" cy="213271"/>
+          </a:xfrm>
+          <a:prstGeom prst="rect">
+            <a:avLst/>
+          </a:prstGeom>
+          <a:noFill/>
+          <a:ln/>
+        </p:spPr>
+        <p:txBody>
+          <a:bodyPr wrap="square" lIns="0" tIns="0" rIns="0" bIns="0" rtlCol="0" anchor="t"/>
+          <a:lstStyle/>
+          <a:p>
             <a:pPr algn="l" indent="0" marL="0">
               <a:lnSpc>
                 <a:spcPts val="1680"/>
@@ -5368,107 +9148,15 @@
               <a:buNone/>
             </a:pPr>
             <a:r>
-              <a:rPr lang="en-US" sz="1200" dirty="0">
-                <a:solidFill>
-                  <a:srgbClr val="1C2833"/>
-                </a:solidFill>
-                <a:latin typeface="Arial" pitchFamily="34" charset="0"/>
-                <a:ea typeface="Arial" pitchFamily="34" charset="-122"/>
-                <a:cs typeface="Arial" pitchFamily="34" charset="-120"/>
-              </a:rPr>
-              <a:t>– Skim the menu one more time at home. – Open the </a:t>
-            </a:r>
-            <a:pPr algn="l" indent="0" marL="0">
-              <a:lnSpc>
-                <a:spcPts val="1680"/>
-              </a:lnSpc>
-              <a:spcBef>
-                <a:spcPts val="300"/>
-              </a:spcBef>
-              <a:spcAft>
-                <a:spcPts val="300"/>
-              </a:spcAft>
-              <a:buNone/>
-            </a:pPr>
-            <a:r>
-              <a:rPr lang="en-US" sz="1200" dirty="0">
-                <a:solidFill>
-                  <a:srgbClr val="1C2833"/>
-                </a:solidFill>
-                <a:latin typeface="Arial" pitchFamily="34" charset="0"/>
-                <a:ea typeface="Arial" pitchFamily="34" charset="-122"/>
-                <a:cs typeface="Arial" pitchFamily="34" charset="-120"/>
-              </a:rPr>
-              <a:t>sources.md</a:t>
-            </a:r>
-            <a:pPr algn="l" indent="0" marL="0">
-              <a:lnSpc>
-                <a:spcPts val="1680"/>
-              </a:lnSpc>
-              <a:spcBef>
-                <a:spcPts val="300"/>
-              </a:spcBef>
-              <a:spcAft>
-                <a:spcPts val="300"/>
-              </a:spcAft>
-              <a:buNone/>
-            </a:pPr>
-            <a:r>
-              <a:rPr lang="en-US" sz="1200" dirty="0">
-                <a:solidFill>
-                  <a:srgbClr val="1C2833"/>
-                </a:solidFill>
-                <a:latin typeface="Arial" pitchFamily="34" charset="0"/>
-                <a:ea typeface="Arial" pitchFamily="34" charset="-122"/>
-                <a:cs typeface="Arial" pitchFamily="34" charset="-120"/>
-              </a:rPr>
-              <a:t> of the prior module your top choice anchors to (or ask a parent to help locate it). – Bring your </a:t>
-            </a:r>
-            <a:pPr algn="l" indent="0" marL="0">
-              <a:lnSpc>
-                <a:spcPts val="1680"/>
-              </a:lnSpc>
-              <a:spcBef>
-                <a:spcPts val="300"/>
-              </a:spcBef>
-              <a:spcAft>
-                <a:spcPts val="300"/>
-              </a:spcAft>
-              <a:buNone/>
-            </a:pPr>
-            <a:r>
-              <a:rPr lang="en-US" sz="1200" b="1" dirty="0">
-                <a:solidFill>
-                  <a:srgbClr val="1C2833"/>
-                </a:solidFill>
-                <a:latin typeface="Arial" pitchFamily="34" charset="0"/>
-                <a:ea typeface="Arial" pitchFamily="34" charset="-122"/>
-                <a:cs typeface="Arial" pitchFamily="34" charset="-120"/>
-              </a:rPr>
-              <a:t>two shortlisted options</a:t>
-            </a:r>
-            <a:pPr algn="l" indent="0" marL="0">
-              <a:lnSpc>
-                <a:spcPts val="1680"/>
-              </a:lnSpc>
-              <a:spcBef>
-                <a:spcPts val="300"/>
-              </a:spcBef>
-              <a:spcAft>
-                <a:spcPts val="300"/>
-              </a:spcAft>
-              <a:buNone/>
-            </a:pPr>
-            <a:r>
-              <a:rPr lang="en-US" sz="1200" dirty="0">
-                <a:solidFill>
-                  <a:srgbClr val="1C2833"/>
-                </a:solidFill>
-                <a:latin typeface="Arial" pitchFamily="34" charset="0"/>
-                <a:ea typeface="Arial" pitchFamily="34" charset="-122"/>
-                <a:cs typeface="Arial" pitchFamily="34" charset="-120"/>
-              </a:rPr>
-              <a:t> in writing tomorrow.</a:t>
+              <a:rPr lang="en-US" sz="1200" i="1" dirty="0">
+                <a:solidFill>
+                  <a:srgbClr val="1C2833"/>
+                </a:solidFill>
+                <a:latin typeface="Arial" pitchFamily="34" charset="0"/>
+                <a:ea typeface="Arial" pitchFamily="34" charset="-122"/>
+                <a:cs typeface="Arial" pitchFamily="34" charset="-120"/>
+              </a:rPr>
+              <a:t>Examples to give for each:</a:t>
             </a:r>
             <a:endParaRPr lang="en-US" sz="1200" dirty="0"/>
           </a:p>
@@ -5476,7 +9164,7 @@
       </p:sp>
       <p:sp>
         <p:nvSpPr>
-          <p:cNvPr id="5" name="Text 3"/>
+          <p:cNvPr id="7" name="Text 5"/>
           <p:cNvSpPr/>
           <p:nvPr/>
         </p:nvSpPr>
